--- a/public/Relatorio_Atividade_2_Slides.pptx
+++ b/public/Relatorio_Atividade_2_Slides.pptx
@@ -5099,6 +5099,20 @@
               </a:defRPr>
             </a:pPr>
             <a:r>
+              <a:t>• LENNON, John. Imagine. In: Imagine. Produção: John Lennon, Yoko Ono, Phil Spector. Ascot Sound Studios: Apple Records, 1971. 1 faixa musical (3 min 3 s). Uso pedagógico e cultural.</a:t>
+            </a:r>
+          </a:p>
+          <a:p>
+            <a:br/>
+            <a:pPr>
+              <a:defRPr sz="950">
+                <a:solidFill>
+                  <a:srgbClr val="64748B"/>
+                </a:solidFill>
+                <a:latin typeface="Arial"/>
+              </a:defRPr>
+            </a:pPr>
+            <a:r>
               <a:t>• MDN WEB DOCS. Fetch API. Mozilla Developer Network, 2026. Disponível em: &lt;https://developer.mozilla.org/pt-BR/docs/Web/API/Fetch_API&gt;. Acesso em: 17 set. 2026.</a:t>
             </a:r>
           </a:p>
@@ -6558,7 +6572,7 @@
               </a:defRPr>
             </a:pPr>
             <a:r>
-              <a:t>A Música que Conecta Gerações</a:t>
+              <a:t>A Música que Conecta Gerações (Imagine — John Lennon, 1971)</a:t>
             </a:r>
           </a:p>
           <a:p>
@@ -6572,7 +6586,7 @@
               </a:defRPr>
             </a:pPr>
             <a:r>
-              <a:t>Nenhum projeto comunitário vive só de botões; ele vive de sentimento. O componente PlayerAudio.jsx traz a música 'Imagine' como pano de fundo de esperança.</a:t>
+              <a:t>Nenhum projeto comunitário vive só de botões; ele vive de sentimento. O componente PlayerAudio.jsx traz a clássica canção 'Imagine' de John Lennon (1971) como trilha sonora de paz e união, executada para fins pedagógicos e culturais.</a:t>
             </a:r>
           </a:p>
           <a:p>

--- a/public/Relatorio_Atividade_2_Slides.pptx
+++ b/public/Relatorio_Atividade_2_Slides.pptx
@@ -3151,8 +3151,8 @@
         </p:nvSpPr>
         <p:spPr>
           <a:xfrm>
-            <a:off x="1371600" y="731520"/>
-            <a:ext cx="9448495" cy="457200"/>
+            <a:off x="2011680" y="685800"/>
+            <a:ext cx="8168335" cy="438912"/>
           </a:xfrm>
           <a:prstGeom prst="roundRect">
             <a:avLst/>
@@ -3160,7 +3160,7 @@
           <a:solidFill>
             <a:srgbClr val="0F3D24"/>
           </a:solidFill>
-          <a:ln>
+          <a:ln w="15240">
             <a:solidFill>
               <a:srgbClr val="10B981"/>
             </a:solidFill>
@@ -3181,7 +3181,7 @@
           </a:fontRef>
         </p:style>
         <p:txBody>
-          <a:bodyPr rtlCol="0" anchor="ctr"/>
+          <a:bodyPr rtlCol="0" anchor="ctr" tIns="73152"/>
           <a:lstStyle/>
           <a:p>
             <a:pPr algn="ctr">
@@ -3189,11 +3189,11 @@
                 <a:solidFill>
                   <a:srgbClr val="10B981"/>
                 </a:solidFill>
-                <a:latin typeface="Arial"/>
-              </a:defRPr>
-            </a:pPr>
-            <a:r>
-              <a:t>UNIVERSIDADE ESTADUAL DO MARANHÃO — UEMA | POLO DE TIMBIRAS</a:t>
+                <a:latin typeface="Segoe UI"/>
+              </a:defRPr>
+            </a:pPr>
+            <a:r>
+              <a:t>UNIVERSIDADE ESTADUAL DO MARANHÃO — UEMA</a:t>
             </a:r>
           </a:p>
         </p:txBody>
@@ -3206,7 +3206,7 @@
         </p:nvSpPr>
         <p:spPr>
           <a:xfrm>
-            <a:off x="1371600" y="1280160"/>
+            <a:off x="1371600" y="1234440"/>
             <a:ext cx="9448495" cy="457200"/>
           </a:xfrm>
           <a:prstGeom prst="rect">
@@ -3225,11 +3225,11 @@
                 <a:solidFill>
                   <a:srgbClr val="CBD5E1"/>
                 </a:solidFill>
-                <a:latin typeface="Arial"/>
-              </a:defRPr>
-            </a:pPr>
-            <a:r>
-              <a:t>CST em Análise e Desenvolvimento de Sistemas | Disciplina: Desenvolvimento Web | Nota 2</a:t>
+                <a:latin typeface="Segoe UI"/>
+              </a:defRPr>
+            </a:pPr>
+            <a:r>
+              <a:t>CST em Análise e Desenvolvimento de Sistemas  |  Desenvolvimento Web  |  Nota 2</a:t>
             </a:r>
           </a:p>
         </p:txBody>
@@ -3242,8 +3242,8 @@
         </p:nvSpPr>
         <p:spPr>
           <a:xfrm>
-            <a:off x="1371600" y="1920240"/>
-            <a:ext cx="9448495" cy="1280160"/>
+            <a:off x="1371600" y="1874519"/>
+            <a:ext cx="9448495" cy="1188720"/>
           </a:xfrm>
           <a:prstGeom prst="rect">
             <a:avLst/>
@@ -3257,11 +3257,11 @@
           <a:lstStyle/>
           <a:p>
             <a:pPr algn="ctr">
-              <a:defRPr sz="4400" b="1">
-                <a:solidFill>
-                  <a:srgbClr val="10B981"/>
-                </a:solidFill>
-                <a:latin typeface="Arial"/>
+              <a:defRPr sz="4600" b="1">
+                <a:solidFill>
+                  <a:srgbClr val="4ADE80"/>
+                </a:solidFill>
+                <a:latin typeface="Segoe UI"/>
               </a:defRPr>
             </a:pPr>
             <a:r>
@@ -3278,8 +3278,8 @@
         </p:nvSpPr>
         <p:spPr>
           <a:xfrm>
-            <a:off x="1371600" y="3291840"/>
-            <a:ext cx="9448495" cy="914400"/>
+            <a:off x="1645920" y="3154680"/>
+            <a:ext cx="8899855" cy="1005840"/>
           </a:xfrm>
           <a:prstGeom prst="rect">
             <a:avLst/>
@@ -3293,11 +3293,11 @@
           <a:lstStyle/>
           <a:p>
             <a:pPr algn="ctr">
-              <a:defRPr sz="1800">
-                <a:solidFill>
-                  <a:srgbClr val="FFFFFF"/>
-                </a:solidFill>
-                <a:latin typeface="Arial"/>
+              <a:defRPr sz="1700">
+                <a:solidFill>
+                  <a:srgbClr val="F1F5F9"/>
+                </a:solidFill>
+                <a:latin typeface="Segoe UI"/>
               </a:defRPr>
             </a:pPr>
             <a:r>
@@ -3314,8 +3314,8 @@
         </p:nvSpPr>
         <p:spPr>
           <a:xfrm>
-            <a:off x="1371600" y="4572000"/>
-            <a:ext cx="9448495" cy="1463040"/>
+            <a:off x="1645920" y="4434840"/>
+            <a:ext cx="8899855" cy="1600200"/>
           </a:xfrm>
           <a:prstGeom prst="roundRect">
             <a:avLst/>
@@ -3323,9 +3323,9 @@
           <a:solidFill>
             <a:srgbClr val="0C321D"/>
           </a:solidFill>
-          <a:ln>
+          <a:ln w="19050">
             <a:solidFill>
-              <a:srgbClr val="14532D"/>
+              <a:srgbClr val="166534"/>
             </a:solidFill>
           </a:ln>
         </p:spPr>
@@ -3344,19 +3344,19 @@
           </a:fontRef>
         </p:style>
         <p:txBody>
-          <a:bodyPr rtlCol="0" anchor="ctr"/>
+          <a:bodyPr rtlCol="0" anchor="ctr" tIns="182880"/>
           <a:lstStyle/>
           <a:p>
             <a:pPr algn="ctr">
-              <a:defRPr sz="1400" b="1">
-                <a:solidFill>
-                  <a:srgbClr val="10B981"/>
-                </a:solidFill>
-                <a:latin typeface="Arial"/>
-              </a:defRPr>
-            </a:pPr>
-            <a:r>
-              <a:t>EQUIPE TIMBIRANOS:</a:t>
+              <a:defRPr sz="1300" b="1">
+                <a:solidFill>
+                  <a:srgbClr val="4ADE80"/>
+                </a:solidFill>
+                <a:latin typeface="Segoe UI"/>
+              </a:defRPr>
+            </a:pPr>
+            <a:r>
+              <a:t>EQUIPE TIMBIRANOS</a:t>
             </a:r>
           </a:p>
           <a:p>
@@ -3365,7 +3365,7 @@
                 <a:solidFill>
                   <a:srgbClr val="FFFFFF"/>
                 </a:solidFill>
-                <a:latin typeface="Arial"/>
+                <a:latin typeface="Segoe UI"/>
               </a:defRPr>
             </a:pPr>
             <a:r>
@@ -3376,13 +3376,13 @@
             <a:pPr algn="ctr">
               <a:defRPr sz="1200">
                 <a:solidFill>
-                  <a:srgbClr val="CBD5E1"/>
-                </a:solidFill>
-                <a:latin typeface="Arial"/>
-              </a:defRPr>
-            </a:pPr>
-            <a:r>
-              <a:t>Polo Universitário de Timbiras — Maranhão | 2026</a:t>
+                  <a:srgbClr val="94A3B8"/>
+                </a:solidFill>
+                <a:latin typeface="Segoe UI"/>
+              </a:defRPr>
+            </a:pPr>
+            <a:r>
+              <a:t>Polo Universitário de Timbiras — Maranhão  |  2026</a:t>
             </a:r>
           </a:p>
         </p:txBody>
@@ -3413,8 +3413,8 @@
         </p:nvSpPr>
         <p:spPr>
           <a:xfrm>
-            <a:off x="548640" y="365760"/>
-            <a:ext cx="8686800" cy="731520"/>
+            <a:off x="731520" y="365760"/>
+            <a:ext cx="8412480" cy="685800"/>
           </a:xfrm>
           <a:prstGeom prst="rect">
             <a:avLst/>
@@ -3428,11 +3428,11 @@
           <a:lstStyle/>
           <a:p>
             <a:pPr>
-              <a:defRPr sz="2200" b="1">
+              <a:defRPr sz="2100" b="1">
                 <a:solidFill>
                   <a:srgbClr val="00873E"/>
                 </a:solidFill>
-                <a:latin typeface="Arial"/>
+                <a:latin typeface="Segoe UI"/>
               </a:defRPr>
             </a:pPr>
             <a:r>
@@ -3449,8 +3449,8 @@
         </p:nvSpPr>
         <p:spPr>
           <a:xfrm>
-            <a:off x="9326880" y="411480"/>
-            <a:ext cx="2286000" cy="365760"/>
+            <a:off x="9235440" y="411480"/>
+            <a:ext cx="2194560" cy="347472"/>
           </a:xfrm>
           <a:prstGeom prst="roundRect">
             <a:avLst/>
@@ -3458,7 +3458,7 @@
           <a:solidFill>
             <a:srgbClr val="F8FAFC"/>
           </a:solidFill>
-          <a:ln>
+          <a:ln w="12700">
             <a:solidFill>
               <a:srgbClr val="E2E8F0"/>
             </a:solidFill>
@@ -3479,19 +3479,19 @@
           </a:fontRef>
         </p:style>
         <p:txBody>
-          <a:bodyPr rtlCol="0" anchor="ctr" wrap="none"/>
+          <a:bodyPr rtlCol="0" anchor="ctr" tIns="54864"/>
           <a:lstStyle/>
           <a:p>
             <a:pPr algn="ctr">
-              <a:defRPr sz="1100" b="1">
+              <a:defRPr sz="1000" b="1">
                 <a:solidFill>
                   <a:srgbClr val="64748B"/>
                 </a:solidFill>
-                <a:latin typeface="Arial"/>
-              </a:defRPr>
-            </a:pPr>
-            <a:r>
-              <a:t>Evidências Reais</a:t>
+                <a:latin typeface="Segoe UI"/>
+              </a:defRPr>
+            </a:pPr>
+            <a:r>
+              <a:t>EVIDÊNCIAS REAIS</a:t>
             </a:r>
           </a:p>
         </p:txBody>
@@ -3504,8 +3504,8 @@
         </p:nvSpPr>
         <p:spPr>
           <a:xfrm>
-            <a:off x="548640" y="1097280"/>
-            <a:ext cx="11094415" cy="18288"/>
+            <a:off x="731520" y="1051560"/>
+            <a:ext cx="10728655" cy="13716"/>
           </a:xfrm>
           <a:prstGeom prst="rect">
             <a:avLst/>
@@ -3514,9 +3514,7 @@
             <a:srgbClr val="E2E8F0"/>
           </a:solidFill>
           <a:ln>
-            <a:solidFill>
-              <a:srgbClr val="E2E8F0"/>
-            </a:solidFill>
+            <a:noFill/>
           </a:ln>
         </p:spPr>
         <p:style>
@@ -3549,8 +3547,8 @@
         </p:nvSpPr>
         <p:spPr>
           <a:xfrm>
-            <a:off x="548640" y="6263640"/>
-            <a:ext cx="11094415" cy="18288"/>
+            <a:off x="731520" y="6263640"/>
+            <a:ext cx="10728655" cy="13716"/>
           </a:xfrm>
           <a:prstGeom prst="rect">
             <a:avLst/>
@@ -3559,9 +3557,7 @@
             <a:srgbClr val="E2E8F0"/>
           </a:solidFill>
           <a:ln>
-            <a:solidFill>
-              <a:srgbClr val="E2E8F0"/>
-            </a:solidFill>
+            <a:noFill/>
           </a:ln>
         </p:spPr>
         <p:style>
@@ -3594,7 +3590,7 @@
         </p:nvSpPr>
         <p:spPr>
           <a:xfrm>
-            <a:off x="548640" y="6327648"/>
+            <a:off x="731520" y="6327648"/>
             <a:ext cx="5486400" cy="320040"/>
           </a:xfrm>
           <a:prstGeom prst="rect">
@@ -3609,15 +3605,15 @@
           <a:lstStyle/>
           <a:p>
             <a:pPr>
-              <a:defRPr sz="1000">
+              <a:defRPr sz="950">
                 <a:solidFill>
                   <a:srgbClr val="64748B"/>
                 </a:solidFill>
-                <a:latin typeface="Arial"/>
-              </a:defRPr>
-            </a:pPr>
-            <a:r>
-              <a:t>Timbiras Solidária — ADS UEMA 2026 | Polo Timbiras</a:t>
+                <a:latin typeface="Segoe UI"/>
+              </a:defRPr>
+            </a:pPr>
+            <a:r>
+              <a:t>Timbiras Solidária — ADS UEMA 2026 | Polo Universitário de Timbiras</a:t>
             </a:r>
           </a:p>
         </p:txBody>
@@ -3630,8 +3626,8 @@
         </p:nvSpPr>
         <p:spPr>
           <a:xfrm>
-            <a:off x="9144000" y="6327648"/>
-            <a:ext cx="2499055" cy="320040"/>
+            <a:off x="8686800" y="6327648"/>
+            <a:ext cx="2773375" cy="320040"/>
           </a:xfrm>
           <a:prstGeom prst="rect">
             <a:avLst/>
@@ -3645,22 +3641,103 @@
           <a:lstStyle/>
           <a:p>
             <a:pPr algn="r">
-              <a:defRPr sz="1000" b="1">
+              <a:defRPr sz="950" b="1">
                 <a:solidFill>
                   <a:srgbClr val="64748B"/>
                 </a:solidFill>
-                <a:latin typeface="Arial"/>
+                <a:latin typeface="Segoe UI"/>
               </a:defRPr>
             </a:pPr>
             <a:r>
               <a:t>Slide 10 / 13</a:t>
+            </a:r>
+          </a:p>
+        </p:txBody>
+      </p:sp>
+      <p:sp>
+        <p:nvSpPr>
+          <p:cNvPr id="8" name="Rounded Rectangle 7"/>
+          <p:cNvSpPr/>
+          <p:nvPr/>
+        </p:nvSpPr>
+        <p:spPr>
+          <a:xfrm>
+            <a:off x="731520" y="1234440"/>
+            <a:ext cx="5166360" cy="4800600"/>
+          </a:xfrm>
+          <a:prstGeom prst="roundRect">
+            <a:avLst/>
+          </a:prstGeom>
+          <a:solidFill>
+            <a:srgbClr val="F8FAFC"/>
+          </a:solidFill>
+          <a:ln w="12700">
+            <a:solidFill>
+              <a:srgbClr val="E2E8F0"/>
+            </a:solidFill>
+          </a:ln>
+        </p:spPr>
+        <p:style>
+          <a:lnRef idx="1">
+            <a:schemeClr val="accent1"/>
+          </a:lnRef>
+          <a:fillRef idx="3">
+            <a:schemeClr val="accent1"/>
+          </a:fillRef>
+          <a:effectRef idx="2">
+            <a:schemeClr val="accent1"/>
+          </a:effectRef>
+          <a:fontRef idx="minor">
+            <a:schemeClr val="lt1"/>
+          </a:fontRef>
+        </p:style>
+        <p:txBody>
+          <a:bodyPr rtlCol="0" anchor="ctr"/>
+          <a:lstStyle/>
+          <a:p>
+            <a:pPr algn="ctr"/>
+          </a:p>
+        </p:txBody>
+      </p:sp>
+      <p:sp>
+        <p:nvSpPr>
+          <p:cNvPr id="9" name="TextBox 8"/>
+          <p:cNvSpPr txBox="1"/>
+          <p:nvPr/>
+        </p:nvSpPr>
+        <p:spPr>
+          <a:xfrm>
+            <a:off x="868680" y="1325880"/>
+            <a:ext cx="4892040" cy="365760"/>
+          </a:xfrm>
+          <a:prstGeom prst="rect">
+            <a:avLst/>
+          </a:prstGeom>
+          <a:noFill/>
+        </p:spPr>
+        <p:txBody>
+          <a:bodyPr wrap="none">
+            <a:spAutoFit/>
+          </a:bodyPr>
+          <a:lstStyle/>
+          <a:p>
+            <a:pPr>
+              <a:defRPr sz="1200" b="1">
+                <a:solidFill>
+                  <a:srgbClr val="00873E"/>
+                </a:solidFill>
+                <a:latin typeface="Segoe UI"/>
+              </a:defRPr>
+            </a:pPr>
+            <a:r>
+              <a:t>1. Tela Inicial &amp; Painel de Metas Comunitárias</a:t>
             </a:r>
           </a:p>
         </p:txBody>
       </p:sp>
       <p:pic>
         <p:nvPicPr>
-          <p:cNvPr id="8" name="Picture 7" descr="captura_desktop.png"/>
+          <p:cNvPr id="10" name="Picture 9" descr="captura_desktop.png"/>
           <p:cNvPicPr>
             <a:picLocks noChangeAspect="1"/>
           </p:cNvPicPr>
@@ -3674,8 +3751,8 @@
         </p:blipFill>
         <p:spPr>
           <a:xfrm>
-            <a:off x="548640" y="1371600"/>
-            <a:ext cx="5394960" cy="2926549"/>
+            <a:off x="868680" y="1737360"/>
+            <a:ext cx="4892040" cy="2653735"/>
           </a:xfrm>
           <a:prstGeom prst="rect">
             <a:avLst/>
@@ -3684,14 +3761,14 @@
       </p:pic>
       <p:sp>
         <p:nvSpPr>
-          <p:cNvPr id="9" name="TextBox 8"/>
+          <p:cNvPr id="11" name="TextBox 10"/>
           <p:cNvSpPr txBox="1"/>
           <p:nvPr/>
         </p:nvSpPr>
         <p:spPr>
           <a:xfrm>
-            <a:off x="548640" y="4663440"/>
-            <a:ext cx="5394960" cy="1280160"/>
+            <a:off x="868680" y="4892040"/>
+            <a:ext cx="4892040" cy="1051560"/>
           </a:xfrm>
           <a:prstGeom prst="rect">
             <a:avLst/>
@@ -3705,35 +3782,103 @@
           <a:lstStyle/>
           <a:p>
             <a:pPr>
-              <a:defRPr sz="1300" b="1">
-                <a:solidFill>
-                  <a:srgbClr val="00873E"/>
-                </a:solidFill>
-                <a:latin typeface="Arial"/>
-              </a:defRPr>
-            </a:pPr>
-            <a:r>
-              <a:t>1. Tela Inicial &amp; Painel de Metas (Desktop)</a:t>
-            </a:r>
-          </a:p>
-          <a:p>
-            <a:pPr>
-              <a:defRPr sz="1100">
+              <a:defRPr sz="1000">
                 <a:solidFill>
                   <a:srgbClr val="64748B"/>
                 </a:solidFill>
-                <a:latin typeface="Arial"/>
-              </a:defRPr>
-            </a:pPr>
-            <a:r>
-              <a:t>Destaque para o acolhimento visual, imagem real da agricultura familiar, contador reativo de 12 cestas e barra de progresso da meta comunitária.</a:t>
+                <a:latin typeface="Segoe UI"/>
+              </a:defRPr>
+            </a:pPr>
+            <a:r>
+              <a:t>Destaque para o acolhimento visual, foto real da agricultura familiar, contador reativo de 12 cestas e barra de progresso da meta comunitária.</a:t>
+            </a:r>
+          </a:p>
+        </p:txBody>
+      </p:sp>
+      <p:sp>
+        <p:nvSpPr>
+          <p:cNvPr id="12" name="Rounded Rectangle 11"/>
+          <p:cNvSpPr/>
+          <p:nvPr/>
+        </p:nvSpPr>
+        <p:spPr>
+          <a:xfrm>
+            <a:off x="6263640" y="1234440"/>
+            <a:ext cx="5166360" cy="4800600"/>
+          </a:xfrm>
+          <a:prstGeom prst="roundRect">
+            <a:avLst/>
+          </a:prstGeom>
+          <a:solidFill>
+            <a:srgbClr val="F8FAFC"/>
+          </a:solidFill>
+          <a:ln w="12700">
+            <a:solidFill>
+              <a:srgbClr val="E2E8F0"/>
+            </a:solidFill>
+          </a:ln>
+        </p:spPr>
+        <p:style>
+          <a:lnRef idx="1">
+            <a:schemeClr val="accent1"/>
+          </a:lnRef>
+          <a:fillRef idx="3">
+            <a:schemeClr val="accent1"/>
+          </a:fillRef>
+          <a:effectRef idx="2">
+            <a:schemeClr val="accent1"/>
+          </a:effectRef>
+          <a:fontRef idx="minor">
+            <a:schemeClr val="lt1"/>
+          </a:fontRef>
+        </p:style>
+        <p:txBody>
+          <a:bodyPr rtlCol="0" anchor="ctr"/>
+          <a:lstStyle/>
+          <a:p>
+            <a:pPr algn="ctr"/>
+          </a:p>
+        </p:txBody>
+      </p:sp>
+      <p:sp>
+        <p:nvSpPr>
+          <p:cNvPr id="13" name="TextBox 12"/>
+          <p:cNvSpPr txBox="1"/>
+          <p:nvPr/>
+        </p:nvSpPr>
+        <p:spPr>
+          <a:xfrm>
+            <a:off x="6400800" y="1325880"/>
+            <a:ext cx="4892040" cy="365760"/>
+          </a:xfrm>
+          <a:prstGeom prst="rect">
+            <a:avLst/>
+          </a:prstGeom>
+          <a:noFill/>
+        </p:spPr>
+        <p:txBody>
+          <a:bodyPr wrap="none">
+            <a:spAutoFit/>
+          </a:bodyPr>
+          <a:lstStyle/>
+          <a:p>
+            <a:pPr>
+              <a:defRPr sz="1200" b="1">
+                <a:solidFill>
+                  <a:srgbClr val="0284C7"/>
+                </a:solidFill>
+                <a:latin typeface="Segoe UI"/>
+              </a:defRPr>
+            </a:pPr>
+            <a:r>
+              <a:t>2. Rota Solidária &amp; Dados Oficiais do IBGE</a:t>
             </a:r>
           </a:p>
         </p:txBody>
       </p:sp>
       <p:pic>
         <p:nvPicPr>
-          <p:cNvPr id="10" name="Picture 9" descr="captura_api_ibge.png"/>
+          <p:cNvPr id="14" name="Picture 13" descr="captura_api_ibge.png"/>
           <p:cNvPicPr>
             <a:picLocks noChangeAspect="1"/>
           </p:cNvPicPr>
@@ -3747,8 +3892,8 @@
         </p:blipFill>
         <p:spPr>
           <a:xfrm>
-            <a:off x="6217920" y="1371600"/>
-            <a:ext cx="5394960" cy="4273314"/>
+            <a:off x="6400800" y="1737360"/>
+            <a:ext cx="4892040" cy="3874954"/>
           </a:xfrm>
           <a:prstGeom prst="rect">
             <a:avLst/>
@@ -3757,14 +3902,14 @@
       </p:pic>
       <p:sp>
         <p:nvSpPr>
-          <p:cNvPr id="11" name="TextBox 10"/>
+          <p:cNvPr id="15" name="TextBox 14"/>
           <p:cNvSpPr txBox="1"/>
           <p:nvPr/>
         </p:nvSpPr>
         <p:spPr>
           <a:xfrm>
-            <a:off x="6217920" y="4663440"/>
-            <a:ext cx="5394960" cy="1280160"/>
+            <a:off x="6400800" y="4892040"/>
+            <a:ext cx="4892040" cy="1051560"/>
           </a:xfrm>
           <a:prstGeom prst="rect">
             <a:avLst/>
@@ -3778,28 +3923,15 @@
           <a:lstStyle/>
           <a:p>
             <a:pPr>
-              <a:defRPr sz="1300" b="1">
-                <a:solidFill>
-                  <a:srgbClr val="0284C7"/>
-                </a:solidFill>
-                <a:latin typeface="Arial"/>
-              </a:defRPr>
-            </a:pPr>
-            <a:r>
-              <a:t>2. Rota Solidária &amp; Dados Oficiais do IBGE</a:t>
-            </a:r>
-          </a:p>
-          <a:p>
-            <a:pPr>
-              <a:defRPr sz="1100">
+              <a:defRPr sz="1000">
                 <a:solidFill>
                   <a:srgbClr val="64748B"/>
                 </a:solidFill>
-                <a:latin typeface="Arial"/>
-              </a:defRPr>
-            </a:pPr>
-            <a:r>
-              <a:t>Cards gerados do JSON da API do IBGE, exibindo código oficial (Timbiras 2112307, Codó 2103307), microrregião e mapa interativo Leaflet.</a:t>
+                <a:latin typeface="Segoe UI"/>
+              </a:defRPr>
+            </a:pPr>
+            <a:r>
+              <a:t>Cards gerados diretamente do JSON da API pública do IBGE, exibindo código oficial de 7 dígitos (ex: Timbiras 2112307, Codó 2103307), microrregião e mapa interativo Leaflet.</a:t>
             </a:r>
           </a:p>
         </p:txBody>
@@ -3830,8 +3962,8 @@
         </p:nvSpPr>
         <p:spPr>
           <a:xfrm>
-            <a:off x="548640" y="365760"/>
-            <a:ext cx="8686800" cy="731520"/>
+            <a:off x="731520" y="365760"/>
+            <a:ext cx="8412480" cy="685800"/>
           </a:xfrm>
           <a:prstGeom prst="rect">
             <a:avLst/>
@@ -3845,11 +3977,11 @@
           <a:lstStyle/>
           <a:p>
             <a:pPr>
-              <a:defRPr sz="2200" b="1">
+              <a:defRPr sz="2100" b="1">
                 <a:solidFill>
                   <a:srgbClr val="00873E"/>
                 </a:solidFill>
-                <a:latin typeface="Arial"/>
+                <a:latin typeface="Segoe UI"/>
               </a:defRPr>
             </a:pPr>
             <a:r>
@@ -3866,8 +3998,8 @@
         </p:nvSpPr>
         <p:spPr>
           <a:xfrm>
-            <a:off x="9326880" y="411480"/>
-            <a:ext cx="2286000" cy="365760"/>
+            <a:off x="9235440" y="411480"/>
+            <a:ext cx="2194560" cy="347472"/>
           </a:xfrm>
           <a:prstGeom prst="roundRect">
             <a:avLst/>
@@ -3875,7 +4007,7 @@
           <a:solidFill>
             <a:srgbClr val="F8FAFC"/>
           </a:solidFill>
-          <a:ln>
+          <a:ln w="12700">
             <a:solidFill>
               <a:srgbClr val="E2E8F0"/>
             </a:solidFill>
@@ -3896,19 +4028,19 @@
           </a:fontRef>
         </p:style>
         <p:txBody>
-          <a:bodyPr rtlCol="0" anchor="ctr" wrap="none"/>
+          <a:bodyPr rtlCol="0" anchor="ctr" tIns="54864"/>
           <a:lstStyle/>
           <a:p>
             <a:pPr algn="ctr">
-              <a:defRPr sz="1100" b="1">
+              <a:defRPr sz="1000" b="1">
                 <a:solidFill>
                   <a:srgbClr val="64748B"/>
                 </a:solidFill>
-                <a:latin typeface="Arial"/>
-              </a:defRPr>
-            </a:pPr>
-            <a:r>
-              <a:t>Evidências Reais</a:t>
+                <a:latin typeface="Segoe UI"/>
+              </a:defRPr>
+            </a:pPr>
+            <a:r>
+              <a:t>EVIDÊNCIAS REAIS</a:t>
             </a:r>
           </a:p>
         </p:txBody>
@@ -3921,8 +4053,8 @@
         </p:nvSpPr>
         <p:spPr>
           <a:xfrm>
-            <a:off x="548640" y="1097280"/>
-            <a:ext cx="11094415" cy="18288"/>
+            <a:off x="731520" y="1051560"/>
+            <a:ext cx="10728655" cy="13716"/>
           </a:xfrm>
           <a:prstGeom prst="rect">
             <a:avLst/>
@@ -3931,9 +4063,7 @@
             <a:srgbClr val="E2E8F0"/>
           </a:solidFill>
           <a:ln>
-            <a:solidFill>
-              <a:srgbClr val="E2E8F0"/>
-            </a:solidFill>
+            <a:noFill/>
           </a:ln>
         </p:spPr>
         <p:style>
@@ -3966,8 +4096,8 @@
         </p:nvSpPr>
         <p:spPr>
           <a:xfrm>
-            <a:off x="548640" y="6263640"/>
-            <a:ext cx="11094415" cy="18288"/>
+            <a:off x="731520" y="6263640"/>
+            <a:ext cx="10728655" cy="13716"/>
           </a:xfrm>
           <a:prstGeom prst="rect">
             <a:avLst/>
@@ -3976,9 +4106,7 @@
             <a:srgbClr val="E2E8F0"/>
           </a:solidFill>
           <a:ln>
-            <a:solidFill>
-              <a:srgbClr val="E2E8F0"/>
-            </a:solidFill>
+            <a:noFill/>
           </a:ln>
         </p:spPr>
         <p:style>
@@ -4011,7 +4139,7 @@
         </p:nvSpPr>
         <p:spPr>
           <a:xfrm>
-            <a:off x="548640" y="6327648"/>
+            <a:off x="731520" y="6327648"/>
             <a:ext cx="5486400" cy="320040"/>
           </a:xfrm>
           <a:prstGeom prst="rect">
@@ -4026,15 +4154,15 @@
           <a:lstStyle/>
           <a:p>
             <a:pPr>
-              <a:defRPr sz="1000">
+              <a:defRPr sz="950">
                 <a:solidFill>
                   <a:srgbClr val="64748B"/>
                 </a:solidFill>
-                <a:latin typeface="Arial"/>
-              </a:defRPr>
-            </a:pPr>
-            <a:r>
-              <a:t>Timbiras Solidária — ADS UEMA 2026 | Polo Timbiras</a:t>
+                <a:latin typeface="Segoe UI"/>
+              </a:defRPr>
+            </a:pPr>
+            <a:r>
+              <a:t>Timbiras Solidária — ADS UEMA 2026 | Polo Universitário de Timbiras</a:t>
             </a:r>
           </a:p>
         </p:txBody>
@@ -4047,8 +4175,8 @@
         </p:nvSpPr>
         <p:spPr>
           <a:xfrm>
-            <a:off x="9144000" y="6327648"/>
-            <a:ext cx="2499055" cy="320040"/>
+            <a:off x="8686800" y="6327648"/>
+            <a:ext cx="2773375" cy="320040"/>
           </a:xfrm>
           <a:prstGeom prst="rect">
             <a:avLst/>
@@ -4062,22 +4190,103 @@
           <a:lstStyle/>
           <a:p>
             <a:pPr algn="r">
-              <a:defRPr sz="1000" b="1">
+              <a:defRPr sz="950" b="1">
                 <a:solidFill>
                   <a:srgbClr val="64748B"/>
                 </a:solidFill>
-                <a:latin typeface="Arial"/>
+                <a:latin typeface="Segoe UI"/>
               </a:defRPr>
             </a:pPr>
             <a:r>
               <a:t>Slide 11 / 13</a:t>
+            </a:r>
+          </a:p>
+        </p:txBody>
+      </p:sp>
+      <p:sp>
+        <p:nvSpPr>
+          <p:cNvPr id="8" name="Rounded Rectangle 7"/>
+          <p:cNvSpPr/>
+          <p:nvPr/>
+        </p:nvSpPr>
+        <p:spPr>
+          <a:xfrm>
+            <a:off x="731520" y="1234440"/>
+            <a:ext cx="5166360" cy="4800600"/>
+          </a:xfrm>
+          <a:prstGeom prst="roundRect">
+            <a:avLst/>
+          </a:prstGeom>
+          <a:solidFill>
+            <a:srgbClr val="F8FAFC"/>
+          </a:solidFill>
+          <a:ln w="12700">
+            <a:solidFill>
+              <a:srgbClr val="E2E8F0"/>
+            </a:solidFill>
+          </a:ln>
+        </p:spPr>
+        <p:style>
+          <a:lnRef idx="1">
+            <a:schemeClr val="accent1"/>
+          </a:lnRef>
+          <a:fillRef idx="3">
+            <a:schemeClr val="accent1"/>
+          </a:fillRef>
+          <a:effectRef idx="2">
+            <a:schemeClr val="accent1"/>
+          </a:effectRef>
+          <a:fontRef idx="minor">
+            <a:schemeClr val="lt1"/>
+          </a:fontRef>
+        </p:style>
+        <p:txBody>
+          <a:bodyPr rtlCol="0" anchor="ctr"/>
+          <a:lstStyle/>
+          <a:p>
+            <a:pPr algn="ctr"/>
+          </a:p>
+        </p:txBody>
+      </p:sp>
+      <p:sp>
+        <p:nvSpPr>
+          <p:cNvPr id="9" name="TextBox 8"/>
+          <p:cNvSpPr txBox="1"/>
+          <p:nvPr/>
+        </p:nvSpPr>
+        <p:spPr>
+          <a:xfrm>
+            <a:off x="868680" y="1325880"/>
+            <a:ext cx="4892040" cy="365760"/>
+          </a:xfrm>
+          <a:prstGeom prst="rect">
+            <a:avLst/>
+          </a:prstGeom>
+          <a:noFill/>
+        </p:spPr>
+        <p:txBody>
+          <a:bodyPr wrap="none">
+            <a:spAutoFit/>
+          </a:bodyPr>
+          <a:lstStyle/>
+          <a:p>
+            <a:pPr>
+              <a:defRPr sz="1200" b="1">
+                <a:solidFill>
+                  <a:srgbClr val="B45309"/>
+                </a:solidFill>
+                <a:latin typeface="Segoe UI"/>
+              </a:defRPr>
+            </a:pPr>
+            <a:r>
+              <a:t>3. Formulário de Doação &amp; Cópia do PIX</a:t>
             </a:r>
           </a:p>
         </p:txBody>
       </p:sp>
       <p:pic>
         <p:nvPicPr>
-          <p:cNvPr id="8" name="Picture 7" descr="captura_doacao.png"/>
+          <p:cNvPr id="10" name="Picture 9" descr="captura_doacao.png"/>
           <p:cNvPicPr>
             <a:picLocks noChangeAspect="1"/>
           </p:cNvPicPr>
@@ -4091,8 +4300,8 @@
         </p:blipFill>
         <p:spPr>
           <a:xfrm>
-            <a:off x="548640" y="1371600"/>
-            <a:ext cx="5394960" cy="3676946"/>
+            <a:off x="868680" y="1737360"/>
+            <a:ext cx="4892040" cy="3334180"/>
           </a:xfrm>
           <a:prstGeom prst="rect">
             <a:avLst/>
@@ -4101,14 +4310,14 @@
       </p:pic>
       <p:sp>
         <p:nvSpPr>
-          <p:cNvPr id="9" name="TextBox 8"/>
+          <p:cNvPr id="11" name="TextBox 10"/>
           <p:cNvSpPr txBox="1"/>
           <p:nvPr/>
         </p:nvSpPr>
         <p:spPr>
           <a:xfrm>
-            <a:off x="548640" y="4663440"/>
-            <a:ext cx="5394960" cy="1280160"/>
+            <a:off x="868680" y="4892040"/>
+            <a:ext cx="4892040" cy="1051560"/>
           </a:xfrm>
           <a:prstGeom prst="rect">
             <a:avLst/>
@@ -4122,35 +4331,103 @@
           <a:lstStyle/>
           <a:p>
             <a:pPr>
-              <a:defRPr sz="1300" b="1">
-                <a:solidFill>
-                  <a:srgbClr val="B45309"/>
-                </a:solidFill>
-                <a:latin typeface="Arial"/>
-              </a:defRPr>
-            </a:pPr>
-            <a:r>
-              <a:t>3. Formulário de Doação &amp; PIX Instantâneo</a:t>
-            </a:r>
-          </a:p>
-          <a:p>
-            <a:pPr>
-              <a:defRPr sz="1100">
+              <a:defRPr sz="1000">
                 <a:solidFill>
                   <a:srgbClr val="64748B"/>
                 </a:solidFill>
-                <a:latin typeface="Arial"/>
-              </a:defRPr>
-            </a:pPr>
-            <a:r>
-              <a:t>Seleção facilitada por chips ('1 Cesta', '2 Cestas', '5 Cestas'), chave PIX com botão de cópia instantânea e validação nativa de formulário.</a:t>
+                <a:latin typeface="Segoe UI"/>
+              </a:defRPr>
+            </a:pPr>
+            <a:r>
+              <a:t>Seleção facilitada por chips ('1 Cesta', '2 Cestas', '5 Cestas'), chave PIX com botão de cópia instantânea e formulário completo com validação nativa.</a:t>
+            </a:r>
+          </a:p>
+        </p:txBody>
+      </p:sp>
+      <p:sp>
+        <p:nvSpPr>
+          <p:cNvPr id="12" name="Rounded Rectangle 11"/>
+          <p:cNvSpPr/>
+          <p:nvPr/>
+        </p:nvSpPr>
+        <p:spPr>
+          <a:xfrm>
+            <a:off x="6263640" y="1234440"/>
+            <a:ext cx="5166360" cy="4800600"/>
+          </a:xfrm>
+          <a:prstGeom prst="roundRect">
+            <a:avLst/>
+          </a:prstGeom>
+          <a:solidFill>
+            <a:srgbClr val="F8FAFC"/>
+          </a:solidFill>
+          <a:ln w="12700">
+            <a:solidFill>
+              <a:srgbClr val="E2E8F0"/>
+            </a:solidFill>
+          </a:ln>
+        </p:spPr>
+        <p:style>
+          <a:lnRef idx="1">
+            <a:schemeClr val="accent1"/>
+          </a:lnRef>
+          <a:fillRef idx="3">
+            <a:schemeClr val="accent1"/>
+          </a:fillRef>
+          <a:effectRef idx="2">
+            <a:schemeClr val="accent1"/>
+          </a:effectRef>
+          <a:fontRef idx="minor">
+            <a:schemeClr val="lt1"/>
+          </a:fontRef>
+        </p:style>
+        <p:txBody>
+          <a:bodyPr rtlCol="0" anchor="ctr"/>
+          <a:lstStyle/>
+          <a:p>
+            <a:pPr algn="ctr"/>
+          </a:p>
+        </p:txBody>
+      </p:sp>
+      <p:sp>
+        <p:nvSpPr>
+          <p:cNvPr id="13" name="TextBox 12"/>
+          <p:cNvSpPr txBox="1"/>
+          <p:nvPr/>
+        </p:nvSpPr>
+        <p:spPr>
+          <a:xfrm>
+            <a:off x="6400800" y="1325880"/>
+            <a:ext cx="4892040" cy="365760"/>
+          </a:xfrm>
+          <a:prstGeom prst="rect">
+            <a:avLst/>
+          </a:prstGeom>
+          <a:noFill/>
+        </p:spPr>
+        <p:txBody>
+          <a:bodyPr wrap="none">
+            <a:spAutoFit/>
+          </a:bodyPr>
+          <a:lstStyle/>
+          <a:p>
+            <a:pPr>
+              <a:defRPr sz="1200" b="1">
+                <a:solidFill>
+                  <a:srgbClr val="00873E"/>
+                </a:solidFill>
+                <a:latin typeface="Segoe UI"/>
+              </a:defRPr>
+            </a:pPr>
+            <a:r>
+              <a:t>4. Transparência por Bairro e Zona Rural</a:t>
             </a:r>
           </a:p>
         </p:txBody>
       </p:sp>
       <p:pic>
         <p:nvPicPr>
-          <p:cNvPr id="10" name="Picture 9" descr="captura_prestacao_contas.png"/>
+          <p:cNvPr id="14" name="Picture 13" descr="captura_prestacao_contas.png"/>
           <p:cNvPicPr>
             <a:picLocks noChangeAspect="1"/>
           </p:cNvPicPr>
@@ -4164,8 +4441,8 @@
         </p:blipFill>
         <p:spPr>
           <a:xfrm>
-            <a:off x="6217920" y="1371600"/>
-            <a:ext cx="5394960" cy="4067942"/>
+            <a:off x="6400800" y="1737360"/>
+            <a:ext cx="4892040" cy="3688727"/>
           </a:xfrm>
           <a:prstGeom prst="rect">
             <a:avLst/>
@@ -4174,14 +4451,14 @@
       </p:pic>
       <p:sp>
         <p:nvSpPr>
-          <p:cNvPr id="11" name="TextBox 10"/>
+          <p:cNvPr id="15" name="TextBox 14"/>
           <p:cNvSpPr txBox="1"/>
           <p:nvPr/>
         </p:nvSpPr>
         <p:spPr>
           <a:xfrm>
-            <a:off x="6217920" y="4663440"/>
-            <a:ext cx="5394960" cy="1280160"/>
+            <a:off x="6400800" y="4892040"/>
+            <a:ext cx="4892040" cy="1051560"/>
           </a:xfrm>
           <a:prstGeom prst="rect">
             <a:avLst/>
@@ -4195,28 +4472,15 @@
           <a:lstStyle/>
           <a:p>
             <a:pPr>
-              <a:defRPr sz="1300" b="1">
-                <a:solidFill>
-                  <a:srgbClr val="00873E"/>
-                </a:solidFill>
-                <a:latin typeface="Arial"/>
-              </a:defRPr>
-            </a:pPr>
-            <a:r>
-              <a:t>4. Transparência Pública por Bairro</a:t>
-            </a:r>
-          </a:p>
-          <a:p>
-            <a:pPr>
-              <a:defRPr sz="1100">
+              <a:defRPr sz="1000">
                 <a:solidFill>
                   <a:srgbClr val="64748B"/>
                 </a:solidFill>
-                <a:latin typeface="Arial"/>
-              </a:defRPr>
-            </a:pPr>
-            <a:r>
-              <a:t>Busca instantânea por bairros (Mutirão, Centro, Olaria, etc.), destaque para a Zona Rural (35 cestas) e somatório oficial de 215 cestas entregues.</a:t>
+                <a:latin typeface="Segoe UI"/>
+              </a:defRPr>
+            </a:pPr>
+            <a:r>
+              <a:t>Busca instantânea por bairros (Mutirão, Centro, Olaria, etc.), destaque para a Zona Rural (35 cestas) e somatório oficial transparente (215 cestas entregues).</a:t>
             </a:r>
           </a:p>
         </p:txBody>
@@ -4247,8 +4511,8 @@
         </p:nvSpPr>
         <p:spPr>
           <a:xfrm>
-            <a:off x="548640" y="365760"/>
-            <a:ext cx="8686800" cy="731520"/>
+            <a:off x="731520" y="365760"/>
+            <a:ext cx="8412480" cy="685800"/>
           </a:xfrm>
           <a:prstGeom prst="rect">
             <a:avLst/>
@@ -4262,11 +4526,11 @@
           <a:lstStyle/>
           <a:p>
             <a:pPr>
-              <a:defRPr sz="2200" b="1">
+              <a:defRPr sz="2100" b="1">
                 <a:solidFill>
                   <a:srgbClr val="00873E"/>
                 </a:solidFill>
-                <a:latin typeface="Arial"/>
+                <a:latin typeface="Segoe UI"/>
               </a:defRPr>
             </a:pPr>
             <a:r>
@@ -4283,8 +4547,8 @@
         </p:nvSpPr>
         <p:spPr>
           <a:xfrm>
-            <a:off x="9326880" y="411480"/>
-            <a:ext cx="2286000" cy="365760"/>
+            <a:off x="9235440" y="411480"/>
+            <a:ext cx="2194560" cy="347472"/>
           </a:xfrm>
           <a:prstGeom prst="roundRect">
             <a:avLst/>
@@ -4292,7 +4556,7 @@
           <a:solidFill>
             <a:srgbClr val="F8FAFC"/>
           </a:solidFill>
-          <a:ln>
+          <a:ln w="12700">
             <a:solidFill>
               <a:srgbClr val="E2E8F0"/>
             </a:solidFill>
@@ -4313,19 +4577,19 @@
           </a:fontRef>
         </p:style>
         <p:txBody>
-          <a:bodyPr rtlCol="0" anchor="ctr" wrap="none"/>
+          <a:bodyPr rtlCol="0" anchor="ctr" tIns="54864"/>
           <a:lstStyle/>
           <a:p>
             <a:pPr algn="ctr">
-              <a:defRPr sz="1100" b="1">
+              <a:defRPr sz="1000" b="1">
                 <a:solidFill>
                   <a:srgbClr val="64748B"/>
                 </a:solidFill>
-                <a:latin typeface="Arial"/>
-              </a:defRPr>
-            </a:pPr>
-            <a:r>
-              <a:t>Responsividade Real</a:t>
+                <a:latin typeface="Segoe UI"/>
+              </a:defRPr>
+            </a:pPr>
+            <a:r>
+              <a:t>RESPONSIVIDADE REAL</a:t>
             </a:r>
           </a:p>
         </p:txBody>
@@ -4338,8 +4602,8 @@
         </p:nvSpPr>
         <p:spPr>
           <a:xfrm>
-            <a:off x="548640" y="1097280"/>
-            <a:ext cx="11094415" cy="18288"/>
+            <a:off x="731520" y="1051560"/>
+            <a:ext cx="10728655" cy="13716"/>
           </a:xfrm>
           <a:prstGeom prst="rect">
             <a:avLst/>
@@ -4348,9 +4612,7 @@
             <a:srgbClr val="E2E8F0"/>
           </a:solidFill>
           <a:ln>
-            <a:solidFill>
-              <a:srgbClr val="E2E8F0"/>
-            </a:solidFill>
+            <a:noFill/>
           </a:ln>
         </p:spPr>
         <p:style>
@@ -4383,8 +4645,8 @@
         </p:nvSpPr>
         <p:spPr>
           <a:xfrm>
-            <a:off x="548640" y="6263640"/>
-            <a:ext cx="11094415" cy="18288"/>
+            <a:off x="731520" y="6263640"/>
+            <a:ext cx="10728655" cy="13716"/>
           </a:xfrm>
           <a:prstGeom prst="rect">
             <a:avLst/>
@@ -4393,9 +4655,7 @@
             <a:srgbClr val="E2E8F0"/>
           </a:solidFill>
           <a:ln>
-            <a:solidFill>
-              <a:srgbClr val="E2E8F0"/>
-            </a:solidFill>
+            <a:noFill/>
           </a:ln>
         </p:spPr>
         <p:style>
@@ -4428,7 +4688,7 @@
         </p:nvSpPr>
         <p:spPr>
           <a:xfrm>
-            <a:off x="548640" y="6327648"/>
+            <a:off x="731520" y="6327648"/>
             <a:ext cx="5486400" cy="320040"/>
           </a:xfrm>
           <a:prstGeom prst="rect">
@@ -4443,15 +4703,15 @@
           <a:lstStyle/>
           <a:p>
             <a:pPr>
-              <a:defRPr sz="1000">
+              <a:defRPr sz="950">
                 <a:solidFill>
                   <a:srgbClr val="64748B"/>
                 </a:solidFill>
-                <a:latin typeface="Arial"/>
-              </a:defRPr>
-            </a:pPr>
-            <a:r>
-              <a:t>Timbiras Solidária — ADS UEMA 2026 | Polo Timbiras</a:t>
+                <a:latin typeface="Segoe UI"/>
+              </a:defRPr>
+            </a:pPr>
+            <a:r>
+              <a:t>Timbiras Solidária — ADS UEMA 2026 | Polo Universitário de Timbiras</a:t>
             </a:r>
           </a:p>
         </p:txBody>
@@ -4464,8 +4724,8 @@
         </p:nvSpPr>
         <p:spPr>
           <a:xfrm>
-            <a:off x="9144000" y="6327648"/>
-            <a:ext cx="2499055" cy="320040"/>
+            <a:off x="8686800" y="6327648"/>
+            <a:ext cx="2773375" cy="320040"/>
           </a:xfrm>
           <a:prstGeom prst="rect">
             <a:avLst/>
@@ -4479,22 +4739,103 @@
           <a:lstStyle/>
           <a:p>
             <a:pPr algn="r">
-              <a:defRPr sz="1000" b="1">
+              <a:defRPr sz="950" b="1">
                 <a:solidFill>
                   <a:srgbClr val="64748B"/>
                 </a:solidFill>
-                <a:latin typeface="Arial"/>
+                <a:latin typeface="Segoe UI"/>
               </a:defRPr>
             </a:pPr>
             <a:r>
               <a:t>Slide 12 / 13</a:t>
+            </a:r>
+          </a:p>
+        </p:txBody>
+      </p:sp>
+      <p:sp>
+        <p:nvSpPr>
+          <p:cNvPr id="8" name="Rounded Rectangle 7"/>
+          <p:cNvSpPr/>
+          <p:nvPr/>
+        </p:nvSpPr>
+        <p:spPr>
+          <a:xfrm>
+            <a:off x="731520" y="1234440"/>
+            <a:ext cx="3291840" cy="4800600"/>
+          </a:xfrm>
+          <a:prstGeom prst="roundRect">
+            <a:avLst/>
+          </a:prstGeom>
+          <a:solidFill>
+            <a:srgbClr val="F8FAFC"/>
+          </a:solidFill>
+          <a:ln w="12700">
+            <a:solidFill>
+              <a:srgbClr val="E2E8F0"/>
+            </a:solidFill>
+          </a:ln>
+        </p:spPr>
+        <p:style>
+          <a:lnRef idx="1">
+            <a:schemeClr val="accent1"/>
+          </a:lnRef>
+          <a:fillRef idx="3">
+            <a:schemeClr val="accent1"/>
+          </a:fillRef>
+          <a:effectRef idx="2">
+            <a:schemeClr val="accent1"/>
+          </a:effectRef>
+          <a:fontRef idx="minor">
+            <a:schemeClr val="lt1"/>
+          </a:fontRef>
+        </p:style>
+        <p:txBody>
+          <a:bodyPr rtlCol="0" anchor="ctr"/>
+          <a:lstStyle/>
+          <a:p>
+            <a:pPr algn="ctr"/>
+          </a:p>
+        </p:txBody>
+      </p:sp>
+      <p:sp>
+        <p:nvSpPr>
+          <p:cNvPr id="9" name="TextBox 8"/>
+          <p:cNvSpPr txBox="1"/>
+          <p:nvPr/>
+        </p:nvSpPr>
+        <p:spPr>
+          <a:xfrm>
+            <a:off x="822960" y="1325880"/>
+            <a:ext cx="3108960" cy="320040"/>
+          </a:xfrm>
+          <a:prstGeom prst="rect">
+            <a:avLst/>
+          </a:prstGeom>
+          <a:noFill/>
+        </p:spPr>
+        <p:txBody>
+          <a:bodyPr wrap="none">
+            <a:spAutoFit/>
+          </a:bodyPr>
+          <a:lstStyle/>
+          <a:p>
+            <a:pPr algn="ctr">
+              <a:defRPr sz="1100" b="1">
+                <a:solidFill>
+                  <a:srgbClr val="00873E"/>
+                </a:solidFill>
+                <a:latin typeface="Segoe UI"/>
+              </a:defRPr>
+            </a:pPr>
+            <a:r>
+              <a:t>Menu Hambúrguer Aberto</a:t>
             </a:r>
           </a:p>
         </p:txBody>
       </p:sp>
       <p:pic>
         <p:nvPicPr>
-          <p:cNvPr id="8" name="Picture 7" descr="captura_mobile_menu.png"/>
+          <p:cNvPr id="10" name="Picture 9" descr="captura_mobile_menu.png"/>
           <p:cNvPicPr>
             <a:picLocks noChangeAspect="1"/>
           </p:cNvPicPr>
@@ -4508,8 +4849,8 @@
         </p:blipFill>
         <p:spPr>
           <a:xfrm>
-            <a:off x="731520" y="1371600"/>
-            <a:ext cx="2070401" cy="4480560"/>
+            <a:off x="1188720" y="1691640"/>
+            <a:ext cx="1774629" cy="3840480"/>
           </a:xfrm>
           <a:prstGeom prst="rect">
             <a:avLst/>
@@ -4518,14 +4859,99 @@
       </p:pic>
       <p:sp>
         <p:nvSpPr>
-          <p:cNvPr id="9" name="Rounded Rectangle 8"/>
+          <p:cNvPr id="11" name="TextBox 10"/>
+          <p:cNvSpPr txBox="1"/>
+          <p:nvPr/>
+        </p:nvSpPr>
+        <p:spPr>
+          <a:xfrm>
+            <a:off x="822960" y="5623560"/>
+            <a:ext cx="3108960" cy="320040"/>
+          </a:xfrm>
+          <a:prstGeom prst="rect">
+            <a:avLst/>
+          </a:prstGeom>
+          <a:noFill/>
+        </p:spPr>
+        <p:txBody>
+          <a:bodyPr wrap="none">
+            <a:spAutoFit/>
+          </a:bodyPr>
+          <a:lstStyle/>
+          <a:p>
+            <a:pPr algn="ctr">
+              <a:defRPr sz="950">
+                <a:solidFill>
+                  <a:srgbClr val="64748B"/>
+                </a:solidFill>
+                <a:latin typeface="Segoe UI"/>
+              </a:defRPr>
+            </a:pPr>
+            <a:r>
+              <a:t>Smartphone (390x844px)</a:t>
+            </a:r>
+          </a:p>
+        </p:txBody>
+      </p:sp>
+      <p:sp>
+        <p:nvSpPr>
+          <p:cNvPr id="12" name="TextBox 11"/>
+          <p:cNvSpPr txBox="1"/>
+          <p:nvPr/>
+        </p:nvSpPr>
+        <p:spPr>
+          <a:xfrm>
+            <a:off x="4297680" y="1234440"/>
+            <a:ext cx="7162495" cy="731520"/>
+          </a:xfrm>
+          <a:prstGeom prst="rect">
+            <a:avLst/>
+          </a:prstGeom>
+          <a:noFill/>
+        </p:spPr>
+        <p:txBody>
+          <a:bodyPr wrap="none">
+            <a:spAutoFit/>
+          </a:bodyPr>
+          <a:lstStyle/>
+          <a:p>
+            <a:pPr>
+              <a:defRPr sz="1600" b="1">
+                <a:solidFill>
+                  <a:srgbClr val="00873E"/>
+                </a:solidFill>
+                <a:latin typeface="Segoe UI"/>
+              </a:defRPr>
+            </a:pPr>
+            <a:r>
+              <a:t>Pensado para a Realidade de Quem Acessa pelo Celular</a:t>
+            </a:r>
+          </a:p>
+          <a:p>
+            <a:pPr>
+              <a:defRPr sz="1150">
+                <a:solidFill>
+                  <a:srgbClr val="64748B"/>
+                </a:solidFill>
+                <a:latin typeface="Segoe UI"/>
+              </a:defRPr>
+            </a:pPr>
+            <a:r>
+              <a:t>No Maranhão, a grande maioria acessa a internet exclusivamente pelo smartphone. Por isso, a adaptação mobile foi prioridade técnica e humana:</a:t>
+            </a:r>
+          </a:p>
+        </p:txBody>
+      </p:sp>
+      <p:sp>
+        <p:nvSpPr>
+          <p:cNvPr id="13" name="Rounded Rectangle 12"/>
           <p:cNvSpPr/>
           <p:nvPr/>
         </p:nvSpPr>
         <p:spPr>
           <a:xfrm>
-            <a:off x="4114800" y="1371600"/>
-            <a:ext cx="7498079" cy="4572000"/>
+            <a:off x="4297680" y="2103120"/>
+            <a:ext cx="7162495" cy="868680"/>
           </a:xfrm>
           <a:prstGeom prst="roundRect">
             <a:avLst/>
@@ -4533,7 +4959,7 @@
           <a:solidFill>
             <a:srgbClr val="F8FAFC"/>
           </a:solidFill>
-          <a:ln>
+          <a:ln w="12700">
             <a:solidFill>
               <a:srgbClr val="E2E8F0"/>
             </a:solidFill>
@@ -4554,89 +4980,512 @@
           </a:fontRef>
         </p:style>
         <p:txBody>
-          <a:bodyPr rtlCol="0" anchor="ctr" wrap="square" lIns="365760" tIns="365760" rIns="365760" bIns="365760"/>
-          <a:lstStyle/>
-          <a:p>
-            <a:pPr algn="ctr">
-              <a:defRPr sz="1800" b="1">
-                <a:solidFill>
-                  <a:srgbClr val="00873E"/>
-                </a:solidFill>
-                <a:latin typeface="Arial"/>
-              </a:defRPr>
-            </a:pPr>
-            <a:r>
-              <a:t>Pensado para a Realidade de Quem Acessa pelo Celular</a:t>
-            </a:r>
-          </a:p>
-          <a:p>
-            <a:br/>
-            <a:pPr>
-              <a:defRPr sz="1300">
+          <a:bodyPr rtlCol="0" anchor="ctr"/>
+          <a:lstStyle/>
+          <a:p>
+            <a:pPr algn="ctr"/>
+          </a:p>
+        </p:txBody>
+      </p:sp>
+      <p:sp>
+        <p:nvSpPr>
+          <p:cNvPr id="14" name="Rectangle 13"/>
+          <p:cNvSpPr/>
+          <p:nvPr/>
+        </p:nvSpPr>
+        <p:spPr>
+          <a:xfrm>
+            <a:off x="4297680" y="2103120"/>
+            <a:ext cx="73152" cy="868680"/>
+          </a:xfrm>
+          <a:prstGeom prst="rect">
+            <a:avLst/>
+          </a:prstGeom>
+          <a:solidFill>
+            <a:srgbClr val="00873E"/>
+          </a:solidFill>
+          <a:ln>
+            <a:noFill/>
+          </a:ln>
+        </p:spPr>
+        <p:style>
+          <a:lnRef idx="1">
+            <a:schemeClr val="accent1"/>
+          </a:lnRef>
+          <a:fillRef idx="3">
+            <a:schemeClr val="accent1"/>
+          </a:fillRef>
+          <a:effectRef idx="2">
+            <a:schemeClr val="accent1"/>
+          </a:effectRef>
+          <a:fontRef idx="minor">
+            <a:schemeClr val="lt1"/>
+          </a:fontRef>
+        </p:style>
+        <p:txBody>
+          <a:bodyPr rtlCol="0" anchor="ctr"/>
+          <a:lstStyle/>
+          <a:p>
+            <a:pPr algn="ctr"/>
+          </a:p>
+        </p:txBody>
+      </p:sp>
+      <p:sp>
+        <p:nvSpPr>
+          <p:cNvPr id="15" name="TextBox 14"/>
+          <p:cNvSpPr txBox="1"/>
+          <p:nvPr/>
+        </p:nvSpPr>
+        <p:spPr>
+          <a:xfrm>
+            <a:off x="4526280" y="2176272"/>
+            <a:ext cx="6766560" cy="731520"/>
+          </a:xfrm>
+          <a:prstGeom prst="rect">
+            <a:avLst/>
+          </a:prstGeom>
+          <a:noFill/>
+        </p:spPr>
+        <p:txBody>
+          <a:bodyPr wrap="square" lIns="0" tIns="0" rIns="0" bIns="0">
+            <a:spAutoFit/>
+          </a:bodyPr>
+          <a:lstStyle/>
+          <a:p>
+            <a:pPr>
+              <a:defRPr sz="1150" b="1">
                 <a:solidFill>
                   <a:srgbClr val="1E293B"/>
                 </a:solidFill>
-                <a:latin typeface="Arial"/>
-              </a:defRPr>
-            </a:pPr>
-            <a:r>
-              <a:t>No interior do Maranhão, a esmagadora maioria das pessoas navega exclusivamente pelo smartphone. Por isso, a adaptação mobile foi prioridade técnica e humana:</a:t>
-            </a:r>
-          </a:p>
-          <a:p>
-            <a:br/>
-            <a:pPr>
-              <a:defRPr sz="1200">
+                <a:latin typeface="Segoe UI"/>
+              </a:defRPr>
+            </a:pPr>
+            <a:r>
+              <a:t>Menu Retrátil Acessível:</a:t>
+            </a:r>
+          </a:p>
+          <a:p>
+            <a:pPr>
+              <a:defRPr sz="1050">
+                <a:solidFill>
+                  <a:srgbClr val="64748B"/>
+                </a:solidFill>
+                <a:latin typeface="Segoe UI"/>
+              </a:defRPr>
+            </a:pPr>
+            <a:r>
+              <a:t> O botão hambúrguer é fácil de tocar com o polegar, não polui a visão inicial e recolhe sozinho assim que o usuário clica na seção.</a:t>
+            </a:r>
+          </a:p>
+        </p:txBody>
+      </p:sp>
+      <p:sp>
+        <p:nvSpPr>
+          <p:cNvPr id="16" name="Rounded Rectangle 15"/>
+          <p:cNvSpPr/>
+          <p:nvPr/>
+        </p:nvSpPr>
+        <p:spPr>
+          <a:xfrm>
+            <a:off x="4297680" y="3063240"/>
+            <a:ext cx="7162495" cy="868680"/>
+          </a:xfrm>
+          <a:prstGeom prst="roundRect">
+            <a:avLst/>
+          </a:prstGeom>
+          <a:solidFill>
+            <a:srgbClr val="F8FAFC"/>
+          </a:solidFill>
+          <a:ln w="12700">
+            <a:solidFill>
+              <a:srgbClr val="E2E8F0"/>
+            </a:solidFill>
+          </a:ln>
+        </p:spPr>
+        <p:style>
+          <a:lnRef idx="1">
+            <a:schemeClr val="accent1"/>
+          </a:lnRef>
+          <a:fillRef idx="3">
+            <a:schemeClr val="accent1"/>
+          </a:fillRef>
+          <a:effectRef idx="2">
+            <a:schemeClr val="accent1"/>
+          </a:effectRef>
+          <a:fontRef idx="minor">
+            <a:schemeClr val="lt1"/>
+          </a:fontRef>
+        </p:style>
+        <p:txBody>
+          <a:bodyPr rtlCol="0" anchor="ctr"/>
+          <a:lstStyle/>
+          <a:p>
+            <a:pPr algn="ctr"/>
+          </a:p>
+        </p:txBody>
+      </p:sp>
+      <p:sp>
+        <p:nvSpPr>
+          <p:cNvPr id="17" name="Rectangle 16"/>
+          <p:cNvSpPr/>
+          <p:nvPr/>
+        </p:nvSpPr>
+        <p:spPr>
+          <a:xfrm>
+            <a:off x="4297680" y="3063240"/>
+            <a:ext cx="73152" cy="868680"/>
+          </a:xfrm>
+          <a:prstGeom prst="rect">
+            <a:avLst/>
+          </a:prstGeom>
+          <a:solidFill>
+            <a:srgbClr val="00873E"/>
+          </a:solidFill>
+          <a:ln>
+            <a:noFill/>
+          </a:ln>
+        </p:spPr>
+        <p:style>
+          <a:lnRef idx="1">
+            <a:schemeClr val="accent1"/>
+          </a:lnRef>
+          <a:fillRef idx="3">
+            <a:schemeClr val="accent1"/>
+          </a:fillRef>
+          <a:effectRef idx="2">
+            <a:schemeClr val="accent1"/>
+          </a:effectRef>
+          <a:fontRef idx="minor">
+            <a:schemeClr val="lt1"/>
+          </a:fontRef>
+        </p:style>
+        <p:txBody>
+          <a:bodyPr rtlCol="0" anchor="ctr"/>
+          <a:lstStyle/>
+          <a:p>
+            <a:pPr algn="ctr"/>
+          </a:p>
+        </p:txBody>
+      </p:sp>
+      <p:sp>
+        <p:nvSpPr>
+          <p:cNvPr id="18" name="TextBox 17"/>
+          <p:cNvSpPr txBox="1"/>
+          <p:nvPr/>
+        </p:nvSpPr>
+        <p:spPr>
+          <a:xfrm>
+            <a:off x="4526280" y="3136392"/>
+            <a:ext cx="6766560" cy="731520"/>
+          </a:xfrm>
+          <a:prstGeom prst="rect">
+            <a:avLst/>
+          </a:prstGeom>
+          <a:noFill/>
+        </p:spPr>
+        <p:txBody>
+          <a:bodyPr wrap="square" lIns="0" tIns="0" rIns="0" bIns="0">
+            <a:spAutoFit/>
+          </a:bodyPr>
+          <a:lstStyle/>
+          <a:p>
+            <a:pPr>
+              <a:defRPr sz="1150" b="1">
                 <a:solidFill>
                   <a:srgbClr val="1E293B"/>
                 </a:solidFill>
-                <a:latin typeface="Arial"/>
-              </a:defRPr>
-            </a:pPr>
-            <a:r>
-              <a:t>• Menu Retrátil Acessível: O botão hambúrguer é fácil de tocar com o polegar, não polui a visão inicial e recolhe sozinho assim que o usuário clica na seção.</a:t>
-            </a:r>
-          </a:p>
-          <a:p>
-            <a:br/>
-            <a:pPr>
-              <a:defRPr sz="1200">
+                <a:latin typeface="Segoe UI"/>
+              </a:defRPr>
+            </a:pPr>
+            <a:r>
+              <a:t>Cards em Coluna Única:</a:t>
+            </a:r>
+          </a:p>
+          <a:p>
+            <a:pPr>
+              <a:defRPr sz="1050">
+                <a:solidFill>
+                  <a:srgbClr val="64748B"/>
+                </a:solidFill>
+                <a:latin typeface="Segoe UI"/>
+              </a:defRPr>
+            </a:pPr>
+            <a:r>
+              <a:t> Os 13 bairros e os municípios do IBGE se reorganizam automaticamente em cascata vertical, sem barra de rolagem horizontal quebrada.</a:t>
+            </a:r>
+          </a:p>
+        </p:txBody>
+      </p:sp>
+      <p:sp>
+        <p:nvSpPr>
+          <p:cNvPr id="19" name="Rounded Rectangle 18"/>
+          <p:cNvSpPr/>
+          <p:nvPr/>
+        </p:nvSpPr>
+        <p:spPr>
+          <a:xfrm>
+            <a:off x="4297680" y="4023360"/>
+            <a:ext cx="7162495" cy="868680"/>
+          </a:xfrm>
+          <a:prstGeom prst="roundRect">
+            <a:avLst/>
+          </a:prstGeom>
+          <a:solidFill>
+            <a:srgbClr val="F8FAFC"/>
+          </a:solidFill>
+          <a:ln w="12700">
+            <a:solidFill>
+              <a:srgbClr val="E2E8F0"/>
+            </a:solidFill>
+          </a:ln>
+        </p:spPr>
+        <p:style>
+          <a:lnRef idx="1">
+            <a:schemeClr val="accent1"/>
+          </a:lnRef>
+          <a:fillRef idx="3">
+            <a:schemeClr val="accent1"/>
+          </a:fillRef>
+          <a:effectRef idx="2">
+            <a:schemeClr val="accent1"/>
+          </a:effectRef>
+          <a:fontRef idx="minor">
+            <a:schemeClr val="lt1"/>
+          </a:fontRef>
+        </p:style>
+        <p:txBody>
+          <a:bodyPr rtlCol="0" anchor="ctr"/>
+          <a:lstStyle/>
+          <a:p>
+            <a:pPr algn="ctr"/>
+          </a:p>
+        </p:txBody>
+      </p:sp>
+      <p:sp>
+        <p:nvSpPr>
+          <p:cNvPr id="20" name="Rectangle 19"/>
+          <p:cNvSpPr/>
+          <p:nvPr/>
+        </p:nvSpPr>
+        <p:spPr>
+          <a:xfrm>
+            <a:off x="4297680" y="4023360"/>
+            <a:ext cx="73152" cy="868680"/>
+          </a:xfrm>
+          <a:prstGeom prst="rect">
+            <a:avLst/>
+          </a:prstGeom>
+          <a:solidFill>
+            <a:srgbClr val="00873E"/>
+          </a:solidFill>
+          <a:ln>
+            <a:noFill/>
+          </a:ln>
+        </p:spPr>
+        <p:style>
+          <a:lnRef idx="1">
+            <a:schemeClr val="accent1"/>
+          </a:lnRef>
+          <a:fillRef idx="3">
+            <a:schemeClr val="accent1"/>
+          </a:fillRef>
+          <a:effectRef idx="2">
+            <a:schemeClr val="accent1"/>
+          </a:effectRef>
+          <a:fontRef idx="minor">
+            <a:schemeClr val="lt1"/>
+          </a:fontRef>
+        </p:style>
+        <p:txBody>
+          <a:bodyPr rtlCol="0" anchor="ctr"/>
+          <a:lstStyle/>
+          <a:p>
+            <a:pPr algn="ctr"/>
+          </a:p>
+        </p:txBody>
+      </p:sp>
+      <p:sp>
+        <p:nvSpPr>
+          <p:cNvPr id="21" name="TextBox 20"/>
+          <p:cNvSpPr txBox="1"/>
+          <p:nvPr/>
+        </p:nvSpPr>
+        <p:spPr>
+          <a:xfrm>
+            <a:off x="4526280" y="4096512"/>
+            <a:ext cx="6766560" cy="731520"/>
+          </a:xfrm>
+          <a:prstGeom prst="rect">
+            <a:avLst/>
+          </a:prstGeom>
+          <a:noFill/>
+        </p:spPr>
+        <p:txBody>
+          <a:bodyPr wrap="square" lIns="0" tIns="0" rIns="0" bIns="0">
+            <a:spAutoFit/>
+          </a:bodyPr>
+          <a:lstStyle/>
+          <a:p>
+            <a:pPr>
+              <a:defRPr sz="1150" b="1">
                 <a:solidFill>
                   <a:srgbClr val="1E293B"/>
                 </a:solidFill>
-                <a:latin typeface="Arial"/>
-              </a:defRPr>
-            </a:pPr>
-            <a:r>
-              <a:t>• Cards em Coluna Única: Os 13 bairros e os municípios do IBGE se reorganizam automaticamente em cascata vertical, sem barra de rolagem horizontal quebrada.</a:t>
-            </a:r>
-          </a:p>
-          <a:p>
-            <a:br/>
-            <a:pPr>
-              <a:defRPr sz="1200">
+                <a:latin typeface="Segoe UI"/>
+              </a:defRPr>
+            </a:pPr>
+            <a:r>
+              <a:t>Player Compacto:</a:t>
+            </a:r>
+          </a:p>
+          <a:p>
+            <a:pPr>
+              <a:defRPr sz="1050">
+                <a:solidFill>
+                  <a:srgbClr val="64748B"/>
+                </a:solidFill>
+                <a:latin typeface="Segoe UI"/>
+              </a:defRPr>
+            </a:pPr>
+            <a:r>
+              <a:t> A trilha sonora fica ancorada no canto inferior direito sem atrapalhar a leitura dos formulários.</a:t>
+            </a:r>
+          </a:p>
+        </p:txBody>
+      </p:sp>
+      <p:sp>
+        <p:nvSpPr>
+          <p:cNvPr id="22" name="Rounded Rectangle 21"/>
+          <p:cNvSpPr/>
+          <p:nvPr/>
+        </p:nvSpPr>
+        <p:spPr>
+          <a:xfrm>
+            <a:off x="4297680" y="4983480"/>
+            <a:ext cx="7162495" cy="868680"/>
+          </a:xfrm>
+          <a:prstGeom prst="roundRect">
+            <a:avLst/>
+          </a:prstGeom>
+          <a:solidFill>
+            <a:srgbClr val="F8FAFC"/>
+          </a:solidFill>
+          <a:ln w="12700">
+            <a:solidFill>
+              <a:srgbClr val="E2E8F0"/>
+            </a:solidFill>
+          </a:ln>
+        </p:spPr>
+        <p:style>
+          <a:lnRef idx="1">
+            <a:schemeClr val="accent1"/>
+          </a:lnRef>
+          <a:fillRef idx="3">
+            <a:schemeClr val="accent1"/>
+          </a:fillRef>
+          <a:effectRef idx="2">
+            <a:schemeClr val="accent1"/>
+          </a:effectRef>
+          <a:fontRef idx="minor">
+            <a:schemeClr val="lt1"/>
+          </a:fontRef>
+        </p:style>
+        <p:txBody>
+          <a:bodyPr rtlCol="0" anchor="ctr"/>
+          <a:lstStyle/>
+          <a:p>
+            <a:pPr algn="ctr"/>
+          </a:p>
+        </p:txBody>
+      </p:sp>
+      <p:sp>
+        <p:nvSpPr>
+          <p:cNvPr id="23" name="Rectangle 22"/>
+          <p:cNvSpPr/>
+          <p:nvPr/>
+        </p:nvSpPr>
+        <p:spPr>
+          <a:xfrm>
+            <a:off x="4297680" y="4983480"/>
+            <a:ext cx="73152" cy="868680"/>
+          </a:xfrm>
+          <a:prstGeom prst="rect">
+            <a:avLst/>
+          </a:prstGeom>
+          <a:solidFill>
+            <a:srgbClr val="00873E"/>
+          </a:solidFill>
+          <a:ln>
+            <a:noFill/>
+          </a:ln>
+        </p:spPr>
+        <p:style>
+          <a:lnRef idx="1">
+            <a:schemeClr val="accent1"/>
+          </a:lnRef>
+          <a:fillRef idx="3">
+            <a:schemeClr val="accent1"/>
+          </a:fillRef>
+          <a:effectRef idx="2">
+            <a:schemeClr val="accent1"/>
+          </a:effectRef>
+          <a:fontRef idx="minor">
+            <a:schemeClr val="lt1"/>
+          </a:fontRef>
+        </p:style>
+        <p:txBody>
+          <a:bodyPr rtlCol="0" anchor="ctr"/>
+          <a:lstStyle/>
+          <a:p>
+            <a:pPr algn="ctr"/>
+          </a:p>
+        </p:txBody>
+      </p:sp>
+      <p:sp>
+        <p:nvSpPr>
+          <p:cNvPr id="24" name="TextBox 23"/>
+          <p:cNvSpPr txBox="1"/>
+          <p:nvPr/>
+        </p:nvSpPr>
+        <p:spPr>
+          <a:xfrm>
+            <a:off x="4526280" y="5056632"/>
+            <a:ext cx="6766560" cy="731520"/>
+          </a:xfrm>
+          <a:prstGeom prst="rect">
+            <a:avLst/>
+          </a:prstGeom>
+          <a:noFill/>
+        </p:spPr>
+        <p:txBody>
+          <a:bodyPr wrap="square" lIns="0" tIns="0" rIns="0" bIns="0">
+            <a:spAutoFit/>
+          </a:bodyPr>
+          <a:lstStyle/>
+          <a:p>
+            <a:pPr>
+              <a:defRPr sz="1150" b="1">
                 <a:solidFill>
                   <a:srgbClr val="1E293B"/>
                 </a:solidFill>
-                <a:latin typeface="Arial"/>
-              </a:defRPr>
-            </a:pPr>
-            <a:r>
-              <a:t>• Player Compacto: A trilha sonora fica ancorada no canto inferior sem atrapalhar a leitura nem os formulários.</a:t>
-            </a:r>
-          </a:p>
-          <a:p>
-            <a:br/>
-            <a:pPr>
-              <a:defRPr sz="1200">
-                <a:solidFill>
-                  <a:srgbClr val="1E293B"/>
-                </a:solidFill>
-                <a:latin typeface="Arial"/>
-              </a:defRPr>
-            </a:pPr>
-            <a:r>
-              <a:t>• Teclado Numérico Otimizado: Campos de quantidade e valores abrem o teclado numérico nativo do celular.</a:t>
+                <a:latin typeface="Segoe UI"/>
+              </a:defRPr>
+            </a:pPr>
+            <a:r>
+              <a:t>Teclado Numérico Otimizado:</a:t>
+            </a:r>
+          </a:p>
+          <a:p>
+            <a:pPr>
+              <a:defRPr sz="1050">
+                <a:solidFill>
+                  <a:srgbClr val="64748B"/>
+                </a:solidFill>
+                <a:latin typeface="Segoe UI"/>
+              </a:defRPr>
+            </a:pPr>
+            <a:r>
+              <a:t> Campos de quantidade e valores abrem automaticamente o teclado numérico nativo do celular.</a:t>
             </a:r>
           </a:p>
         </p:txBody>
@@ -4667,8 +5516,8 @@
         </p:nvSpPr>
         <p:spPr>
           <a:xfrm>
-            <a:off x="548640" y="365760"/>
-            <a:ext cx="8686800" cy="731520"/>
+            <a:off x="731520" y="365760"/>
+            <a:ext cx="8412480" cy="685800"/>
           </a:xfrm>
           <a:prstGeom prst="rect">
             <a:avLst/>
@@ -4682,11 +5531,11 @@
           <a:lstStyle/>
           <a:p>
             <a:pPr>
-              <a:defRPr sz="2200" b="1">
+              <a:defRPr sz="2100" b="1">
                 <a:solidFill>
                   <a:srgbClr val="00873E"/>
                 </a:solidFill>
-                <a:latin typeface="Arial"/>
+                <a:latin typeface="Segoe UI"/>
               </a:defRPr>
             </a:pPr>
             <a:r>
@@ -4703,8 +5552,8 @@
         </p:nvSpPr>
         <p:spPr>
           <a:xfrm>
-            <a:off x="9326880" y="411480"/>
-            <a:ext cx="2286000" cy="365760"/>
+            <a:off x="9235440" y="411480"/>
+            <a:ext cx="2194560" cy="347472"/>
           </a:xfrm>
           <a:prstGeom prst="roundRect">
             <a:avLst/>
@@ -4712,7 +5561,7 @@
           <a:solidFill>
             <a:srgbClr val="F8FAFC"/>
           </a:solidFill>
-          <a:ln>
+          <a:ln w="12700">
             <a:solidFill>
               <a:srgbClr val="E2E8F0"/>
             </a:solidFill>
@@ -4733,19 +5582,19 @@
           </a:fontRef>
         </p:style>
         <p:txBody>
-          <a:bodyPr rtlCol="0" anchor="ctr" wrap="none"/>
+          <a:bodyPr rtlCol="0" anchor="ctr" tIns="54864"/>
           <a:lstStyle/>
           <a:p>
             <a:pPr algn="ctr">
-              <a:defRPr sz="1100" b="1">
+              <a:defRPr sz="1000" b="1">
                 <a:solidFill>
                   <a:srgbClr val="64748B"/>
                 </a:solidFill>
-                <a:latin typeface="Arial"/>
-              </a:defRPr>
-            </a:pPr>
-            <a:r>
-              <a:t>6. Aprendizados &amp; ABNT</a:t>
+                <a:latin typeface="Segoe UI"/>
+              </a:defRPr>
+            </a:pPr>
+            <a:r>
+              <a:t>6. APRENDIZADOS &amp; ABNT</a:t>
             </a:r>
           </a:p>
         </p:txBody>
@@ -4758,8 +5607,8 @@
         </p:nvSpPr>
         <p:spPr>
           <a:xfrm>
-            <a:off x="548640" y="1097280"/>
-            <a:ext cx="11094415" cy="18288"/>
+            <a:off x="731520" y="1051560"/>
+            <a:ext cx="10728655" cy="13716"/>
           </a:xfrm>
           <a:prstGeom prst="rect">
             <a:avLst/>
@@ -4768,9 +5617,7 @@
             <a:srgbClr val="E2E8F0"/>
           </a:solidFill>
           <a:ln>
-            <a:solidFill>
-              <a:srgbClr val="E2E8F0"/>
-            </a:solidFill>
+            <a:noFill/>
           </a:ln>
         </p:spPr>
         <p:style>
@@ -4803,8 +5650,8 @@
         </p:nvSpPr>
         <p:spPr>
           <a:xfrm>
-            <a:off x="548640" y="6263640"/>
-            <a:ext cx="11094415" cy="18288"/>
+            <a:off x="731520" y="6263640"/>
+            <a:ext cx="10728655" cy="13716"/>
           </a:xfrm>
           <a:prstGeom prst="rect">
             <a:avLst/>
@@ -4813,9 +5660,7 @@
             <a:srgbClr val="E2E8F0"/>
           </a:solidFill>
           <a:ln>
-            <a:solidFill>
-              <a:srgbClr val="E2E8F0"/>
-            </a:solidFill>
+            <a:noFill/>
           </a:ln>
         </p:spPr>
         <p:style>
@@ -4848,7 +5693,7 @@
         </p:nvSpPr>
         <p:spPr>
           <a:xfrm>
-            <a:off x="548640" y="6327648"/>
+            <a:off x="731520" y="6327648"/>
             <a:ext cx="5486400" cy="320040"/>
           </a:xfrm>
           <a:prstGeom prst="rect">
@@ -4863,15 +5708,15 @@
           <a:lstStyle/>
           <a:p>
             <a:pPr>
-              <a:defRPr sz="1000">
+              <a:defRPr sz="950">
                 <a:solidFill>
                   <a:srgbClr val="64748B"/>
                 </a:solidFill>
-                <a:latin typeface="Arial"/>
-              </a:defRPr>
-            </a:pPr>
-            <a:r>
-              <a:t>Timbiras Solidária — ADS UEMA 2026 | Polo Timbiras</a:t>
+                <a:latin typeface="Segoe UI"/>
+              </a:defRPr>
+            </a:pPr>
+            <a:r>
+              <a:t>Timbiras Solidária — ADS UEMA 2026 | Polo Universitário de Timbiras</a:t>
             </a:r>
           </a:p>
         </p:txBody>
@@ -4884,8 +5729,8 @@
         </p:nvSpPr>
         <p:spPr>
           <a:xfrm>
-            <a:off x="9144000" y="6327648"/>
-            <a:ext cx="2499055" cy="320040"/>
+            <a:off x="8686800" y="6327648"/>
+            <a:ext cx="2773375" cy="320040"/>
           </a:xfrm>
           <a:prstGeom prst="rect">
             <a:avLst/>
@@ -4899,11 +5744,11 @@
           <a:lstStyle/>
           <a:p>
             <a:pPr algn="r">
-              <a:defRPr sz="1000" b="1">
+              <a:defRPr sz="950" b="1">
                 <a:solidFill>
                   <a:srgbClr val="64748B"/>
                 </a:solidFill>
-                <a:latin typeface="Arial"/>
+                <a:latin typeface="Segoe UI"/>
               </a:defRPr>
             </a:pPr>
             <a:r>
@@ -4920,18 +5765,18 @@
         </p:nvSpPr>
         <p:spPr>
           <a:xfrm>
-            <a:off x="548640" y="1371600"/>
-            <a:ext cx="5394960" cy="4572000"/>
+            <a:off x="731520" y="1234440"/>
+            <a:ext cx="5166360" cy="2286000"/>
           </a:xfrm>
           <a:prstGeom prst="roundRect">
             <a:avLst/>
           </a:prstGeom>
           <a:solidFill>
-            <a:srgbClr val="F0FDF4"/>
+            <a:srgbClr val="FEFCE8"/>
           </a:solidFill>
-          <a:ln>
+          <a:ln w="12700">
             <a:solidFill>
-              <a:srgbClr val="10B981"/>
+              <a:srgbClr val="FEF08A"/>
             </a:solidFill>
           </a:ln>
         </p:spPr>
@@ -4950,98 +5795,32 @@
           </a:fontRef>
         </p:style>
         <p:txBody>
-          <a:bodyPr rtlCol="0" anchor="ctr" wrap="square" lIns="274320" tIns="274320" rIns="274320" bIns="274320"/>
-          <a:lstStyle/>
-          <a:p>
-            <a:pPr algn="ctr">
-              <a:defRPr sz="1600" b="1">
-                <a:solidFill>
-                  <a:srgbClr val="00873E"/>
-                </a:solidFill>
-                <a:latin typeface="Arial"/>
-              </a:defRPr>
-            </a:pPr>
-            <a:r>
-              <a:t>Muito Além de Linhas de Código</a:t>
-            </a:r>
-          </a:p>
-          <a:p>
-            <a:br/>
-            <a:pPr>
-              <a:defRPr sz="1400" b="1">
-                <a:solidFill>
-                  <a:srgbClr val="00873E"/>
-                </a:solidFill>
-                <a:latin typeface="Arial"/>
-              </a:defRPr>
-            </a:pPr>
-            <a:r>
-              <a:t>Tecnologia Feita por Pessoas, Para Pessoas:</a:t>
-            </a:r>
-          </a:p>
-          <a:p>
-            <a:pPr>
-              <a:defRPr sz="1200">
-                <a:solidFill>
-                  <a:srgbClr val="1E293B"/>
-                </a:solidFill>
-                <a:latin typeface="Arial"/>
-              </a:defRPr>
-            </a:pPr>
-            <a:r>
-              <a:t>Aprendemos que um framework moderno como o React ou uma API governamental só têm valor quando resolvem um problema humano real. O código ganha vida quando serve para combater a fome e valorizar a nossa terra.</a:t>
-            </a:r>
-          </a:p>
-          <a:p>
-            <a:br/>
-            <a:pPr>
-              <a:defRPr sz="1400" b="1">
-                <a:solidFill>
-                  <a:srgbClr val="00873E"/>
-                </a:solidFill>
-                <a:latin typeface="Arial"/>
-              </a:defRPr>
-            </a:pPr>
-            <a:r>
-              <a:t>Prontos para a Nota 3:</a:t>
-            </a:r>
-          </a:p>
-          <a:p>
-            <a:pPr>
-              <a:defRPr sz="1200">
-                <a:solidFill>
-                  <a:srgbClr val="1E293B"/>
-                </a:solidFill>
-                <a:latin typeface="Arial"/>
-              </a:defRPr>
-            </a:pPr>
-            <a:r>
-              <a:t>A equipe conclui esta etapa com o sistema no ar, dados reais integrados e muito orgulho do que construímos. Estamos preparados e entusiasmados para a apresentação presencial no polo de Timbiras!</a:t>
-            </a:r>
-          </a:p>
-        </p:txBody>
-      </p:sp>
-      <p:sp>
-        <p:nvSpPr>
-          <p:cNvPr id="9" name="Rounded Rectangle 8"/>
+          <a:bodyPr rtlCol="0" anchor="ctr"/>
+          <a:lstStyle/>
+          <a:p>
+            <a:pPr algn="ctr"/>
+          </a:p>
+        </p:txBody>
+      </p:sp>
+      <p:sp>
+        <p:nvSpPr>
+          <p:cNvPr id="9" name="Rectangle 8"/>
           <p:cNvSpPr/>
           <p:nvPr/>
         </p:nvSpPr>
         <p:spPr>
           <a:xfrm>
-            <a:off x="6217920" y="1371600"/>
-            <a:ext cx="5394960" cy="4572000"/>
-          </a:xfrm>
-          <a:prstGeom prst="roundRect">
+            <a:off x="731520" y="1234440"/>
+            <a:ext cx="73152" cy="2286000"/>
+          </a:xfrm>
+          <a:prstGeom prst="rect">
             <a:avLst/>
           </a:prstGeom>
           <a:solidFill>
-            <a:srgbClr val="F8FAFC"/>
+            <a:srgbClr val="F59E0B"/>
           </a:solidFill>
           <a:ln>
-            <a:solidFill>
-              <a:srgbClr val="E2E8F0"/>
-            </a:solidFill>
+            <a:noFill/>
           </a:ln>
         </p:spPr>
         <p:style>
@@ -5059,15 +5838,274 @@
           </a:fontRef>
         </p:style>
         <p:txBody>
-          <a:bodyPr rtlCol="0" anchor="ctr" wrap="square" lIns="274320" tIns="274320" rIns="274320" bIns="274320"/>
-          <a:lstStyle/>
-          <a:p>
-            <a:pPr algn="ctr">
-              <a:defRPr sz="1500" b="1">
+          <a:bodyPr rtlCol="0" anchor="ctr"/>
+          <a:lstStyle/>
+          <a:p>
+            <a:pPr algn="ctr"/>
+          </a:p>
+        </p:txBody>
+      </p:sp>
+      <p:sp>
+        <p:nvSpPr>
+          <p:cNvPr id="10" name="TextBox 9"/>
+          <p:cNvSpPr txBox="1"/>
+          <p:nvPr/>
+        </p:nvSpPr>
+        <p:spPr>
+          <a:xfrm>
+            <a:off x="960120" y="1371600"/>
+            <a:ext cx="4754880" cy="1965960"/>
+          </a:xfrm>
+          <a:prstGeom prst="rect">
+            <a:avLst/>
+          </a:prstGeom>
+          <a:noFill/>
+        </p:spPr>
+        <p:txBody>
+          <a:bodyPr wrap="square" lIns="0" tIns="0" rIns="0" bIns="0">
+            <a:spAutoFit/>
+          </a:bodyPr>
+          <a:lstStyle/>
+          <a:p>
+            <a:pPr>
+              <a:defRPr sz="1350" b="1">
+                <a:solidFill>
+                  <a:srgbClr val="B45309"/>
+                </a:solidFill>
+                <a:latin typeface="Segoe UI"/>
+              </a:defRPr>
+            </a:pPr>
+            <a:r>
+              <a:t>Tecnologia Feita por Pessoas, Para Pessoas:</a:t>
+            </a:r>
+          </a:p>
+          <a:p>
+            <a:br/>
+            <a:pPr>
+              <a:defRPr sz="1150">
+                <a:solidFill>
+                  <a:srgbClr val="1E293B"/>
+                </a:solidFill>
+                <a:latin typeface="Segoe UI"/>
+              </a:defRPr>
+            </a:pPr>
+            <a:r>
+              <a:t>Aprendemos que um framework moderno como o React ou uma API do governo só têm valor quando resolvem um problema humano real. O código ganha vida quando serve para combater a fome e valorizar a nossa terra.</a:t>
+            </a:r>
+          </a:p>
+        </p:txBody>
+      </p:sp>
+      <p:sp>
+        <p:nvSpPr>
+          <p:cNvPr id="11" name="Rounded Rectangle 10"/>
+          <p:cNvSpPr/>
+          <p:nvPr/>
+        </p:nvSpPr>
+        <p:spPr>
+          <a:xfrm>
+            <a:off x="731520" y="3749039"/>
+            <a:ext cx="5166360" cy="2286000"/>
+          </a:xfrm>
+          <a:prstGeom prst="roundRect">
+            <a:avLst/>
+          </a:prstGeom>
+          <a:solidFill>
+            <a:srgbClr val="F8FAFC"/>
+          </a:solidFill>
+          <a:ln w="12700">
+            <a:solidFill>
+              <a:srgbClr val="E2E8F0"/>
+            </a:solidFill>
+          </a:ln>
+        </p:spPr>
+        <p:style>
+          <a:lnRef idx="1">
+            <a:schemeClr val="accent1"/>
+          </a:lnRef>
+          <a:fillRef idx="3">
+            <a:schemeClr val="accent1"/>
+          </a:fillRef>
+          <a:effectRef idx="2">
+            <a:schemeClr val="accent1"/>
+          </a:effectRef>
+          <a:fontRef idx="minor">
+            <a:schemeClr val="lt1"/>
+          </a:fontRef>
+        </p:style>
+        <p:txBody>
+          <a:bodyPr rtlCol="0" anchor="ctr"/>
+          <a:lstStyle/>
+          <a:p>
+            <a:pPr algn="ctr"/>
+          </a:p>
+        </p:txBody>
+      </p:sp>
+      <p:sp>
+        <p:nvSpPr>
+          <p:cNvPr id="12" name="Rectangle 11"/>
+          <p:cNvSpPr/>
+          <p:nvPr/>
+        </p:nvSpPr>
+        <p:spPr>
+          <a:xfrm>
+            <a:off x="731520" y="3749039"/>
+            <a:ext cx="73152" cy="2286000"/>
+          </a:xfrm>
+          <a:prstGeom prst="rect">
+            <a:avLst/>
+          </a:prstGeom>
+          <a:solidFill>
+            <a:srgbClr val="00873E"/>
+          </a:solidFill>
+          <a:ln>
+            <a:noFill/>
+          </a:ln>
+        </p:spPr>
+        <p:style>
+          <a:lnRef idx="1">
+            <a:schemeClr val="accent1"/>
+          </a:lnRef>
+          <a:fillRef idx="3">
+            <a:schemeClr val="accent1"/>
+          </a:fillRef>
+          <a:effectRef idx="2">
+            <a:schemeClr val="accent1"/>
+          </a:effectRef>
+          <a:fontRef idx="minor">
+            <a:schemeClr val="lt1"/>
+          </a:fontRef>
+        </p:style>
+        <p:txBody>
+          <a:bodyPr rtlCol="0" anchor="ctr"/>
+          <a:lstStyle/>
+          <a:p>
+            <a:pPr algn="ctr"/>
+          </a:p>
+        </p:txBody>
+      </p:sp>
+      <p:sp>
+        <p:nvSpPr>
+          <p:cNvPr id="13" name="TextBox 12"/>
+          <p:cNvSpPr txBox="1"/>
+          <p:nvPr/>
+        </p:nvSpPr>
+        <p:spPr>
+          <a:xfrm>
+            <a:off x="960120" y="3886200"/>
+            <a:ext cx="4754880" cy="1965960"/>
+          </a:xfrm>
+          <a:prstGeom prst="rect">
+            <a:avLst/>
+          </a:prstGeom>
+          <a:noFill/>
+        </p:spPr>
+        <p:txBody>
+          <a:bodyPr wrap="square" lIns="0" tIns="0" rIns="0" bIns="0">
+            <a:spAutoFit/>
+          </a:bodyPr>
+          <a:lstStyle/>
+          <a:p>
+            <a:pPr>
+              <a:defRPr sz="1350" b="1">
                 <a:solidFill>
                   <a:srgbClr val="00873E"/>
                 </a:solidFill>
-                <a:latin typeface="Arial"/>
+                <a:latin typeface="Segoe UI"/>
+              </a:defRPr>
+            </a:pPr>
+            <a:r>
+              <a:t>Prontos para a Nota 3:</a:t>
+            </a:r>
+          </a:p>
+          <a:p>
+            <a:br/>
+            <a:pPr>
+              <a:defRPr sz="1150">
+                <a:solidFill>
+                  <a:srgbClr val="1E293B"/>
+                </a:solidFill>
+                <a:latin typeface="Segoe UI"/>
+              </a:defRPr>
+            </a:pPr>
+            <a:r>
+              <a:t>A equipe conclui esta etapa com o sistema no ar, dados reais integrados e muito orgulho do que construímos. Estamos preparados e entusiasmados para a apresentação presencial no polo de Timbiras!</a:t>
+            </a:r>
+          </a:p>
+        </p:txBody>
+      </p:sp>
+      <p:sp>
+        <p:nvSpPr>
+          <p:cNvPr id="14" name="Rounded Rectangle 13"/>
+          <p:cNvSpPr/>
+          <p:nvPr/>
+        </p:nvSpPr>
+        <p:spPr>
+          <a:xfrm>
+            <a:off x="6263640" y="1234440"/>
+            <a:ext cx="5166360" cy="4800600"/>
+          </a:xfrm>
+          <a:prstGeom prst="roundRect">
+            <a:avLst/>
+          </a:prstGeom>
+          <a:solidFill>
+            <a:srgbClr val="F8FAFC"/>
+          </a:solidFill>
+          <a:ln w="12700">
+            <a:solidFill>
+              <a:srgbClr val="E2E8F0"/>
+            </a:solidFill>
+          </a:ln>
+        </p:spPr>
+        <p:style>
+          <a:lnRef idx="1">
+            <a:schemeClr val="accent1"/>
+          </a:lnRef>
+          <a:fillRef idx="3">
+            <a:schemeClr val="accent1"/>
+          </a:fillRef>
+          <a:effectRef idx="2">
+            <a:schemeClr val="accent1"/>
+          </a:effectRef>
+          <a:fontRef idx="minor">
+            <a:schemeClr val="lt1"/>
+          </a:fontRef>
+        </p:style>
+        <p:txBody>
+          <a:bodyPr rtlCol="0" anchor="ctr"/>
+          <a:lstStyle/>
+          <a:p>
+            <a:pPr algn="ctr"/>
+          </a:p>
+        </p:txBody>
+      </p:sp>
+      <p:sp>
+        <p:nvSpPr>
+          <p:cNvPr id="15" name="TextBox 14"/>
+          <p:cNvSpPr txBox="1"/>
+          <p:nvPr/>
+        </p:nvSpPr>
+        <p:spPr>
+          <a:xfrm>
+            <a:off x="6492240" y="1417320"/>
+            <a:ext cx="4709160" cy="4434840"/>
+          </a:xfrm>
+          <a:prstGeom prst="rect">
+            <a:avLst/>
+          </a:prstGeom>
+          <a:noFill/>
+        </p:spPr>
+        <p:txBody>
+          <a:bodyPr wrap="square" lIns="0" tIns="0" rIns="0" bIns="0">
+            <a:spAutoFit/>
+          </a:bodyPr>
+          <a:lstStyle/>
+          <a:p>
+            <a:pPr>
+              <a:defRPr sz="1400" b="1">
+                <a:solidFill>
+                  <a:srgbClr val="00873E"/>
+                </a:solidFill>
+                <a:latin typeface="Segoe UI"/>
               </a:defRPr>
             </a:pPr>
             <a:r>
@@ -5077,11 +6115,11 @@
           <a:p>
             <a:br/>
             <a:pPr>
-              <a:defRPr sz="950">
+              <a:defRPr sz="900">
                 <a:solidFill>
                   <a:srgbClr val="64748B"/>
                 </a:solidFill>
-                <a:latin typeface="Arial"/>
+                <a:latin typeface="Segoe UI"/>
               </a:defRPr>
             </a:pPr>
             <a:r>
@@ -5091,11 +6129,11 @@
           <a:p>
             <a:br/>
             <a:pPr>
-              <a:defRPr sz="950">
+              <a:defRPr sz="900">
                 <a:solidFill>
                   <a:srgbClr val="64748B"/>
                 </a:solidFill>
-                <a:latin typeface="Arial"/>
+                <a:latin typeface="Segoe UI"/>
               </a:defRPr>
             </a:pPr>
             <a:r>
@@ -5105,11 +6143,11 @@
           <a:p>
             <a:br/>
             <a:pPr>
-              <a:defRPr sz="950">
+              <a:defRPr sz="900">
                 <a:solidFill>
                   <a:srgbClr val="64748B"/>
                 </a:solidFill>
-                <a:latin typeface="Arial"/>
+                <a:latin typeface="Segoe UI"/>
               </a:defRPr>
             </a:pPr>
             <a:r>
@@ -5119,11 +6157,11 @@
           <a:p>
             <a:br/>
             <a:pPr>
-              <a:defRPr sz="950">
+              <a:defRPr sz="900">
                 <a:solidFill>
                   <a:srgbClr val="64748B"/>
                 </a:solidFill>
-                <a:latin typeface="Arial"/>
+                <a:latin typeface="Segoe UI"/>
               </a:defRPr>
             </a:pPr>
             <a:r>
@@ -5133,11 +6171,11 @@
           <a:p>
             <a:br/>
             <a:pPr>
-              <a:defRPr sz="950">
+              <a:defRPr sz="900">
                 <a:solidFill>
                   <a:srgbClr val="64748B"/>
                 </a:solidFill>
-                <a:latin typeface="Arial"/>
+                <a:latin typeface="Segoe UI"/>
               </a:defRPr>
             </a:pPr>
             <a:r>
@@ -5147,11 +6185,11 @@
           <a:p>
             <a:br/>
             <a:pPr>
-              <a:defRPr sz="950">
+              <a:defRPr sz="900">
                 <a:solidFill>
                   <a:srgbClr val="64748B"/>
                 </a:solidFill>
-                <a:latin typeface="Arial"/>
+                <a:latin typeface="Segoe UI"/>
               </a:defRPr>
             </a:pPr>
             <a:r>
@@ -5186,8 +6224,8 @@
         </p:nvSpPr>
         <p:spPr>
           <a:xfrm>
-            <a:off x="548640" y="365760"/>
-            <a:ext cx="8686800" cy="731520"/>
+            <a:off x="731520" y="365760"/>
+            <a:ext cx="8412480" cy="685800"/>
           </a:xfrm>
           <a:prstGeom prst="rect">
             <a:avLst/>
@@ -5201,11 +6239,11 @@
           <a:lstStyle/>
           <a:p>
             <a:pPr>
-              <a:defRPr sz="2200" b="1">
+              <a:defRPr sz="2100" b="1">
                 <a:solidFill>
                   <a:srgbClr val="00873E"/>
                 </a:solidFill>
-                <a:latin typeface="Arial"/>
+                <a:latin typeface="Segoe UI"/>
               </a:defRPr>
             </a:pPr>
             <a:r>
@@ -5222,8 +6260,8 @@
         </p:nvSpPr>
         <p:spPr>
           <a:xfrm>
-            <a:off x="9326880" y="411480"/>
-            <a:ext cx="2286000" cy="365760"/>
+            <a:off x="9235440" y="411480"/>
+            <a:ext cx="2194560" cy="347472"/>
           </a:xfrm>
           <a:prstGeom prst="roundRect">
             <a:avLst/>
@@ -5231,7 +6269,7 @@
           <a:solidFill>
             <a:srgbClr val="F8FAFC"/>
           </a:solidFill>
-          <a:ln>
+          <a:ln w="12700">
             <a:solidFill>
               <a:srgbClr val="E2E8F0"/>
             </a:solidFill>
@@ -5252,19 +6290,19 @@
           </a:fontRef>
         </p:style>
         <p:txBody>
-          <a:bodyPr rtlCol="0" anchor="ctr" wrap="none"/>
+          <a:bodyPr rtlCol="0" anchor="ctr" tIns="54864"/>
           <a:lstStyle/>
           <a:p>
             <a:pPr algn="ctr">
-              <a:defRPr sz="1100" b="1">
+              <a:defRPr sz="1000" b="1">
                 <a:solidFill>
                   <a:srgbClr val="64748B"/>
                 </a:solidFill>
-                <a:latin typeface="Arial"/>
-              </a:defRPr>
-            </a:pPr>
-            <a:r>
-              <a:t>1. Introdução</a:t>
+                <a:latin typeface="Segoe UI"/>
+              </a:defRPr>
+            </a:pPr>
+            <a:r>
+              <a:t>1. INTRODUÇÃO</a:t>
             </a:r>
           </a:p>
         </p:txBody>
@@ -5277,8 +6315,8 @@
         </p:nvSpPr>
         <p:spPr>
           <a:xfrm>
-            <a:off x="548640" y="1097280"/>
-            <a:ext cx="11094415" cy="18288"/>
+            <a:off x="731520" y="1051560"/>
+            <a:ext cx="10728655" cy="13716"/>
           </a:xfrm>
           <a:prstGeom prst="rect">
             <a:avLst/>
@@ -5287,9 +6325,7 @@
             <a:srgbClr val="E2E8F0"/>
           </a:solidFill>
           <a:ln>
-            <a:solidFill>
-              <a:srgbClr val="E2E8F0"/>
-            </a:solidFill>
+            <a:noFill/>
           </a:ln>
         </p:spPr>
         <p:style>
@@ -5322,8 +6358,8 @@
         </p:nvSpPr>
         <p:spPr>
           <a:xfrm>
-            <a:off x="548640" y="6263640"/>
-            <a:ext cx="11094415" cy="18288"/>
+            <a:off x="731520" y="6263640"/>
+            <a:ext cx="10728655" cy="13716"/>
           </a:xfrm>
           <a:prstGeom prst="rect">
             <a:avLst/>
@@ -5332,9 +6368,7 @@
             <a:srgbClr val="E2E8F0"/>
           </a:solidFill>
           <a:ln>
-            <a:solidFill>
-              <a:srgbClr val="E2E8F0"/>
-            </a:solidFill>
+            <a:noFill/>
           </a:ln>
         </p:spPr>
         <p:style>
@@ -5367,7 +6401,7 @@
         </p:nvSpPr>
         <p:spPr>
           <a:xfrm>
-            <a:off x="548640" y="6327648"/>
+            <a:off x="731520" y="6327648"/>
             <a:ext cx="5486400" cy="320040"/>
           </a:xfrm>
           <a:prstGeom prst="rect">
@@ -5382,15 +6416,15 @@
           <a:lstStyle/>
           <a:p>
             <a:pPr>
-              <a:defRPr sz="1000">
+              <a:defRPr sz="950">
                 <a:solidFill>
                   <a:srgbClr val="64748B"/>
                 </a:solidFill>
-                <a:latin typeface="Arial"/>
-              </a:defRPr>
-            </a:pPr>
-            <a:r>
-              <a:t>Timbiras Solidária — ADS UEMA 2026 | Polo Timbiras</a:t>
+                <a:latin typeface="Segoe UI"/>
+              </a:defRPr>
+            </a:pPr>
+            <a:r>
+              <a:t>Timbiras Solidária — ADS UEMA 2026 | Polo Universitário de Timbiras</a:t>
             </a:r>
           </a:p>
         </p:txBody>
@@ -5403,8 +6437,8 @@
         </p:nvSpPr>
         <p:spPr>
           <a:xfrm>
-            <a:off x="9144000" y="6327648"/>
-            <a:ext cx="2499055" cy="320040"/>
+            <a:off x="8686800" y="6327648"/>
+            <a:ext cx="2773375" cy="320040"/>
           </a:xfrm>
           <a:prstGeom prst="rect">
             <a:avLst/>
@@ -5418,11 +6452,11 @@
           <a:lstStyle/>
           <a:p>
             <a:pPr algn="r">
-              <a:defRPr sz="1000" b="1">
+              <a:defRPr sz="950" b="1">
                 <a:solidFill>
                   <a:srgbClr val="64748B"/>
                 </a:solidFill>
-                <a:latin typeface="Arial"/>
+                <a:latin typeface="Segoe UI"/>
               </a:defRPr>
             </a:pPr>
             <a:r>
@@ -5433,14 +6467,64 @@
       </p:sp>
       <p:sp>
         <p:nvSpPr>
-          <p:cNvPr id="8" name="Rounded Rectangle 7"/>
+          <p:cNvPr id="8" name="TextBox 7"/>
+          <p:cNvSpPr txBox="1"/>
+          <p:nvPr/>
+        </p:nvSpPr>
+        <p:spPr>
+          <a:xfrm>
+            <a:off x="731520" y="1234440"/>
+            <a:ext cx="5943600" cy="2377440"/>
+          </a:xfrm>
+          <a:prstGeom prst="rect">
+            <a:avLst/>
+          </a:prstGeom>
+          <a:noFill/>
+        </p:spPr>
+        <p:txBody>
+          <a:bodyPr wrap="square" lIns="0" tIns="0" rIns="0" bIns="0">
+            <a:spAutoFit/>
+          </a:bodyPr>
+          <a:lstStyle/>
+          <a:p>
+            <a:pPr>
+              <a:defRPr sz="1550" b="1">
+                <a:solidFill>
+                  <a:srgbClr val="1E293B"/>
+                </a:solidFill>
+                <a:latin typeface="Segoe UI"/>
+              </a:defRPr>
+            </a:pPr>
+            <a:r>
+              <a:t>A fome não é um número abstrato: ela tem nome, endereço e rosto nos bairros e na zona rural da nossa cidade.</a:t>
+            </a:r>
+          </a:p>
+          <a:p>
+            <a:br/>
+            <a:pPr>
+              <a:defRPr sz="1250">
+                <a:solidFill>
+                  <a:srgbClr val="64748B"/>
+                </a:solidFill>
+                <a:latin typeface="Segoe UI"/>
+              </a:defRPr>
+            </a:pPr>
+            <a:r>
+              <a:t>Timbiras é uma cidade acolhedora, forte e trabalhadora, banhada pelas águas do Rio Itapecuru. Mas, como tantas cidades do interior do Maranhão, muitas famílias de bairros como Forquilha, Mutirão, Alto Fogoso, Olaria e povoados rurais distantes enfrentam dias difíceis para garantir o básico na mesa.</a:t>
+            </a:r>
+          </a:p>
+        </p:txBody>
+      </p:sp>
+      <p:sp>
+        <p:nvSpPr>
+          <p:cNvPr id="9" name="Rounded Rectangle 8"/>
           <p:cNvSpPr/>
           <p:nvPr/>
         </p:nvSpPr>
         <p:spPr>
           <a:xfrm>
-            <a:off x="548640" y="1371600"/>
-            <a:ext cx="6217920" cy="4572000"/>
+            <a:off x="731520" y="3840480"/>
+            <a:ext cx="5943600" cy="2194560"/>
           </a:xfrm>
           <a:prstGeom prst="roundRect">
             <a:avLst/>
@@ -5448,7 +6532,7 @@
           <a:solidFill>
             <a:srgbClr val="F8FAFC"/>
           </a:solidFill>
-          <a:ln>
+          <a:ln w="12700">
             <a:solidFill>
               <a:srgbClr val="E2E8F0"/>
             </a:solidFill>
@@ -5469,85 +6553,32 @@
           </a:fontRef>
         </p:style>
         <p:txBody>
-          <a:bodyPr rtlCol="0" anchor="ctr" wrap="square" lIns="274320" tIns="274320" rIns="274320" bIns="274320"/>
-          <a:lstStyle/>
-          <a:p>
-            <a:pPr algn="ctr">
-              <a:defRPr sz="1600" b="1">
-                <a:solidFill>
-                  <a:srgbClr val="00873E"/>
-                </a:solidFill>
-                <a:latin typeface="Arial"/>
-              </a:defRPr>
-            </a:pPr>
-            <a:r>
-              <a:t>A fome não é um número abstrato: ela tem nome, endereço e rosto.</a:t>
-            </a:r>
-          </a:p>
-          <a:p>
-            <a:br/>
-            <a:pPr>
-              <a:defRPr sz="1300">
-                <a:solidFill>
-                  <a:srgbClr val="1E293B"/>
-                </a:solidFill>
-                <a:latin typeface="Arial"/>
-              </a:defRPr>
-            </a:pPr>
-            <a:r>
-              <a:t>Timbiras é uma cidade acolhedora, forte e trabalhadora, banhada pelas águas do Rio Itapecuru. Mas, como tantas cidades do interior do Maranhão, muitas famílias de bairros como Forquilha, Mutirão, Alto Fogoso, Olaria e de povoados rurais distantes enfrentam dias difíceis para garantir o básico na mesa.</a:t>
-            </a:r>
-          </a:p>
-          <a:p>
-            <a:br/>
-            <a:pPr>
-              <a:defRPr sz="1400" b="1">
-                <a:solidFill>
-                  <a:srgbClr val="00873E"/>
-                </a:solidFill>
-                <a:latin typeface="Arial"/>
-              </a:defRPr>
-            </a:pPr>
-            <a:r>
-              <a:t>O Encontro de Duas Realidades:</a:t>
-            </a:r>
-          </a:p>
-          <a:p>
-            <a:pPr>
-              <a:defRPr sz="1300">
-                <a:solidFill>
-                  <a:srgbClr val="1E293B"/>
-                </a:solidFill>
-                <a:latin typeface="Arial"/>
-              </a:defRPr>
-            </a:pPr>
-            <a:r>
-              <a:t>De um lado, pequenos produtores rurais e comerciantes com vontade de ajudar e excedentes de produção. Do outro, famílias precisando de amparo imediato. O projeto Timbiras Solidária nasceu para ser a ponte digital entre a generosidade de quem pode doar e a dignidade de quem precisa receber.</a:t>
-            </a:r>
-          </a:p>
-        </p:txBody>
-      </p:sp>
-      <p:sp>
-        <p:nvSpPr>
-          <p:cNvPr id="9" name="Rounded Rectangle 8"/>
+          <a:bodyPr rtlCol="0" anchor="ctr"/>
+          <a:lstStyle/>
+          <a:p>
+            <a:pPr algn="ctr"/>
+          </a:p>
+        </p:txBody>
+      </p:sp>
+      <p:sp>
+        <p:nvSpPr>
+          <p:cNvPr id="10" name="Rectangle 9"/>
           <p:cNvSpPr/>
           <p:nvPr/>
         </p:nvSpPr>
         <p:spPr>
           <a:xfrm>
-            <a:off x="7040880" y="1371600"/>
-            <a:ext cx="4572000" cy="4572000"/>
-          </a:xfrm>
-          <a:prstGeom prst="roundRect">
+            <a:off x="731520" y="3840480"/>
+            <a:ext cx="73152" cy="2194560"/>
+          </a:xfrm>
+          <a:prstGeom prst="rect">
             <a:avLst/>
           </a:prstGeom>
           <a:solidFill>
-            <a:srgbClr val="F0FDF4"/>
+            <a:srgbClr val="00873E"/>
           </a:solidFill>
           <a:ln>
-            <a:solidFill>
-              <a:srgbClr val="10B981"/>
-            </a:solidFill>
+            <a:noFill/>
           </a:ln>
         </p:spPr>
         <p:style>
@@ -5565,42 +6596,163 @@
           </a:fontRef>
         </p:style>
         <p:txBody>
-          <a:bodyPr rtlCol="0" anchor="ctr" wrap="square" lIns="274320" tIns="274320" rIns="274320" bIns="274320"/>
-          <a:lstStyle/>
-          <a:p>
-            <a:pPr algn="ctr">
-              <a:defRPr sz="1600" b="1">
+          <a:bodyPr rtlCol="0" anchor="ctr"/>
+          <a:lstStyle/>
+          <a:p>
+            <a:pPr algn="ctr"/>
+          </a:p>
+        </p:txBody>
+      </p:sp>
+      <p:sp>
+        <p:nvSpPr>
+          <p:cNvPr id="11" name="TextBox 10"/>
+          <p:cNvSpPr txBox="1"/>
+          <p:nvPr/>
+        </p:nvSpPr>
+        <p:spPr>
+          <a:xfrm>
+            <a:off x="960120" y="3977639"/>
+            <a:ext cx="5577840" cy="1920240"/>
+          </a:xfrm>
+          <a:prstGeom prst="rect">
+            <a:avLst/>
+          </a:prstGeom>
+          <a:noFill/>
+        </p:spPr>
+        <p:txBody>
+          <a:bodyPr wrap="square" lIns="0" tIns="0" rIns="0" bIns="0">
+            <a:spAutoFit/>
+          </a:bodyPr>
+          <a:lstStyle/>
+          <a:p>
+            <a:pPr>
+              <a:defRPr sz="1400" b="1">
                 <a:solidFill>
                   <a:srgbClr val="00873E"/>
                 </a:solidFill>
-                <a:latin typeface="Arial"/>
-              </a:defRPr>
-            </a:pPr>
-            <a:r>
-              <a:t>Compromisso Real com o ODS 2 da ONU</a:t>
-            </a:r>
-          </a:p>
-          <a:p>
-            <a:pPr>
-              <a:defRPr sz="1200">
+                <a:latin typeface="Segoe UI"/>
+              </a:defRPr>
+            </a:pPr>
+            <a:r>
+              <a:t>O Encontro de Duas Realidades</a:t>
+            </a:r>
+          </a:p>
+          <a:p>
+            <a:br/>
+            <a:pPr>
+              <a:defRPr sz="1150">
                 <a:solidFill>
                   <a:srgbClr val="1E293B"/>
                 </a:solidFill>
-                <a:latin typeface="Arial"/>
-              </a:defRPr>
-            </a:pPr>
-            <a:r>
-              <a:t>Fome Zero e Agricultura Sustentável: foco na mobilização comunitária com valorização do agricultor familiar local.</a:t>
-            </a:r>
+                <a:latin typeface="Segoe UI"/>
+              </a:defRPr>
+            </a:pPr>
+            <a:r>
+              <a:t>De um lado, pequenos agricultores e comerciantes com vontade de ajudar e excedentes de colheita. Do outro, famílias precisando de auxílio imediato. O Timbiras Solidária nasceu para ser a ponte digital entre a generosidade de quem pode doar e a dignidade de quem precisa receber.</a:t>
+            </a:r>
+          </a:p>
+        </p:txBody>
+      </p:sp>
+      <p:sp>
+        <p:nvSpPr>
+          <p:cNvPr id="12" name="Rounded Rectangle 11"/>
+          <p:cNvSpPr/>
+          <p:nvPr/>
+        </p:nvSpPr>
+        <p:spPr>
+          <a:xfrm>
+            <a:off x="6949440" y="1234440"/>
+            <a:ext cx="4510735" cy="4800600"/>
+          </a:xfrm>
+          <a:prstGeom prst="roundRect">
+            <a:avLst/>
+          </a:prstGeom>
+          <a:solidFill>
+            <a:srgbClr val="F0FDF4"/>
+          </a:solidFill>
+          <a:ln w="12700">
+            <a:solidFill>
+              <a:srgbClr val="BBF7D0"/>
+            </a:solidFill>
+          </a:ln>
+        </p:spPr>
+        <p:style>
+          <a:lnRef idx="1">
+            <a:schemeClr val="accent1"/>
+          </a:lnRef>
+          <a:fillRef idx="3">
+            <a:schemeClr val="accent1"/>
+          </a:fillRef>
+          <a:effectRef idx="2">
+            <a:schemeClr val="accent1"/>
+          </a:effectRef>
+          <a:fontRef idx="minor">
+            <a:schemeClr val="lt1"/>
+          </a:fontRef>
+        </p:style>
+        <p:txBody>
+          <a:bodyPr rtlCol="0" anchor="ctr"/>
+          <a:lstStyle/>
+          <a:p>
+            <a:pPr algn="ctr"/>
+          </a:p>
+        </p:txBody>
+      </p:sp>
+      <p:sp>
+        <p:nvSpPr>
+          <p:cNvPr id="13" name="TextBox 12"/>
+          <p:cNvSpPr txBox="1"/>
+          <p:nvPr/>
+        </p:nvSpPr>
+        <p:spPr>
+          <a:xfrm>
+            <a:off x="7223760" y="1417320"/>
+            <a:ext cx="3977639" cy="4434840"/>
+          </a:xfrm>
+          <a:prstGeom prst="rect">
+            <a:avLst/>
+          </a:prstGeom>
+          <a:noFill/>
+        </p:spPr>
+        <p:txBody>
+          <a:bodyPr wrap="square" lIns="0" tIns="0" rIns="0" bIns="0">
+            <a:spAutoFit/>
+          </a:bodyPr>
+          <a:lstStyle/>
+          <a:p>
+            <a:pPr>
+              <a:defRPr sz="1550" b="1">
+                <a:solidFill>
+                  <a:srgbClr val="00873E"/>
+                </a:solidFill>
+                <a:latin typeface="Segoe UI"/>
+              </a:defRPr>
+            </a:pPr>
+            <a:r>
+              <a:t>Compromisso Real com o ODS 2</a:t>
+            </a:r>
+          </a:p>
+          <a:p>
+            <a:pPr>
+              <a:defRPr sz="1150">
+                <a:solidFill>
+                  <a:srgbClr val="1E293B"/>
+                </a:solidFill>
+                <a:latin typeface="Segoe UI"/>
+              </a:defRPr>
+            </a:pPr>
+            <a:r>
+              <a:t>Fome Zero e Agricultura Sustentável: nosso foco não é assistencialismo frio, mas mobilização comunitária com valorização do agricultor familiar local.</a:t>
+            </a:r>
+          </a:p>
+          <a:p>
             <a:br/>
-          </a:p>
-          <a:p>
-            <a:pPr>
-              <a:defRPr sz="1400" b="1">
+            <a:pPr>
+              <a:defRPr sz="1300" b="1">
                 <a:solidFill>
                   <a:srgbClr val="00873E"/>
                 </a:solidFill>
-                <a:latin typeface="Arial"/>
+                <a:latin typeface="Segoe UI"/>
               </a:defRPr>
             </a:pPr>
             <a:r>
@@ -5609,54 +6761,54 @@
           </a:p>
           <a:p>
             <a:pPr>
-              <a:defRPr sz="1200">
+              <a:defRPr sz="1100">
                 <a:solidFill>
                   <a:srgbClr val="1E293B"/>
                 </a:solidFill>
-                <a:latin typeface="Arial"/>
-              </a:defRPr>
-            </a:pPr>
-            <a:r>
-              <a:t>• Cidadãos comuns: Que desejam doar 1 cesta ou 1 kg de alimento;</a:t>
-            </a:r>
-          </a:p>
-          <a:p>
-            <a:pPr>
-              <a:defRPr sz="1200">
+                <a:latin typeface="Segoe UI"/>
+              </a:defRPr>
+            </a:pPr>
+            <a:r>
+              <a:t>• Cidadãos comuns:  Que querem doar 1 cesta ou 1 kg de alimento;</a:t>
+            </a:r>
+          </a:p>
+          <a:p>
+            <a:pPr>
+              <a:defRPr sz="1100">
                 <a:solidFill>
                   <a:srgbClr val="1E293B"/>
                 </a:solidFill>
-                <a:latin typeface="Arial"/>
-              </a:defRPr>
-            </a:pPr>
-            <a:r>
-              <a:t>• Comércio e feirantes: Que exercem cidadania e responsabilidade social;</a:t>
-            </a:r>
-          </a:p>
-          <a:p>
-            <a:pPr>
-              <a:defRPr sz="1200">
+                <a:latin typeface="Segoe UI"/>
+              </a:defRPr>
+            </a:pPr>
+            <a:r>
+              <a:t>• Comércio e feirantes:  Que exercem cidadania ativa;</a:t>
+            </a:r>
+          </a:p>
+          <a:p>
+            <a:pPr>
+              <a:defRPr sz="1100">
                 <a:solidFill>
                   <a:srgbClr val="1E293B"/>
                 </a:solidFill>
-                <a:latin typeface="Arial"/>
-              </a:defRPr>
-            </a:pPr>
-            <a:r>
-              <a:t>• Agricultura familiar: Que abastece a cidade com alimentos frescos;</a:t>
-            </a:r>
-          </a:p>
-          <a:p>
-            <a:pPr>
-              <a:defRPr sz="1200">
+                <a:latin typeface="Segoe UI"/>
+              </a:defRPr>
+            </a:pPr>
+            <a:r>
+              <a:t>• Agricultura familiar:  Que abastece a cidade com alimentos frescos;</a:t>
+            </a:r>
+          </a:p>
+          <a:p>
+            <a:pPr>
+              <a:defRPr sz="1100">
                 <a:solidFill>
                   <a:srgbClr val="1E293B"/>
                 </a:solidFill>
-                <a:latin typeface="Arial"/>
-              </a:defRPr>
-            </a:pPr>
-            <a:r>
-              <a:t>• Poder público e voluntários: Para transparência e distribuição ágil.</a:t>
+                <a:latin typeface="Segoe UI"/>
+              </a:defRPr>
+            </a:pPr>
+            <a:r>
+              <a:t>• Poder público &amp; voluntários:  Para transparência e logística.</a:t>
             </a:r>
           </a:p>
         </p:txBody>
@@ -5687,8 +6839,8 @@
         </p:nvSpPr>
         <p:spPr>
           <a:xfrm>
-            <a:off x="548640" y="365760"/>
-            <a:ext cx="8686800" cy="731520"/>
+            <a:off x="731520" y="365760"/>
+            <a:ext cx="8412480" cy="685800"/>
           </a:xfrm>
           <a:prstGeom prst="rect">
             <a:avLst/>
@@ -5702,11 +6854,11 @@
           <a:lstStyle/>
           <a:p>
             <a:pPr>
-              <a:defRPr sz="2200" b="1">
+              <a:defRPr sz="2100" b="1">
                 <a:solidFill>
                   <a:srgbClr val="00873E"/>
                 </a:solidFill>
-                <a:latin typeface="Arial"/>
+                <a:latin typeface="Segoe UI"/>
               </a:defRPr>
             </a:pPr>
             <a:r>
@@ -5723,8 +6875,8 @@
         </p:nvSpPr>
         <p:spPr>
           <a:xfrm>
-            <a:off x="9326880" y="411480"/>
-            <a:ext cx="2286000" cy="365760"/>
+            <a:off x="9235440" y="411480"/>
+            <a:ext cx="2194560" cy="347472"/>
           </a:xfrm>
           <a:prstGeom prst="roundRect">
             <a:avLst/>
@@ -5732,7 +6884,7 @@
           <a:solidFill>
             <a:srgbClr val="F8FAFC"/>
           </a:solidFill>
-          <a:ln>
+          <a:ln w="12700">
             <a:solidFill>
               <a:srgbClr val="E2E8F0"/>
             </a:solidFill>
@@ -5753,19 +6905,19 @@
           </a:fontRef>
         </p:style>
         <p:txBody>
-          <a:bodyPr rtlCol="0" anchor="ctr" wrap="none"/>
+          <a:bodyPr rtlCol="0" anchor="ctr" tIns="54864"/>
           <a:lstStyle/>
           <a:p>
             <a:pPr algn="ctr">
-              <a:defRPr sz="1100" b="1">
+              <a:defRPr sz="1000" b="1">
                 <a:solidFill>
                   <a:srgbClr val="64748B"/>
                 </a:solidFill>
-                <a:latin typeface="Arial"/>
-              </a:defRPr>
-            </a:pPr>
-            <a:r>
-              <a:t>2. Desenvolvimento</a:t>
+                <a:latin typeface="Segoe UI"/>
+              </a:defRPr>
+            </a:pPr>
+            <a:r>
+              <a:t>2. DESENVOLVIMENTO</a:t>
             </a:r>
           </a:p>
         </p:txBody>
@@ -5778,8 +6930,8 @@
         </p:nvSpPr>
         <p:spPr>
           <a:xfrm>
-            <a:off x="548640" y="1097280"/>
-            <a:ext cx="11094415" cy="18288"/>
+            <a:off x="731520" y="1051560"/>
+            <a:ext cx="10728655" cy="13716"/>
           </a:xfrm>
           <a:prstGeom prst="rect">
             <a:avLst/>
@@ -5788,9 +6940,7 @@
             <a:srgbClr val="E2E8F0"/>
           </a:solidFill>
           <a:ln>
-            <a:solidFill>
-              <a:srgbClr val="E2E8F0"/>
-            </a:solidFill>
+            <a:noFill/>
           </a:ln>
         </p:spPr>
         <p:style>
@@ -5823,8 +6973,8 @@
         </p:nvSpPr>
         <p:spPr>
           <a:xfrm>
-            <a:off x="548640" y="6263640"/>
-            <a:ext cx="11094415" cy="18288"/>
+            <a:off x="731520" y="6263640"/>
+            <a:ext cx="10728655" cy="13716"/>
           </a:xfrm>
           <a:prstGeom prst="rect">
             <a:avLst/>
@@ -5833,9 +6983,7 @@
             <a:srgbClr val="E2E8F0"/>
           </a:solidFill>
           <a:ln>
-            <a:solidFill>
-              <a:srgbClr val="E2E8F0"/>
-            </a:solidFill>
+            <a:noFill/>
           </a:ln>
         </p:spPr>
         <p:style>
@@ -5868,7 +7016,7 @@
         </p:nvSpPr>
         <p:spPr>
           <a:xfrm>
-            <a:off x="548640" y="6327648"/>
+            <a:off x="731520" y="6327648"/>
             <a:ext cx="5486400" cy="320040"/>
           </a:xfrm>
           <a:prstGeom prst="rect">
@@ -5883,15 +7031,15 @@
           <a:lstStyle/>
           <a:p>
             <a:pPr>
-              <a:defRPr sz="1000">
+              <a:defRPr sz="950">
                 <a:solidFill>
                   <a:srgbClr val="64748B"/>
                 </a:solidFill>
-                <a:latin typeface="Arial"/>
-              </a:defRPr>
-            </a:pPr>
-            <a:r>
-              <a:t>Timbiras Solidária — ADS UEMA 2026 | Polo Timbiras</a:t>
+                <a:latin typeface="Segoe UI"/>
+              </a:defRPr>
+            </a:pPr>
+            <a:r>
+              <a:t>Timbiras Solidária — ADS UEMA 2026 | Polo Universitário de Timbiras</a:t>
             </a:r>
           </a:p>
         </p:txBody>
@@ -5904,8 +7052,8 @@
         </p:nvSpPr>
         <p:spPr>
           <a:xfrm>
-            <a:off x="9144000" y="6327648"/>
-            <a:ext cx="2499055" cy="320040"/>
+            <a:off x="8686800" y="6327648"/>
+            <a:ext cx="2773375" cy="320040"/>
           </a:xfrm>
           <a:prstGeom prst="rect">
             <a:avLst/>
@@ -5919,11 +7067,11 @@
           <a:lstStyle/>
           <a:p>
             <a:pPr algn="r">
-              <a:defRPr sz="1000" b="1">
+              <a:defRPr sz="950" b="1">
                 <a:solidFill>
                   <a:srgbClr val="64748B"/>
                 </a:solidFill>
-                <a:latin typeface="Arial"/>
+                <a:latin typeface="Segoe UI"/>
               </a:defRPr>
             </a:pPr>
             <a:r>
@@ -5934,24 +7082,88 @@
       </p:sp>
       <p:sp>
         <p:nvSpPr>
-          <p:cNvPr id="8" name="Rounded Rectangle 7"/>
+          <p:cNvPr id="8" name="TextBox 7"/>
+          <p:cNvSpPr txBox="1"/>
+          <p:nvPr/>
+        </p:nvSpPr>
+        <p:spPr>
+          <a:xfrm>
+            <a:off x="731520" y="1234440"/>
+            <a:ext cx="5166360" cy="2743200"/>
+          </a:xfrm>
+          <a:prstGeom prst="rect">
+            <a:avLst/>
+          </a:prstGeom>
+          <a:noFill/>
+        </p:spPr>
+        <p:txBody>
+          <a:bodyPr wrap="square" lIns="0" tIns="0" rIns="0" bIns="0">
+            <a:spAutoFit/>
+          </a:bodyPr>
+          <a:lstStyle/>
+          <a:p>
+            <a:pPr>
+              <a:defRPr sz="1550" b="1">
+                <a:solidFill>
+                  <a:srgbClr val="00873E"/>
+                </a:solidFill>
+                <a:latin typeface="Segoe UI"/>
+              </a:defRPr>
+            </a:pPr>
+            <a:r>
+              <a:t>O Salto da Primeira para a Segunda Etapa</a:t>
+            </a:r>
+          </a:p>
+          <a:p>
+            <a:br/>
+            <a:pPr>
+              <a:defRPr sz="1200">
+                <a:solidFill>
+                  <a:srgbClr val="64748B"/>
+                </a:solidFill>
+                <a:latin typeface="Segoe UI"/>
+              </a:defRPr>
+            </a:pPr>
+            <a:r>
+              <a:t>Na Nota 1, criamos uma interface estática em HTML5, CSS3 e Bootstrap. Era bonita e organizada, mas funcionava como um panfleto digital: parada, passiva e sem diálogo direto com quem acessava.</a:t>
+            </a:r>
+          </a:p>
+          <a:p>
+            <a:br/>
+            <a:pPr>
+              <a:defRPr sz="1200">
+                <a:solidFill>
+                  <a:srgbClr val="64748B"/>
+                </a:solidFill>
+                <a:latin typeface="Segoe UI"/>
+              </a:defRPr>
+            </a:pPr>
+            <a:r>
+              <a:t>Na Nota 2, nossa missão foi dar vida e coração ao projeto: quando alguém preenche uma doação, precisa sentir que aquele ato gerou uma resposta no mundo real.</a:t>
+            </a:r>
+          </a:p>
+        </p:txBody>
+      </p:sp>
+      <p:sp>
+        <p:nvSpPr>
+          <p:cNvPr id="9" name="Rounded Rectangle 8"/>
           <p:cNvSpPr/>
           <p:nvPr/>
         </p:nvSpPr>
         <p:spPr>
           <a:xfrm>
-            <a:off x="548640" y="1371600"/>
-            <a:ext cx="5394960" cy="4572000"/>
+            <a:off x="731520" y="4160520"/>
+            <a:ext cx="5166360" cy="1874519"/>
           </a:xfrm>
           <a:prstGeom prst="roundRect">
             <a:avLst/>
           </a:prstGeom>
           <a:solidFill>
-            <a:srgbClr val="F8FAFC"/>
+            <a:srgbClr val="FEFCE8"/>
           </a:solidFill>
-          <a:ln>
+          <a:ln w="12700">
             <a:solidFill>
-              <a:srgbClr val="E2E8F0"/>
+              <a:srgbClr val="FEF08A"/>
             </a:solidFill>
           </a:ln>
         </p:spPr>
@@ -5970,86 +7182,32 @@
           </a:fontRef>
         </p:style>
         <p:txBody>
-          <a:bodyPr rtlCol="0" anchor="ctr" wrap="square" lIns="274320" tIns="274320" rIns="274320" bIns="274320"/>
-          <a:lstStyle/>
-          <a:p>
-            <a:pPr algn="ctr">
-              <a:defRPr sz="1600" b="1">
-                <a:solidFill>
-                  <a:srgbClr val="00873E"/>
-                </a:solidFill>
-                <a:latin typeface="Arial"/>
-              </a:defRPr>
-            </a:pPr>
-            <a:r>
-              <a:t>O Salto da Primeira para a Segunda Etapa</a:t>
-            </a:r>
-          </a:p>
-          <a:p>
-            <a:br/>
-            <a:pPr>
-              <a:defRPr sz="1300">
-                <a:solidFill>
-                  <a:srgbClr val="1E293B"/>
-                </a:solidFill>
-                <a:latin typeface="Arial"/>
-              </a:defRPr>
-            </a:pPr>
-            <a:r>
-              <a:t>Na Nota 1, criamos uma interface estática em HTML5, CSS3 e Bootstrap. Era organizada e responsiva, mas funcionava como um panfleto digital: passiva e sem diálogo direto com quem acessava.</a:t>
-            </a:r>
-          </a:p>
-          <a:p>
-            <a:br/>
-            <a:pPr>
-              <a:defRPr sz="1300">
-                <a:solidFill>
-                  <a:srgbClr val="1E293B"/>
-                </a:solidFill>
-                <a:latin typeface="Arial"/>
-              </a:defRPr>
-            </a:pPr>
-            <a:r>
-              <a:t>Na Nota 2, nossa missão foi dar vida e coração a esse projeto. Uma causa comunitária precisa de calor humano, resposta imediata e acolhimento.</a:t>
-            </a:r>
-          </a:p>
-          <a:p>
-            <a:br/>
-            <a:pPr>
-              <a:defRPr sz="1300">
-                <a:solidFill>
-                  <a:srgbClr val="1E293B"/>
-                </a:solidFill>
-                <a:latin typeface="Arial"/>
-              </a:defRPr>
-            </a:pPr>
-            <a:r>
-              <a:t>Adotamos o React 19 para que cada elemento na tela reaja instantaneamente aos sentimentos e intenções do usuário, sem scripts soltos ou telas quebradas.</a:t>
-            </a:r>
-          </a:p>
-        </p:txBody>
-      </p:sp>
-      <p:sp>
-        <p:nvSpPr>
-          <p:cNvPr id="9" name="Rounded Rectangle 8"/>
+          <a:bodyPr rtlCol="0" anchor="ctr"/>
+          <a:lstStyle/>
+          <a:p>
+            <a:pPr algn="ctr"/>
+          </a:p>
+        </p:txBody>
+      </p:sp>
+      <p:sp>
+        <p:nvSpPr>
+          <p:cNvPr id="10" name="Rectangle 9"/>
           <p:cNvSpPr/>
           <p:nvPr/>
         </p:nvSpPr>
         <p:spPr>
           <a:xfrm>
-            <a:off x="6217920" y="1371600"/>
-            <a:ext cx="5394960" cy="4572000"/>
-          </a:xfrm>
-          <a:prstGeom prst="roundRect">
+            <a:off x="731520" y="4160520"/>
+            <a:ext cx="73152" cy="1874519"/>
+          </a:xfrm>
+          <a:prstGeom prst="rect">
             <a:avLst/>
           </a:prstGeom>
           <a:solidFill>
-            <a:srgbClr val="FEFCE8"/>
+            <a:srgbClr val="F59E0B"/>
           </a:solidFill>
           <a:ln>
-            <a:solidFill>
-              <a:srgbClr val="F59E0B"/>
-            </a:solidFill>
+            <a:noFill/>
           </a:ln>
         </p:spPr>
         <p:style>
@@ -6067,15 +7225,136 @@
           </a:fontRef>
         </p:style>
         <p:txBody>
-          <a:bodyPr rtlCol="0" anchor="ctr" wrap="square" lIns="274320" tIns="274320" rIns="274320" bIns="274320"/>
-          <a:lstStyle/>
-          <a:p>
-            <a:pPr algn="ctr">
-              <a:defRPr sz="1600" b="1">
+          <a:bodyPr rtlCol="0" anchor="ctr"/>
+          <a:lstStyle/>
+          <a:p>
+            <a:pPr algn="ctr"/>
+          </a:p>
+        </p:txBody>
+      </p:sp>
+      <p:sp>
+        <p:nvSpPr>
+          <p:cNvPr id="11" name="TextBox 10"/>
+          <p:cNvSpPr txBox="1"/>
+          <p:nvPr/>
+        </p:nvSpPr>
+        <p:spPr>
+          <a:xfrm>
+            <a:off x="960120" y="4297680"/>
+            <a:ext cx="4800600" cy="1600200"/>
+          </a:xfrm>
+          <a:prstGeom prst="rect">
+            <a:avLst/>
+          </a:prstGeom>
+          <a:noFill/>
+        </p:spPr>
+        <p:txBody>
+          <a:bodyPr wrap="square" lIns="0" tIns="0" rIns="0" bIns="0">
+            <a:spAutoFit/>
+          </a:bodyPr>
+          <a:lstStyle/>
+          <a:p>
+            <a:pPr>
+              <a:defRPr sz="1400" b="1">
                 <a:solidFill>
                   <a:srgbClr val="B45309"/>
                 </a:solidFill>
-                <a:latin typeface="Arial"/>
+                <a:latin typeface="Segoe UI"/>
+              </a:defRPr>
+            </a:pPr>
+            <a:r>
+              <a:t>Interação que Acolhe</a:t>
+            </a:r>
+          </a:p>
+          <a:p>
+            <a:br/>
+            <a:pPr>
+              <a:defRPr sz="1150">
+                <a:solidFill>
+                  <a:srgbClr val="1E293B"/>
+                </a:solidFill>
+                <a:latin typeface="Segoe UI"/>
+              </a:defRPr>
+            </a:pPr>
+            <a:r>
+              <a:t>Abraçamos o React 19 para que cada elemento na tela reaja imediatamente aos sentimentos e intenções do usuário, sem recarregar a página e sem travar a navegação.</a:t>
+            </a:r>
+          </a:p>
+        </p:txBody>
+      </p:sp>
+      <p:sp>
+        <p:nvSpPr>
+          <p:cNvPr id="12" name="Rounded Rectangle 11"/>
+          <p:cNvSpPr/>
+          <p:nvPr/>
+        </p:nvSpPr>
+        <p:spPr>
+          <a:xfrm>
+            <a:off x="6263640" y="1234440"/>
+            <a:ext cx="5166360" cy="4800600"/>
+          </a:xfrm>
+          <a:prstGeom prst="roundRect">
+            <a:avLst/>
+          </a:prstGeom>
+          <a:solidFill>
+            <a:srgbClr val="F8FAFC"/>
+          </a:solidFill>
+          <a:ln w="12700">
+            <a:solidFill>
+              <a:srgbClr val="E2E8F0"/>
+            </a:solidFill>
+          </a:ln>
+        </p:spPr>
+        <p:style>
+          <a:lnRef idx="1">
+            <a:schemeClr val="accent1"/>
+          </a:lnRef>
+          <a:fillRef idx="3">
+            <a:schemeClr val="accent1"/>
+          </a:fillRef>
+          <a:effectRef idx="2">
+            <a:schemeClr val="accent1"/>
+          </a:effectRef>
+          <a:fontRef idx="minor">
+            <a:schemeClr val="lt1"/>
+          </a:fontRef>
+        </p:style>
+        <p:txBody>
+          <a:bodyPr rtlCol="0" anchor="ctr"/>
+          <a:lstStyle/>
+          <a:p>
+            <a:pPr algn="ctr"/>
+          </a:p>
+        </p:txBody>
+      </p:sp>
+      <p:sp>
+        <p:nvSpPr>
+          <p:cNvPr id="13" name="TextBox 12"/>
+          <p:cNvSpPr txBox="1"/>
+          <p:nvPr/>
+        </p:nvSpPr>
+        <p:spPr>
+          <a:xfrm>
+            <a:off x="6537960" y="1417320"/>
+            <a:ext cx="4617720" cy="4434840"/>
+          </a:xfrm>
+          <a:prstGeom prst="rect">
+            <a:avLst/>
+          </a:prstGeom>
+          <a:noFill/>
+        </p:spPr>
+        <p:txBody>
+          <a:bodyPr wrap="square" lIns="0" tIns="0" rIns="0" bIns="0">
+            <a:spAutoFit/>
+          </a:bodyPr>
+          <a:lstStyle/>
+          <a:p>
+            <a:pPr>
+              <a:defRPr sz="1550" b="1">
+                <a:solidFill>
+                  <a:srgbClr val="00873E"/>
+                </a:solidFill>
+                <a:latin typeface="Segoe UI"/>
               </a:defRPr>
             </a:pPr>
             <a:r>
@@ -6085,25 +7364,25 @@
           <a:p>
             <a:br/>
             <a:pPr>
-              <a:defRPr sz="1200">
+              <a:defRPr sz="1150">
                 <a:solidFill>
                   <a:srgbClr val="1E293B"/>
                 </a:solidFill>
-                <a:latin typeface="Arial"/>
-              </a:defRPr>
-            </a:pPr>
-            <a:r>
-              <a:t>• Retorno Imediato: Ao enviar uma doação, a meta comunitária sobe na mesma hora no topo do site e um Recibo Solidário com código exclusivo surge na tela.</a:t>
+                <a:latin typeface="Segoe UI"/>
+              </a:defRPr>
+            </a:pPr>
+            <a:r>
+              <a:t>• Retorno Imediato: Ao enviar uma doação, a meta comunitária sobe na mesma hora no topo do site e um Recibo Solidário com código único surge na tela.</a:t>
             </a:r>
           </a:p>
           <a:p>
             <a:br/>
             <a:pPr>
-              <a:defRPr sz="1200">
+              <a:defRPr sz="1150">
                 <a:solidFill>
                   <a:srgbClr val="1E293B"/>
                 </a:solidFill>
-                <a:latin typeface="Arial"/>
+                <a:latin typeface="Segoe UI"/>
               </a:defRPr>
             </a:pPr>
             <a:r>
@@ -6113,29 +7392,29 @@
           <a:p>
             <a:br/>
             <a:pPr>
-              <a:defRPr sz="1200">
+              <a:defRPr sz="1150">
                 <a:solidFill>
                   <a:srgbClr val="1E293B"/>
                 </a:solidFill>
-                <a:latin typeface="Arial"/>
-              </a:defRPr>
-            </a:pPr>
-            <a:r>
-              <a:t>• Chave PIX com 1 Toque: Cópia instantânea da chave institucional com aviso de confirmação na tela.</a:t>
+                <a:latin typeface="Segoe UI"/>
+              </a:defRPr>
+            </a:pPr>
+            <a:r>
+              <a:t>• Chave PIX com 1 Toque: Cópia instantânea da chave institucional com aviso de confirmação na tela via Clipboard API.</a:t>
             </a:r>
           </a:p>
           <a:p>
             <a:br/>
             <a:pPr>
-              <a:defRPr sz="1200">
+              <a:defRPr sz="1150">
                 <a:solidFill>
                   <a:srgbClr val="1E293B"/>
                 </a:solidFill>
-                <a:latin typeface="Arial"/>
-              </a:defRPr>
-            </a:pPr>
-            <a:r>
-              <a:t>• Trilha Sonora Acolhedora: Player com a canção 'Imagine', que respeita o usuário e pode ser pausado, mutado ou recolhido a qualquer momento.</a:t>
+                <a:latin typeface="Segoe UI"/>
+              </a:defRPr>
+            </a:pPr>
+            <a:r>
+              <a:t>• Trilha Sonora Emocionante: Player com a canção 'Imagine' (John Lennon, 1971), que respeita a privacidade do usuário e pode ser pausado, mutado ou recolhido a qualquer momento.</a:t>
             </a:r>
           </a:p>
         </p:txBody>
@@ -6166,8 +7445,8 @@
         </p:nvSpPr>
         <p:spPr>
           <a:xfrm>
-            <a:off x="548640" y="365760"/>
-            <a:ext cx="8686800" cy="731520"/>
+            <a:off x="731520" y="365760"/>
+            <a:ext cx="8412480" cy="685800"/>
           </a:xfrm>
           <a:prstGeom prst="rect">
             <a:avLst/>
@@ -6181,11 +7460,11 @@
           <a:lstStyle/>
           <a:p>
             <a:pPr>
-              <a:defRPr sz="2200" b="1">
+              <a:defRPr sz="2100" b="1">
                 <a:solidFill>
                   <a:srgbClr val="00873E"/>
                 </a:solidFill>
-                <a:latin typeface="Arial"/>
+                <a:latin typeface="Segoe UI"/>
               </a:defRPr>
             </a:pPr>
             <a:r>
@@ -6202,8 +7481,8 @@
         </p:nvSpPr>
         <p:spPr>
           <a:xfrm>
-            <a:off x="9326880" y="411480"/>
-            <a:ext cx="2286000" cy="365760"/>
+            <a:off x="9235440" y="411480"/>
+            <a:ext cx="2194560" cy="347472"/>
           </a:xfrm>
           <a:prstGeom prst="roundRect">
             <a:avLst/>
@@ -6211,7 +7490,7 @@
           <a:solidFill>
             <a:srgbClr val="F8FAFC"/>
           </a:solidFill>
-          <a:ln>
+          <a:ln w="12700">
             <a:solidFill>
               <a:srgbClr val="E2E8F0"/>
             </a:solidFill>
@@ -6232,19 +7511,19 @@
           </a:fontRef>
         </p:style>
         <p:txBody>
-          <a:bodyPr rtlCol="0" anchor="ctr" wrap="none"/>
+          <a:bodyPr rtlCol="0" anchor="ctr" tIns="54864"/>
           <a:lstStyle/>
           <a:p>
             <a:pPr algn="ctr">
-              <a:defRPr sz="1100" b="1">
+              <a:defRPr sz="1000" b="1">
                 <a:solidFill>
                   <a:srgbClr val="64748B"/>
                 </a:solidFill>
-                <a:latin typeface="Arial"/>
-              </a:defRPr>
-            </a:pPr>
-            <a:r>
-              <a:t>2. Desenvolvimento</a:t>
+                <a:latin typeface="Segoe UI"/>
+              </a:defRPr>
+            </a:pPr>
+            <a:r>
+              <a:t>2. DESENVOLVIMENTO</a:t>
             </a:r>
           </a:p>
         </p:txBody>
@@ -6257,8 +7536,8 @@
         </p:nvSpPr>
         <p:spPr>
           <a:xfrm>
-            <a:off x="548640" y="1097280"/>
-            <a:ext cx="11094415" cy="18288"/>
+            <a:off x="731520" y="1051560"/>
+            <a:ext cx="10728655" cy="13716"/>
           </a:xfrm>
           <a:prstGeom prst="rect">
             <a:avLst/>
@@ -6267,9 +7546,7 @@
             <a:srgbClr val="E2E8F0"/>
           </a:solidFill>
           <a:ln>
-            <a:solidFill>
-              <a:srgbClr val="E2E8F0"/>
-            </a:solidFill>
+            <a:noFill/>
           </a:ln>
         </p:spPr>
         <p:style>
@@ -6302,8 +7579,8 @@
         </p:nvSpPr>
         <p:spPr>
           <a:xfrm>
-            <a:off x="548640" y="6263640"/>
-            <a:ext cx="11094415" cy="18288"/>
+            <a:off x="731520" y="6263640"/>
+            <a:ext cx="10728655" cy="13716"/>
           </a:xfrm>
           <a:prstGeom prst="rect">
             <a:avLst/>
@@ -6312,9 +7589,7 @@
             <a:srgbClr val="E2E8F0"/>
           </a:solidFill>
           <a:ln>
-            <a:solidFill>
-              <a:srgbClr val="E2E8F0"/>
-            </a:solidFill>
+            <a:noFill/>
           </a:ln>
         </p:spPr>
         <p:style>
@@ -6347,7 +7622,7 @@
         </p:nvSpPr>
         <p:spPr>
           <a:xfrm>
-            <a:off x="548640" y="6327648"/>
+            <a:off x="731520" y="6327648"/>
             <a:ext cx="5486400" cy="320040"/>
           </a:xfrm>
           <a:prstGeom prst="rect">
@@ -6362,15 +7637,15 @@
           <a:lstStyle/>
           <a:p>
             <a:pPr>
-              <a:defRPr sz="1000">
+              <a:defRPr sz="950">
                 <a:solidFill>
                   <a:srgbClr val="64748B"/>
                 </a:solidFill>
-                <a:latin typeface="Arial"/>
-              </a:defRPr>
-            </a:pPr>
-            <a:r>
-              <a:t>Timbiras Solidária — ADS UEMA 2026 | Polo Timbiras</a:t>
+                <a:latin typeface="Segoe UI"/>
+              </a:defRPr>
+            </a:pPr>
+            <a:r>
+              <a:t>Timbiras Solidária — ADS UEMA 2026 | Polo Universitário de Timbiras</a:t>
             </a:r>
           </a:p>
         </p:txBody>
@@ -6383,8 +7658,8 @@
         </p:nvSpPr>
         <p:spPr>
           <a:xfrm>
-            <a:off x="9144000" y="6327648"/>
-            <a:ext cx="2499055" cy="320040"/>
+            <a:off x="8686800" y="6327648"/>
+            <a:ext cx="2773375" cy="320040"/>
           </a:xfrm>
           <a:prstGeom prst="rect">
             <a:avLst/>
@@ -6398,11 +7673,11 @@
           <a:lstStyle/>
           <a:p>
             <a:pPr algn="r">
-              <a:defRPr sz="1000" b="1">
+              <a:defRPr sz="950" b="1">
                 <a:solidFill>
                   <a:srgbClr val="64748B"/>
                 </a:solidFill>
-                <a:latin typeface="Arial"/>
+                <a:latin typeface="Segoe UI"/>
               </a:defRPr>
             </a:pPr>
             <a:r>
@@ -6413,14 +7688,63 @@
       </p:sp>
       <p:sp>
         <p:nvSpPr>
-          <p:cNvPr id="8" name="Rounded Rectangle 7"/>
+          <p:cNvPr id="8" name="TextBox 7"/>
+          <p:cNvSpPr txBox="1"/>
+          <p:nvPr/>
+        </p:nvSpPr>
+        <p:spPr>
+          <a:xfrm>
+            <a:off x="731520" y="1234440"/>
+            <a:ext cx="5166360" cy="1188720"/>
+          </a:xfrm>
+          <a:prstGeom prst="rect">
+            <a:avLst/>
+          </a:prstGeom>
+          <a:noFill/>
+        </p:spPr>
+        <p:txBody>
+          <a:bodyPr wrap="square" lIns="0" tIns="0" rIns="0" bIns="0">
+            <a:spAutoFit/>
+          </a:bodyPr>
+          <a:lstStyle/>
+          <a:p>
+            <a:pPr>
+              <a:defRPr sz="1550" b="1">
+                <a:solidFill>
+                  <a:srgbClr val="00873E"/>
+                </a:solidFill>
+                <a:latin typeface="Segoe UI"/>
+              </a:defRPr>
+            </a:pPr>
+            <a:r>
+              <a:t>Os Sentidos da Aplicação (Eventos JavaScript)</a:t>
+            </a:r>
+          </a:p>
+          <a:p>
+            <a:pPr>
+              <a:defRPr sz="1200">
+                <a:solidFill>
+                  <a:srgbClr val="64748B"/>
+                </a:solidFill>
+                <a:latin typeface="Segoe UI"/>
+              </a:defRPr>
+            </a:pPr>
+            <a:r>
+              <a:t>Tratamento de eventos pensado para ser acolhedor e intuitivo, sem burocracias:</a:t>
+            </a:r>
+          </a:p>
+        </p:txBody>
+      </p:sp>
+      <p:sp>
+        <p:nvSpPr>
+          <p:cNvPr id="9" name="Rounded Rectangle 8"/>
           <p:cNvSpPr/>
           <p:nvPr/>
         </p:nvSpPr>
         <p:spPr>
           <a:xfrm>
-            <a:off x="548640" y="1371600"/>
-            <a:ext cx="5394960" cy="4572000"/>
+            <a:off x="731520" y="2514600"/>
+            <a:ext cx="5166360" cy="3520440"/>
           </a:xfrm>
           <a:prstGeom prst="roundRect">
             <a:avLst/>
@@ -6428,7 +7752,7 @@
           <a:solidFill>
             <a:srgbClr val="F8FAFC"/>
           </a:solidFill>
-          <a:ln>
+          <a:ln w="12700">
             <a:solidFill>
               <a:srgbClr val="E2E8F0"/>
             </a:solidFill>
@@ -6449,100 +7773,32 @@
           </a:fontRef>
         </p:style>
         <p:txBody>
-          <a:bodyPr rtlCol="0" anchor="ctr" wrap="square" lIns="274320" tIns="274320" rIns="274320" bIns="274320"/>
-          <a:lstStyle/>
-          <a:p>
-            <a:pPr algn="ctr">
-              <a:defRPr sz="1600" b="1">
-                <a:solidFill>
-                  <a:srgbClr val="00873E"/>
-                </a:solidFill>
-                <a:latin typeface="Arial"/>
-              </a:defRPr>
-            </a:pPr>
-            <a:r>
-              <a:t>Os Sentidos da Aplicação (Eventos JavaScript)</a:t>
-            </a:r>
-          </a:p>
-          <a:p>
-            <a:br/>
-            <a:pPr>
-              <a:defRPr sz="1200">
-                <a:solidFill>
-                  <a:srgbClr val="1E293B"/>
-                </a:solidFill>
-                <a:latin typeface="Arial"/>
-              </a:defRPr>
-            </a:pPr>
-            <a:r>
-              <a:t>• onSubmit (Doar.jsx): Interrompe o recarregamento brusco da página, confere se os campos estão corretos, grava no localStorage e avisa que a ajuda está a caminho.</a:t>
-            </a:r>
-          </a:p>
-          <a:p>
-            <a:br/>
-            <a:pPr>
-              <a:defRPr sz="1200">
-                <a:solidFill>
-                  <a:srgbClr val="1E293B"/>
-                </a:solidFill>
-                <a:latin typeface="Arial"/>
-              </a:defRPr>
-            </a:pPr>
-            <a:r>
-              <a:t>• onChange (PrestacaoContas.jsx): Filtra os bairros de Timbiras enquanto o morador digita, com busca inteligente sem travar.</a:t>
-            </a:r>
-          </a:p>
-          <a:p>
-            <a:br/>
-            <a:pPr>
-              <a:defRPr sz="1200">
-                <a:solidFill>
-                  <a:srgbClr val="1E293B"/>
-                </a:solidFill>
-                <a:latin typeface="Arial"/>
-              </a:defRPr>
-            </a:pPr>
-            <a:r>
-              <a:t>• onClick na Navbar: Menu hambúrguer no celular que abre suavemente e fecha sozinho ao tocar em qualquer link.</a:t>
-            </a:r>
-          </a:p>
-          <a:p>
-            <a:br/>
-            <a:pPr>
-              <a:defRPr sz="1200">
-                <a:solidFill>
-                  <a:srgbClr val="1E293B"/>
-                </a:solidFill>
-                <a:latin typeface="Arial"/>
-              </a:defRPr>
-            </a:pPr>
-            <a:r>
-              <a:t>• Clipboard API: Cópia suave da chave PIX sem selecionar texto.</a:t>
-            </a:r>
-          </a:p>
-        </p:txBody>
-      </p:sp>
-      <p:sp>
-        <p:nvSpPr>
-          <p:cNvPr id="9" name="Rounded Rectangle 8"/>
+          <a:bodyPr rtlCol="0" anchor="ctr"/>
+          <a:lstStyle/>
+          <a:p>
+            <a:pPr algn="ctr"/>
+          </a:p>
+        </p:txBody>
+      </p:sp>
+      <p:sp>
+        <p:nvSpPr>
+          <p:cNvPr id="10" name="Rectangle 9"/>
           <p:cNvSpPr/>
           <p:nvPr/>
         </p:nvSpPr>
         <p:spPr>
           <a:xfrm>
-            <a:off x="6217920" y="1371600"/>
-            <a:ext cx="5394960" cy="4572000"/>
-          </a:xfrm>
-          <a:prstGeom prst="roundRect">
+            <a:off x="731520" y="2514600"/>
+            <a:ext cx="73152" cy="3520440"/>
+          </a:xfrm>
+          <a:prstGeom prst="rect">
             <a:avLst/>
           </a:prstGeom>
           <a:solidFill>
-            <a:srgbClr val="F0FDF4"/>
+            <a:srgbClr val="00873E"/>
           </a:solidFill>
           <a:ln>
-            <a:solidFill>
-              <a:srgbClr val="10B981"/>
-            </a:solidFill>
+            <a:noFill/>
           </a:ln>
         </p:spPr>
         <p:style>
@@ -6560,15 +7816,129 @@
           </a:fontRef>
         </p:style>
         <p:txBody>
-          <a:bodyPr rtlCol="0" anchor="ctr" wrap="square" lIns="274320" tIns="274320" rIns="274320" bIns="274320"/>
-          <a:lstStyle/>
-          <a:p>
-            <a:pPr algn="ctr">
-              <a:defRPr sz="1600" b="1">
+          <a:bodyPr rtlCol="0" anchor="ctr"/>
+          <a:lstStyle/>
+          <a:p>
+            <a:pPr algn="ctr"/>
+          </a:p>
+        </p:txBody>
+      </p:sp>
+      <p:sp>
+        <p:nvSpPr>
+          <p:cNvPr id="11" name="TextBox 10"/>
+          <p:cNvSpPr txBox="1"/>
+          <p:nvPr/>
+        </p:nvSpPr>
+        <p:spPr>
+          <a:xfrm>
+            <a:off x="960120" y="2651760"/>
+            <a:ext cx="4800600" cy="3246120"/>
+          </a:xfrm>
+          <a:prstGeom prst="rect">
+            <a:avLst/>
+          </a:prstGeom>
+          <a:noFill/>
+        </p:spPr>
+        <p:txBody>
+          <a:bodyPr wrap="square" lIns="0" tIns="0" rIns="0" bIns="0">
+            <a:spAutoFit/>
+          </a:bodyPr>
+          <a:lstStyle/>
+          <a:p>
+            <a:pPr>
+              <a:defRPr sz="1300" b="1">
                 <a:solidFill>
                   <a:srgbClr val="00873E"/>
                 </a:solidFill>
-                <a:latin typeface="Arial"/>
+                <a:latin typeface="Segoe UI"/>
+              </a:defRPr>
+            </a:pPr>
+            <a:r>
+              <a:t>Eventos Centrais Implementados:</a:t>
+            </a:r>
+          </a:p>
+          <a:p>
+            <a:pPr>
+              <a:defRPr sz="1050">
+                <a:solidFill>
+                  <a:srgbClr val="1E293B"/>
+                </a:solidFill>
+                <a:latin typeface="Segoe UI"/>
+              </a:defRPr>
+            </a:pPr>
+            <a:r>
+              <a:t>• onSubmit (Doar.jsx): Interrompe o recarregamento brusco, valida campos, grava no localStorage e emite Recibo Solidário com código rastreável (REC-XXXXXX).</a:t>
+            </a:r>
+          </a:p>
+          <a:p>
+            <a:pPr>
+              <a:defRPr sz="1050">
+                <a:solidFill>
+                  <a:srgbClr val="1E293B"/>
+                </a:solidFill>
+                <a:latin typeface="Segoe UI"/>
+              </a:defRPr>
+            </a:pPr>
+            <a:r>
+              <a:t>• onChange (PrestacaoContas.jsx): Filtra os 13 bairros e a Zona Rural enquanto o morador digita, normalizando acentos sem travamentos.</a:t>
+            </a:r>
+          </a:p>
+          <a:p>
+            <a:pPr>
+              <a:defRPr sz="1050">
+                <a:solidFill>
+                  <a:srgbClr val="1E293B"/>
+                </a:solidFill>
+                <a:latin typeface="Segoe UI"/>
+              </a:defRPr>
+            </a:pPr>
+            <a:r>
+              <a:t>• onClick na Navbar: Menu móvel que abre e fecha sozinho ao tocar em qualquer link.</a:t>
+            </a:r>
+          </a:p>
+          <a:p>
+            <a:pPr>
+              <a:defRPr sz="1050">
+                <a:solidFill>
+                  <a:srgbClr val="1E293B"/>
+                </a:solidFill>
+                <a:latin typeface="Segoe UI"/>
+              </a:defRPr>
+            </a:pPr>
+            <a:r>
+              <a:t>• Clipboard API: Cópia suave da chave PIX sem selecionar texto.</a:t>
+            </a:r>
+          </a:p>
+        </p:txBody>
+      </p:sp>
+      <p:sp>
+        <p:nvSpPr>
+          <p:cNvPr id="12" name="TextBox 11"/>
+          <p:cNvSpPr txBox="1"/>
+          <p:nvPr/>
+        </p:nvSpPr>
+        <p:spPr>
+          <a:xfrm>
+            <a:off x="6263640" y="1234440"/>
+            <a:ext cx="5166360" cy="1188720"/>
+          </a:xfrm>
+          <a:prstGeom prst="rect">
+            <a:avLst/>
+          </a:prstGeom>
+          <a:noFill/>
+        </p:spPr>
+        <p:txBody>
+          <a:bodyPr wrap="square" lIns="0" tIns="0" rIns="0" bIns="0">
+            <a:spAutoFit/>
+          </a:bodyPr>
+          <a:lstStyle/>
+          <a:p>
+            <a:pPr>
+              <a:defRPr sz="1500" b="1">
+                <a:solidFill>
+                  <a:srgbClr val="00873E"/>
+                </a:solidFill>
+                <a:latin typeface="Segoe UI"/>
               </a:defRPr>
             </a:pPr>
             <a:r>
@@ -6576,48 +7946,125 @@
             </a:r>
           </a:p>
           <a:p>
+            <a:pPr>
+              <a:defRPr sz="1150">
+                <a:solidFill>
+                  <a:srgbClr val="64748B"/>
+                </a:solidFill>
+                <a:latin typeface="Segoe UI"/>
+              </a:defRPr>
+            </a:pPr>
+            <a:r>
+              <a:t>Nenhum projeto comunitário vive só de botões; ele vive de sentimento. A trilha sonora traz a clássica canção 'Imagine' para sensibilização pedagógica e acolhimento.</a:t>
+            </a:r>
+          </a:p>
+        </p:txBody>
+      </p:sp>
+      <p:sp>
+        <p:nvSpPr>
+          <p:cNvPr id="13" name="Rounded Rectangle 12"/>
+          <p:cNvSpPr/>
+          <p:nvPr/>
+        </p:nvSpPr>
+        <p:spPr>
+          <a:xfrm>
+            <a:off x="6263640" y="2514600"/>
+            <a:ext cx="5166360" cy="3520440"/>
+          </a:xfrm>
+          <a:prstGeom prst="roundRect">
+            <a:avLst/>
+          </a:prstGeom>
+          <a:solidFill>
+            <a:srgbClr val="F0FDF4"/>
+          </a:solidFill>
+          <a:ln w="12700">
+            <a:solidFill>
+              <a:srgbClr val="BBF7D0"/>
+            </a:solidFill>
+          </a:ln>
+        </p:spPr>
+        <p:style>
+          <a:lnRef idx="1">
+            <a:schemeClr val="accent1"/>
+          </a:lnRef>
+          <a:fillRef idx="3">
+            <a:schemeClr val="accent1"/>
+          </a:fillRef>
+          <a:effectRef idx="2">
+            <a:schemeClr val="accent1"/>
+          </a:effectRef>
+          <a:fontRef idx="minor">
+            <a:schemeClr val="lt1"/>
+          </a:fontRef>
+        </p:style>
+        <p:txBody>
+          <a:bodyPr rtlCol="0" anchor="ctr"/>
+          <a:lstStyle/>
+          <a:p>
+            <a:pPr algn="ctr"/>
+          </a:p>
+        </p:txBody>
+      </p:sp>
+      <p:sp>
+        <p:nvSpPr>
+          <p:cNvPr id="14" name="TextBox 13"/>
+          <p:cNvSpPr txBox="1"/>
+          <p:nvPr/>
+        </p:nvSpPr>
+        <p:spPr>
+          <a:xfrm>
+            <a:off x="6537960" y="2651760"/>
+            <a:ext cx="4663440" cy="3246120"/>
+          </a:xfrm>
+          <a:prstGeom prst="rect">
+            <a:avLst/>
+          </a:prstGeom>
+          <a:noFill/>
+        </p:spPr>
+        <p:txBody>
+          <a:bodyPr wrap="square" lIns="0" tIns="0" rIns="0" bIns="0">
+            <a:spAutoFit/>
+          </a:bodyPr>
+          <a:lstStyle/>
+          <a:p>
+            <a:pPr>
+              <a:defRPr sz="1300" b="1">
+                <a:solidFill>
+                  <a:srgbClr val="00873E"/>
+                </a:solidFill>
+                <a:latin typeface="Segoe UI"/>
+              </a:defRPr>
+            </a:pPr>
+            <a:r>
+              <a:t>Tratamento Cuidadoso de Áudio:</a:t>
+            </a:r>
+          </a:p>
+          <a:p>
             <a:br/>
             <a:pPr>
-              <a:defRPr sz="1300">
+              <a:defRPr sz="1100">
                 <a:solidFill>
                   <a:srgbClr val="1E293B"/>
                 </a:solidFill>
-                <a:latin typeface="Arial"/>
-              </a:defRPr>
-            </a:pPr>
-            <a:r>
-              <a:t>Nenhum projeto comunitário vive só de botões; ele vive de sentimento. O componente PlayerAudio.jsx traz a clássica canção 'Imagine' de John Lennon (1971) como trilha sonora de paz e união, executada para fins pedagógicos e culturais.</a:t>
+                <a:latin typeface="Segoe UI"/>
+              </a:defRPr>
+            </a:pPr>
+            <a:r>
+              <a:t>• Respeito ao Usuário (Anti-Autoplay Invasivo): Navegadores modernos bloqueiam reprodução automática. Criamos escutadores de evento (window.addEventListener('click') e rolagem) para iniciar suavemente quando o visitante demonstra interesse pelo site.</a:t>
             </a:r>
           </a:p>
           <a:p>
             <a:br/>
             <a:pPr>
-              <a:defRPr sz="1400" b="1">
-                <a:solidFill>
-                  <a:srgbClr val="00873E"/>
-                </a:solidFill>
-                <a:latin typeface="Arial"/>
-              </a:defRPr>
-            </a:pPr>
-            <a:r>
-              <a:t>Tratamento Cuidadoso de Áudio:</a:t>
-            </a:r>
-          </a:p>
-          <a:p>
-            <a:pPr>
-              <a:defRPr sz="1200">
+              <a:defRPr sz="1100">
                 <a:solidFill>
                   <a:srgbClr val="1E293B"/>
                 </a:solidFill>
-                <a:latin typeface="Arial"/>
-              </a:defRPr>
-            </a:pPr>
-            <a:r>
-              <a:t>• Respeito à política de autoplay: A música não assusta o usuário; ela inicia suavemente apenas quando há interação voluntária do visitante com a página.</a:t>
-            </a:r>
-            <a:br/>
-            <a:r>
-              <a:t>• Controles completos: Controle deslizante de volume, botão mudo, equalizador com barras animadas em CSS e botão para minimizar o tocador para o canto da tela.</a:t>
+                <a:latin typeface="Segoe UI"/>
+              </a:defRPr>
+            </a:pPr>
+            <a:r>
+              <a:t>• Controles Completos: Slider de volume contínuo, botão de silenciar (mute), equalizador com 3 barras animadas em CSS e botão para recolher o tocador para um canto discreto da tela.</a:t>
             </a:r>
           </a:p>
         </p:txBody>
@@ -6648,8 +8095,8 @@
         </p:nvSpPr>
         <p:spPr>
           <a:xfrm>
-            <a:off x="548640" y="365760"/>
-            <a:ext cx="8686800" cy="731520"/>
+            <a:off x="731520" y="365760"/>
+            <a:ext cx="8412480" cy="685800"/>
           </a:xfrm>
           <a:prstGeom prst="rect">
             <a:avLst/>
@@ -6663,11 +8110,11 @@
           <a:lstStyle/>
           <a:p>
             <a:pPr>
-              <a:defRPr sz="2200" b="1">
+              <a:defRPr sz="2100" b="1">
                 <a:solidFill>
                   <a:srgbClr val="00873E"/>
                 </a:solidFill>
-                <a:latin typeface="Arial"/>
+                <a:latin typeface="Segoe UI"/>
               </a:defRPr>
             </a:pPr>
             <a:r>
@@ -6684,8 +8131,8 @@
         </p:nvSpPr>
         <p:spPr>
           <a:xfrm>
-            <a:off x="9326880" y="411480"/>
-            <a:ext cx="2286000" cy="365760"/>
+            <a:off x="9235440" y="411480"/>
+            <a:ext cx="2194560" cy="347472"/>
           </a:xfrm>
           <a:prstGeom prst="roundRect">
             <a:avLst/>
@@ -6693,7 +8140,7 @@
           <a:solidFill>
             <a:srgbClr val="F8FAFC"/>
           </a:solidFill>
-          <a:ln>
+          <a:ln w="12700">
             <a:solidFill>
               <a:srgbClr val="E2E8F0"/>
             </a:solidFill>
@@ -6714,19 +8161,19 @@
           </a:fontRef>
         </p:style>
         <p:txBody>
-          <a:bodyPr rtlCol="0" anchor="ctr" wrap="none"/>
+          <a:bodyPr rtlCol="0" anchor="ctr" tIns="54864"/>
           <a:lstStyle/>
           <a:p>
             <a:pPr algn="ctr">
-              <a:defRPr sz="1100" b="1">
+              <a:defRPr sz="1000" b="1">
                 <a:solidFill>
                   <a:srgbClr val="64748B"/>
                 </a:solidFill>
-                <a:latin typeface="Arial"/>
-              </a:defRPr>
-            </a:pPr>
-            <a:r>
-              <a:t>3. Consumo de API</a:t>
+                <a:latin typeface="Segoe UI"/>
+              </a:defRPr>
+            </a:pPr>
+            <a:r>
+              <a:t>3. CONSUMO DE API</a:t>
             </a:r>
           </a:p>
         </p:txBody>
@@ -6739,8 +8186,8 @@
         </p:nvSpPr>
         <p:spPr>
           <a:xfrm>
-            <a:off x="548640" y="1097280"/>
-            <a:ext cx="11094415" cy="18288"/>
+            <a:off x="731520" y="1051560"/>
+            <a:ext cx="10728655" cy="13716"/>
           </a:xfrm>
           <a:prstGeom prst="rect">
             <a:avLst/>
@@ -6749,9 +8196,7 @@
             <a:srgbClr val="E2E8F0"/>
           </a:solidFill>
           <a:ln>
-            <a:solidFill>
-              <a:srgbClr val="E2E8F0"/>
-            </a:solidFill>
+            <a:noFill/>
           </a:ln>
         </p:spPr>
         <p:style>
@@ -6784,8 +8229,8 @@
         </p:nvSpPr>
         <p:spPr>
           <a:xfrm>
-            <a:off x="548640" y="6263640"/>
-            <a:ext cx="11094415" cy="18288"/>
+            <a:off x="731520" y="6263640"/>
+            <a:ext cx="10728655" cy="13716"/>
           </a:xfrm>
           <a:prstGeom prst="rect">
             <a:avLst/>
@@ -6794,9 +8239,7 @@
             <a:srgbClr val="E2E8F0"/>
           </a:solidFill>
           <a:ln>
-            <a:solidFill>
-              <a:srgbClr val="E2E8F0"/>
-            </a:solidFill>
+            <a:noFill/>
           </a:ln>
         </p:spPr>
         <p:style>
@@ -6829,7 +8272,7 @@
         </p:nvSpPr>
         <p:spPr>
           <a:xfrm>
-            <a:off x="548640" y="6327648"/>
+            <a:off x="731520" y="6327648"/>
             <a:ext cx="5486400" cy="320040"/>
           </a:xfrm>
           <a:prstGeom prst="rect">
@@ -6844,15 +8287,15 @@
           <a:lstStyle/>
           <a:p>
             <a:pPr>
-              <a:defRPr sz="1000">
+              <a:defRPr sz="950">
                 <a:solidFill>
                   <a:srgbClr val="64748B"/>
                 </a:solidFill>
-                <a:latin typeface="Arial"/>
-              </a:defRPr>
-            </a:pPr>
-            <a:r>
-              <a:t>Timbiras Solidária — ADS UEMA 2026 | Polo Timbiras</a:t>
+                <a:latin typeface="Segoe UI"/>
+              </a:defRPr>
+            </a:pPr>
+            <a:r>
+              <a:t>Timbiras Solidária — ADS UEMA 2026 | Polo Universitário de Timbiras</a:t>
             </a:r>
           </a:p>
         </p:txBody>
@@ -6865,8 +8308,8 @@
         </p:nvSpPr>
         <p:spPr>
           <a:xfrm>
-            <a:off x="9144000" y="6327648"/>
-            <a:ext cx="2499055" cy="320040"/>
+            <a:off x="8686800" y="6327648"/>
+            <a:ext cx="2773375" cy="320040"/>
           </a:xfrm>
           <a:prstGeom prst="rect">
             <a:avLst/>
@@ -6880,11 +8323,11 @@
           <a:lstStyle/>
           <a:p>
             <a:pPr algn="r">
-              <a:defRPr sz="1000" b="1">
+              <a:defRPr sz="950" b="1">
                 <a:solidFill>
                   <a:srgbClr val="64748B"/>
                 </a:solidFill>
-                <a:latin typeface="Arial"/>
+                <a:latin typeface="Segoe UI"/>
               </a:defRPr>
             </a:pPr>
             <a:r>
@@ -6895,24 +8338,74 @@
       </p:sp>
       <p:sp>
         <p:nvSpPr>
-          <p:cNvPr id="8" name="Rounded Rectangle 7"/>
+          <p:cNvPr id="8" name="TextBox 7"/>
+          <p:cNvSpPr txBox="1"/>
+          <p:nvPr/>
+        </p:nvSpPr>
+        <p:spPr>
+          <a:xfrm>
+            <a:off x="731520" y="1234440"/>
+            <a:ext cx="5166360" cy="2103120"/>
+          </a:xfrm>
+          <a:prstGeom prst="rect">
+            <a:avLst/>
+          </a:prstGeom>
+          <a:noFill/>
+        </p:spPr>
+        <p:txBody>
+          <a:bodyPr wrap="square" lIns="0" tIns="0" rIns="0" bIns="0">
+            <a:spAutoFit/>
+          </a:bodyPr>
+          <a:lstStyle/>
+          <a:p>
+            <a:pPr>
+              <a:defRPr sz="1550" b="1">
+                <a:solidFill>
+                  <a:srgbClr val="00873E"/>
+                </a:solidFill>
+                <a:latin typeface="Segoe UI"/>
+              </a:defRPr>
+            </a:pPr>
+            <a:r>
+              <a:t>Por Que Usar a API do IBGE?</a:t>
+            </a:r>
+          </a:p>
+          <a:p>
+            <a:br/>
+            <a:pPr>
+              <a:defRPr sz="1200">
+                <a:solidFill>
+                  <a:srgbClr val="64748B"/>
+                </a:solidFill>
+                <a:latin typeface="Segoe UI"/>
+              </a:defRPr>
+            </a:pPr>
+            <a:r>
+              <a:t>Poderíamos ter inventado nomes em um arquivo fixo, mas a disciplina nos desafiou a trabalhar como desenvolvedores profissionais trabalham: consumindo dados reais de servidores públicos em tempo real.</a:t>
+            </a:r>
+          </a:p>
+        </p:txBody>
+      </p:sp>
+      <p:sp>
+        <p:nvSpPr>
+          <p:cNvPr id="9" name="Rounded Rectangle 8"/>
           <p:cNvSpPr/>
           <p:nvPr/>
         </p:nvSpPr>
         <p:spPr>
           <a:xfrm>
-            <a:off x="548640" y="1371600"/>
-            <a:ext cx="5394960" cy="4572000"/>
+            <a:off x="731520" y="3429000"/>
+            <a:ext cx="5166360" cy="1051560"/>
           </a:xfrm>
           <a:prstGeom prst="roundRect">
             <a:avLst/>
           </a:prstGeom>
           <a:solidFill>
-            <a:srgbClr val="F8FAFC"/>
+            <a:srgbClr val="0F172A"/>
           </a:solidFill>
-          <a:ln>
+          <a:ln w="12700">
             <a:solidFill>
-              <a:srgbClr val="E2E8F0"/>
+              <a:srgbClr val="334155"/>
             </a:solidFill>
           </a:ln>
         </p:spPr>
@@ -6931,88 +8424,95 @@
           </a:fontRef>
         </p:style>
         <p:txBody>
-          <a:bodyPr rtlCol="0" anchor="ctr" wrap="square" lIns="274320" tIns="274320" rIns="274320" bIns="274320"/>
-          <a:lstStyle/>
-          <a:p>
-            <a:pPr algn="ctr">
-              <a:defRPr sz="1600" b="1">
-                <a:solidFill>
-                  <a:srgbClr val="00873E"/>
-                </a:solidFill>
-                <a:latin typeface="Arial"/>
-              </a:defRPr>
-            </a:pPr>
-            <a:r>
-              <a:t>Por Que Usar a API do IBGE?</a:t>
-            </a:r>
-          </a:p>
-          <a:p>
-            <a:br/>
-            <a:pPr>
-              <a:defRPr sz="1300">
+          <a:bodyPr rtlCol="0" anchor="ctr"/>
+          <a:lstStyle/>
+          <a:p>
+            <a:pPr algn="ctr"/>
+          </a:p>
+        </p:txBody>
+      </p:sp>
+      <p:sp>
+        <p:nvSpPr>
+          <p:cNvPr id="10" name="TextBox 9"/>
+          <p:cNvSpPr txBox="1"/>
+          <p:nvPr/>
+        </p:nvSpPr>
+        <p:spPr>
+          <a:xfrm>
+            <a:off x="914400" y="3520440"/>
+            <a:ext cx="4800600" cy="868680"/>
+          </a:xfrm>
+          <a:prstGeom prst="rect">
+            <a:avLst/>
+          </a:prstGeom>
+          <a:noFill/>
+        </p:spPr>
+        <p:txBody>
+          <a:bodyPr wrap="square" lIns="0" tIns="0" rIns="0" bIns="0">
+            <a:spAutoFit/>
+          </a:bodyPr>
+          <a:lstStyle/>
+          <a:p>
+            <a:pPr>
+              <a:defRPr sz="1050" b="1">
+                <a:solidFill>
+                  <a:srgbClr val="38BDF8"/>
+                </a:solidFill>
+                <a:latin typeface="Consolas"/>
+              </a:defRPr>
+            </a:pPr>
+            <a:r>
+              <a:t>GET https://servicodados.ibge.gov.br/api/v1/localidades/estados/MA/municipios</a:t>
+            </a:r>
+          </a:p>
+        </p:txBody>
+      </p:sp>
+      <p:sp>
+        <p:nvSpPr>
+          <p:cNvPr id="11" name="TextBox 10"/>
+          <p:cNvSpPr txBox="1"/>
+          <p:nvPr/>
+        </p:nvSpPr>
+        <p:spPr>
+          <a:xfrm>
+            <a:off x="731520" y="4617720"/>
+            <a:ext cx="5166360" cy="1371600"/>
+          </a:xfrm>
+          <a:prstGeom prst="rect">
+            <a:avLst/>
+          </a:prstGeom>
+          <a:noFill/>
+        </p:spPr>
+        <p:txBody>
+          <a:bodyPr wrap="square">
+            <a:spAutoFit/>
+          </a:bodyPr>
+          <a:lstStyle/>
+          <a:p>
+            <a:pPr>
+              <a:defRPr sz="1150">
                 <a:solidFill>
                   <a:srgbClr val="1E293B"/>
                 </a:solidFill>
-                <a:latin typeface="Arial"/>
-              </a:defRPr>
-            </a:pPr>
-            <a:r>
-              <a:t>Poderíamos ter inventado nomes em um arquivo fixo, mas a disciplina nos desafiou a trabalhar como profissionais da web trabalham: consumindo dados reais de servidores públicos em tempo real.</a:t>
-            </a:r>
-          </a:p>
-          <a:p>
-            <a:br/>
-            <a:pPr>
-              <a:defRPr sz="1300" b="1">
-                <a:solidFill>
-                  <a:srgbClr val="0284C7"/>
-                </a:solidFill>
-                <a:latin typeface="Arial"/>
-              </a:defRPr>
-            </a:pPr>
-            <a:r>
-              <a:t>Endpoint Oficial Consultado:</a:t>
-            </a:r>
-          </a:p>
-          <a:p>
-            <a:pPr>
-              <a:defRPr sz="1100" b="1">
-                <a:solidFill>
-                  <a:srgbClr val="0284C7"/>
-                </a:solidFill>
-                <a:latin typeface="Courier New"/>
-              </a:defRPr>
-            </a:pPr>
-            <a:r>
-              <a:t>https://servicodados.ibge.gov.br/api/v1/localidades/estados/MA/municipios</a:t>
-            </a:r>
-          </a:p>
-          <a:p>
-            <a:br/>
-            <a:pPr>
-              <a:defRPr sz="1200">
-                <a:solidFill>
-                  <a:srgbClr val="1E293B"/>
-                </a:solidFill>
-                <a:latin typeface="Arial"/>
-              </a:defRPr>
-            </a:pPr>
-            <a:r>
-              <a:t>Obtivemos com precisão o Código Oficial do IBGE (ID de 7 dígitos), a Microrregião e a Mesorregião de Timbiras e cidades parceiras da Região dos Cocais.</a:t>
-            </a:r>
-          </a:p>
-        </p:txBody>
-      </p:sp>
-      <p:sp>
-        <p:nvSpPr>
-          <p:cNvPr id="9" name="Rounded Rectangle 8"/>
+                <a:latin typeface="Segoe UI"/>
+              </a:defRPr>
+            </a:pPr>
+            <a:r>
+              <a:t>Obtivemos com total precisão o Código Oficial do IBGE (ID de 7 dígitos), a Microrregião e a Mesorregião de Timbiras e cidades vizinhas da Região dos Cocais.</a:t>
+            </a:r>
+          </a:p>
+        </p:txBody>
+      </p:sp>
+      <p:sp>
+        <p:nvSpPr>
+          <p:cNvPr id="12" name="Rounded Rectangle 11"/>
           <p:cNvSpPr/>
           <p:nvPr/>
         </p:nvSpPr>
         <p:spPr>
           <a:xfrm>
-            <a:off x="6217920" y="1371600"/>
-            <a:ext cx="5394960" cy="4572000"/>
+            <a:off x="6263640" y="1234440"/>
+            <a:ext cx="5166360" cy="4800600"/>
           </a:xfrm>
           <a:prstGeom prst="roundRect">
             <a:avLst/>
@@ -7020,9 +8520,9 @@
           <a:solidFill>
             <a:srgbClr val="F0F9FF"/>
           </a:solidFill>
-          <a:ln>
+          <a:ln w="12700">
             <a:solidFill>
-              <a:srgbClr val="0284C7"/>
+              <a:srgbClr val="BAE6FD"/>
             </a:solidFill>
           </a:ln>
         </p:spPr>
@@ -7041,15 +8541,41 @@
           </a:fontRef>
         </p:style>
         <p:txBody>
-          <a:bodyPr rtlCol="0" anchor="ctr" wrap="square" lIns="274320" tIns="274320" rIns="274320" bIns="274320"/>
-          <a:lstStyle/>
-          <a:p>
-            <a:pPr algn="ctr">
-              <a:defRPr sz="1600" b="1">
+          <a:bodyPr rtlCol="0" anchor="ctr"/>
+          <a:lstStyle/>
+          <a:p>
+            <a:pPr algn="ctr"/>
+          </a:p>
+        </p:txBody>
+      </p:sp>
+      <p:sp>
+        <p:nvSpPr>
+          <p:cNvPr id="13" name="TextBox 12"/>
+          <p:cNvSpPr txBox="1"/>
+          <p:nvPr/>
+        </p:nvSpPr>
+        <p:spPr>
+          <a:xfrm>
+            <a:off x="6537960" y="1417320"/>
+            <a:ext cx="4617720" cy="4434840"/>
+          </a:xfrm>
+          <a:prstGeom prst="rect">
+            <a:avLst/>
+          </a:prstGeom>
+          <a:noFill/>
+        </p:spPr>
+        <p:txBody>
+          <a:bodyPr wrap="square" lIns="0" tIns="0" rIns="0" bIns="0">
+            <a:spAutoFit/>
+          </a:bodyPr>
+          <a:lstStyle/>
+          <a:p>
+            <a:pPr>
+              <a:defRPr sz="1550" b="1">
                 <a:solidFill>
                   <a:srgbClr val="0284C7"/>
                 </a:solidFill>
-                <a:latin typeface="Arial"/>
+                <a:latin typeface="Segoe UI"/>
               </a:defRPr>
             </a:pPr>
             <a:r>
@@ -7059,11 +8585,11 @@
           <a:p>
             <a:br/>
             <a:pPr>
-              <a:defRPr sz="1200">
+              <a:defRPr sz="1100">
                 <a:solidFill>
                   <a:srgbClr val="1E293B"/>
                 </a:solidFill>
-                <a:latin typeface="Arial"/>
+                <a:latin typeface="Segoe UI"/>
               </a:defRPr>
             </a:pPr>
             <a:r>
@@ -7071,17 +8597,17 @@
             </a:r>
             <a:br/>
             <a:r>
-              <a:t> Em conexões 3G ou 4G do interior, a resposta pode demorar. Exibimos um spinner amigável com a mensagem: 'Consultando base pública do IBGE...'</a:t>
+              <a:t> Em conexões 3G ou 4G comuns no interior, a requisição pode demorar. Exibimos um spinner amigável com a mensagem: 'Consultando base pública do IBGE...'</a:t>
             </a:r>
           </a:p>
           <a:p>
             <a:br/>
             <a:pPr>
-              <a:defRPr sz="1200">
+              <a:defRPr sz="1100">
                 <a:solidFill>
                   <a:srgbClr val="1E293B"/>
                 </a:solidFill>
-                <a:latin typeface="Arial"/>
+                <a:latin typeface="Segoe UI"/>
               </a:defRPr>
             </a:pPr>
             <a:r>
@@ -7089,17 +8615,17 @@
             </a:r>
             <a:br/>
             <a:r>
-              <a:t> A vida real tem quedas de sinal. Em vez de tela branca ou quebra do sistema, exibimos um aviso explicativo e o botão 'Recarregar API'.</a:t>
+              <a:t> A vida real tem quedas de sinal. Em vez de tela branca ou travamento, exibimos um painel explicativo e o botão 'Recarregar API'.</a:t>
             </a:r>
           </a:p>
           <a:p>
             <a:br/>
             <a:pPr>
-              <a:defRPr sz="1200">
+              <a:defRPr sz="1100">
                 <a:solidFill>
                   <a:srgbClr val="1E293B"/>
                 </a:solidFill>
-                <a:latin typeface="Arial"/>
+                <a:latin typeface="Segoe UI"/>
               </a:defRPr>
             </a:pPr>
             <a:r>
@@ -7138,8 +8664,8 @@
         </p:nvSpPr>
         <p:spPr>
           <a:xfrm>
-            <a:off x="548640" y="365760"/>
-            <a:ext cx="8686800" cy="731520"/>
+            <a:off x="731520" y="365760"/>
+            <a:ext cx="8412480" cy="685800"/>
           </a:xfrm>
           <a:prstGeom prst="rect">
             <a:avLst/>
@@ -7153,11 +8679,11 @@
           <a:lstStyle/>
           <a:p>
             <a:pPr>
-              <a:defRPr sz="2200" b="1">
+              <a:defRPr sz="2100" b="1">
                 <a:solidFill>
                   <a:srgbClr val="00873E"/>
                 </a:solidFill>
-                <a:latin typeface="Arial"/>
+                <a:latin typeface="Segoe UI"/>
               </a:defRPr>
             </a:pPr>
             <a:r>
@@ -7174,8 +8700,8 @@
         </p:nvSpPr>
         <p:spPr>
           <a:xfrm>
-            <a:off x="9326880" y="411480"/>
-            <a:ext cx="2286000" cy="365760"/>
+            <a:off x="9235440" y="411480"/>
+            <a:ext cx="2194560" cy="347472"/>
           </a:xfrm>
           <a:prstGeom prst="roundRect">
             <a:avLst/>
@@ -7183,7 +8709,7 @@
           <a:solidFill>
             <a:srgbClr val="F8FAFC"/>
           </a:solidFill>
-          <a:ln>
+          <a:ln w="12700">
             <a:solidFill>
               <a:srgbClr val="E2E8F0"/>
             </a:solidFill>
@@ -7204,19 +8730,19 @@
           </a:fontRef>
         </p:style>
         <p:txBody>
-          <a:bodyPr rtlCol="0" anchor="ctr" wrap="none"/>
+          <a:bodyPr rtlCol="0" anchor="ctr" tIns="54864"/>
           <a:lstStyle/>
           <a:p>
             <a:pPr algn="ctr">
-              <a:defRPr sz="1100" b="1">
+              <a:defRPr sz="1000" b="1">
                 <a:solidFill>
                   <a:srgbClr val="64748B"/>
                 </a:solidFill>
-                <a:latin typeface="Arial"/>
-              </a:defRPr>
-            </a:pPr>
-            <a:r>
-              <a:t>3. Consumo de API &amp; Leaflet</a:t>
+                <a:latin typeface="Segoe UI"/>
+              </a:defRPr>
+            </a:pPr>
+            <a:r>
+              <a:t>3. CONSUMO DE API &amp; LEAFLET</a:t>
             </a:r>
           </a:p>
         </p:txBody>
@@ -7229,8 +8755,8 @@
         </p:nvSpPr>
         <p:spPr>
           <a:xfrm>
-            <a:off x="548640" y="1097280"/>
-            <a:ext cx="11094415" cy="18288"/>
+            <a:off x="731520" y="1051560"/>
+            <a:ext cx="10728655" cy="13716"/>
           </a:xfrm>
           <a:prstGeom prst="rect">
             <a:avLst/>
@@ -7239,9 +8765,7 @@
             <a:srgbClr val="E2E8F0"/>
           </a:solidFill>
           <a:ln>
-            <a:solidFill>
-              <a:srgbClr val="E2E8F0"/>
-            </a:solidFill>
+            <a:noFill/>
           </a:ln>
         </p:spPr>
         <p:style>
@@ -7274,8 +8798,8 @@
         </p:nvSpPr>
         <p:spPr>
           <a:xfrm>
-            <a:off x="548640" y="6263640"/>
-            <a:ext cx="11094415" cy="18288"/>
+            <a:off x="731520" y="6263640"/>
+            <a:ext cx="10728655" cy="13716"/>
           </a:xfrm>
           <a:prstGeom prst="rect">
             <a:avLst/>
@@ -7284,9 +8808,7 @@
             <a:srgbClr val="E2E8F0"/>
           </a:solidFill>
           <a:ln>
-            <a:solidFill>
-              <a:srgbClr val="E2E8F0"/>
-            </a:solidFill>
+            <a:noFill/>
           </a:ln>
         </p:spPr>
         <p:style>
@@ -7319,7 +8841,7 @@
         </p:nvSpPr>
         <p:spPr>
           <a:xfrm>
-            <a:off x="548640" y="6327648"/>
+            <a:off x="731520" y="6327648"/>
             <a:ext cx="5486400" cy="320040"/>
           </a:xfrm>
           <a:prstGeom prst="rect">
@@ -7334,15 +8856,15 @@
           <a:lstStyle/>
           <a:p>
             <a:pPr>
-              <a:defRPr sz="1000">
+              <a:defRPr sz="950">
                 <a:solidFill>
                   <a:srgbClr val="64748B"/>
                 </a:solidFill>
-                <a:latin typeface="Arial"/>
-              </a:defRPr>
-            </a:pPr>
-            <a:r>
-              <a:t>Timbiras Solidária — ADS UEMA 2026 | Polo Timbiras</a:t>
+                <a:latin typeface="Segoe UI"/>
+              </a:defRPr>
+            </a:pPr>
+            <a:r>
+              <a:t>Timbiras Solidária — ADS UEMA 2026 | Polo Universitário de Timbiras</a:t>
             </a:r>
           </a:p>
         </p:txBody>
@@ -7355,8 +8877,8 @@
         </p:nvSpPr>
         <p:spPr>
           <a:xfrm>
-            <a:off x="9144000" y="6327648"/>
-            <a:ext cx="2499055" cy="320040"/>
+            <a:off x="8686800" y="6327648"/>
+            <a:ext cx="2773375" cy="320040"/>
           </a:xfrm>
           <a:prstGeom prst="rect">
             <a:avLst/>
@@ -7370,11 +8892,11 @@
           <a:lstStyle/>
           <a:p>
             <a:pPr algn="r">
-              <a:defRPr sz="1000" b="1">
+              <a:defRPr sz="950" b="1">
                 <a:solidFill>
                   <a:srgbClr val="64748B"/>
                 </a:solidFill>
-                <a:latin typeface="Arial"/>
+                <a:latin typeface="Segoe UI"/>
               </a:defRPr>
             </a:pPr>
             <a:r>
@@ -7391,8 +8913,8 @@
         </p:nvSpPr>
         <p:spPr>
           <a:xfrm>
-            <a:off x="548640" y="1371600"/>
-            <a:ext cx="5394960" cy="4572000"/>
+            <a:off x="731520" y="1234440"/>
+            <a:ext cx="5166360" cy="4800600"/>
           </a:xfrm>
           <a:prstGeom prst="roundRect">
             <a:avLst/>
@@ -7400,7 +8922,7 @@
           <a:solidFill>
             <a:srgbClr val="0F172A"/>
           </a:solidFill>
-          <a:ln>
+          <a:ln w="12700">
             <a:solidFill>
               <a:srgbClr val="334155"/>
             </a:solidFill>
@@ -7421,15 +8943,41 @@
           </a:fontRef>
         </p:style>
         <p:txBody>
-          <a:bodyPr rtlCol="0" anchor="ctr" wrap="square" lIns="274320" tIns="274320" rIns="274320" bIns="274320"/>
-          <a:lstStyle/>
-          <a:p>
-            <a:pPr algn="ctr">
-              <a:defRPr sz="1600" b="1">
+          <a:bodyPr rtlCol="0" anchor="ctr"/>
+          <a:lstStyle/>
+          <a:p>
+            <a:pPr algn="ctr"/>
+          </a:p>
+        </p:txBody>
+      </p:sp>
+      <p:sp>
+        <p:nvSpPr>
+          <p:cNvPr id="9" name="TextBox 8"/>
+          <p:cNvSpPr txBox="1"/>
+          <p:nvPr/>
+        </p:nvSpPr>
+        <p:spPr>
+          <a:xfrm>
+            <a:off x="960120" y="1417320"/>
+            <a:ext cx="4709160" cy="4434840"/>
+          </a:xfrm>
+          <a:prstGeom prst="rect">
+            <a:avLst/>
+          </a:prstGeom>
+          <a:noFill/>
+        </p:spPr>
+        <p:txBody>
+          <a:bodyPr wrap="square" lIns="0" tIns="0" rIns="0" bIns="0">
+            <a:spAutoFit/>
+          </a:bodyPr>
+          <a:lstStyle/>
+          <a:p>
+            <a:pPr>
+              <a:defRPr sz="1400" b="1">
                 <a:solidFill>
                   <a:srgbClr val="38BDF8"/>
                 </a:solidFill>
-                <a:latin typeface="Arial"/>
+                <a:latin typeface="Segoe UI"/>
               </a:defRPr>
             </a:pPr>
             <a:r>
@@ -7439,11 +8987,11 @@
           <a:p>
             <a:br/>
             <a:pPr>
-              <a:defRPr sz="1100">
+              <a:defRPr sz="1050">
                 <a:solidFill>
                   <a:srgbClr val="E2E8F0"/>
                 </a:solidFill>
-                <a:latin typeface="Courier New"/>
+                <a:latin typeface="Consolas"/>
               </a:defRPr>
             </a:pPr>
             <a:r>
@@ -7460,7 +9008,7 @@
             </a:r>
             <a:br/>
             <a:r>
-              <a:t>    signal: controlador.signal // Previne memory leak</a:t>
+              <a:t>    signal: controlador.signal // Evita memory leak</a:t>
             </a:r>
             <a:br/>
             <a:r>
@@ -7472,7 +9020,7 @@
             </a:r>
             <a:br/>
             <a:r>
-              <a:t>      if (!res.ok) throw new Error('Falha na API');</a:t>
+              <a:t>      if (!res.ok) throw new Error('Falha na resposta');</a:t>
             </a:r>
             <a:br/>
             <a:r>
@@ -7520,24 +9068,24 @@
       </p:sp>
       <p:sp>
         <p:nvSpPr>
-          <p:cNvPr id="9" name="Rounded Rectangle 8"/>
+          <p:cNvPr id="10" name="Rounded Rectangle 9"/>
           <p:cNvSpPr/>
           <p:nvPr/>
         </p:nvSpPr>
         <p:spPr>
           <a:xfrm>
-            <a:off x="6217920" y="1371600"/>
-            <a:ext cx="5394960" cy="4572000"/>
+            <a:off x="6263640" y="1234440"/>
+            <a:ext cx="5166360" cy="2286000"/>
           </a:xfrm>
           <a:prstGeom prst="roundRect">
             <a:avLst/>
           </a:prstGeom>
           <a:solidFill>
-            <a:srgbClr val="F0FDF4"/>
+            <a:srgbClr val="F8FAFC"/>
           </a:solidFill>
-          <a:ln>
+          <a:ln w="12700">
             <a:solidFill>
-              <a:srgbClr val="10B981"/>
+              <a:srgbClr val="E2E8F0"/>
             </a:solidFill>
           </a:ln>
         </p:spPr>
@@ -7556,73 +9104,240 @@
           </a:fontRef>
         </p:style>
         <p:txBody>
-          <a:bodyPr rtlCol="0" anchor="ctr" wrap="square" lIns="274320" tIns="274320" rIns="274320" bIns="274320"/>
-          <a:lstStyle/>
-          <a:p>
-            <a:pPr algn="ctr">
-              <a:defRPr sz="1600" b="1">
+          <a:bodyPr rtlCol="0" anchor="ctr"/>
+          <a:lstStyle/>
+          <a:p>
+            <a:pPr algn="ctr"/>
+          </a:p>
+        </p:txBody>
+      </p:sp>
+      <p:sp>
+        <p:nvSpPr>
+          <p:cNvPr id="11" name="Rectangle 10"/>
+          <p:cNvSpPr/>
+          <p:nvPr/>
+        </p:nvSpPr>
+        <p:spPr>
+          <a:xfrm>
+            <a:off x="6263640" y="1234440"/>
+            <a:ext cx="73152" cy="2286000"/>
+          </a:xfrm>
+          <a:prstGeom prst="rect">
+            <a:avLst/>
+          </a:prstGeom>
+          <a:solidFill>
+            <a:srgbClr val="00873E"/>
+          </a:solidFill>
+          <a:ln>
+            <a:noFill/>
+          </a:ln>
+        </p:spPr>
+        <p:style>
+          <a:lnRef idx="1">
+            <a:schemeClr val="accent1"/>
+          </a:lnRef>
+          <a:fillRef idx="3">
+            <a:schemeClr val="accent1"/>
+          </a:fillRef>
+          <a:effectRef idx="2">
+            <a:schemeClr val="accent1"/>
+          </a:effectRef>
+          <a:fontRef idx="minor">
+            <a:schemeClr val="lt1"/>
+          </a:fontRef>
+        </p:style>
+        <p:txBody>
+          <a:bodyPr rtlCol="0" anchor="ctr"/>
+          <a:lstStyle/>
+          <a:p>
+            <a:pPr algn="ctr"/>
+          </a:p>
+        </p:txBody>
+      </p:sp>
+      <p:sp>
+        <p:nvSpPr>
+          <p:cNvPr id="12" name="TextBox 11"/>
+          <p:cNvSpPr txBox="1"/>
+          <p:nvPr/>
+        </p:nvSpPr>
+        <p:spPr>
+          <a:xfrm>
+            <a:off x="6537960" y="1417320"/>
+            <a:ext cx="4663440" cy="1920240"/>
+          </a:xfrm>
+          <a:prstGeom prst="rect">
+            <a:avLst/>
+          </a:prstGeom>
+          <a:noFill/>
+        </p:spPr>
+        <p:txBody>
+          <a:bodyPr wrap="square" lIns="0" tIns="0" rIns="0" bIns="0">
+            <a:spAutoFit/>
+          </a:bodyPr>
+          <a:lstStyle/>
+          <a:p>
+            <a:pPr>
+              <a:defRPr sz="1400" b="1">
                 <a:solidFill>
                   <a:srgbClr val="00873E"/>
                 </a:solidFill>
-                <a:latin typeface="Arial"/>
-              </a:defRPr>
-            </a:pPr>
-            <a:r>
-              <a:t>Cruzando Dados do IBGE com o Mapa Leaflet</a:t>
+                <a:latin typeface="Segoe UI"/>
+              </a:defRPr>
+            </a:pPr>
+            <a:r>
+              <a:t>O Voo da Esperança (mapa.flyTo)</a:t>
             </a:r>
           </a:p>
           <a:p>
             <a:br/>
             <a:pPr>
+              <a:defRPr sz="1150">
+                <a:solidFill>
+                  <a:srgbClr val="1E293B"/>
+                </a:solidFill>
+                <a:latin typeface="Segoe UI"/>
+              </a:defRPr>
+            </a:pPr>
+            <a:r>
+              <a:t>Usamos o hook useMemo para cruzar a lista oficial do IBGE com as coordenadas geográficas de cada cidade parceira. Ao clicar no card de Coroatá ou Codó, o mapa faz uma transição suave de câmera até a cidade, com marcador e detalhes da distância de Timbiras.</a:t>
+            </a:r>
+          </a:p>
+        </p:txBody>
+      </p:sp>
+      <p:sp>
+        <p:nvSpPr>
+          <p:cNvPr id="13" name="Rounded Rectangle 12"/>
+          <p:cNvSpPr/>
+          <p:nvPr/>
+        </p:nvSpPr>
+        <p:spPr>
+          <a:xfrm>
+            <a:off x="6263640" y="3749039"/>
+            <a:ext cx="5166360" cy="2286000"/>
+          </a:xfrm>
+          <a:prstGeom prst="roundRect">
+            <a:avLst/>
+          </a:prstGeom>
+          <a:solidFill>
+            <a:srgbClr val="FEFCE8"/>
+          </a:solidFill>
+          <a:ln w="12700">
+            <a:solidFill>
+              <a:srgbClr val="FEF08A"/>
+            </a:solidFill>
+          </a:ln>
+        </p:spPr>
+        <p:style>
+          <a:lnRef idx="1">
+            <a:schemeClr val="accent1"/>
+          </a:lnRef>
+          <a:fillRef idx="3">
+            <a:schemeClr val="accent1"/>
+          </a:fillRef>
+          <a:effectRef idx="2">
+            <a:schemeClr val="accent1"/>
+          </a:effectRef>
+          <a:fontRef idx="minor">
+            <a:schemeClr val="lt1"/>
+          </a:fontRef>
+        </p:style>
+        <p:txBody>
+          <a:bodyPr rtlCol="0" anchor="ctr"/>
+          <a:lstStyle/>
+          <a:p>
+            <a:pPr algn="ctr"/>
+          </a:p>
+        </p:txBody>
+      </p:sp>
+      <p:sp>
+        <p:nvSpPr>
+          <p:cNvPr id="14" name="Rectangle 13"/>
+          <p:cNvSpPr/>
+          <p:nvPr/>
+        </p:nvSpPr>
+        <p:spPr>
+          <a:xfrm>
+            <a:off x="6263640" y="3749039"/>
+            <a:ext cx="73152" cy="2286000"/>
+          </a:xfrm>
+          <a:prstGeom prst="rect">
+            <a:avLst/>
+          </a:prstGeom>
+          <a:solidFill>
+            <a:srgbClr val="F59E0B"/>
+          </a:solidFill>
+          <a:ln>
+            <a:noFill/>
+          </a:ln>
+        </p:spPr>
+        <p:style>
+          <a:lnRef idx="1">
+            <a:schemeClr val="accent1"/>
+          </a:lnRef>
+          <a:fillRef idx="3">
+            <a:schemeClr val="accent1"/>
+          </a:fillRef>
+          <a:effectRef idx="2">
+            <a:schemeClr val="accent1"/>
+          </a:effectRef>
+          <a:fontRef idx="minor">
+            <a:schemeClr val="lt1"/>
+          </a:fontRef>
+        </p:style>
+        <p:txBody>
+          <a:bodyPr rtlCol="0" anchor="ctr"/>
+          <a:lstStyle/>
+          <a:p>
+            <a:pPr algn="ctr"/>
+          </a:p>
+        </p:txBody>
+      </p:sp>
+      <p:sp>
+        <p:nvSpPr>
+          <p:cNvPr id="15" name="TextBox 14"/>
+          <p:cNvSpPr txBox="1"/>
+          <p:nvPr/>
+        </p:nvSpPr>
+        <p:spPr>
+          <a:xfrm>
+            <a:off x="6537960" y="3931920"/>
+            <a:ext cx="4663440" cy="1920240"/>
+          </a:xfrm>
+          <a:prstGeom prst="rect">
+            <a:avLst/>
+          </a:prstGeom>
+          <a:noFill/>
+        </p:spPr>
+        <p:txBody>
+          <a:bodyPr wrap="square" lIns="0" tIns="0" rIns="0" bIns="0">
+            <a:spAutoFit/>
+          </a:bodyPr>
+          <a:lstStyle/>
+          <a:p>
+            <a:pPr>
               <a:defRPr sz="1400" b="1">
                 <a:solidFill>
-                  <a:srgbClr val="00873E"/>
-                </a:solidFill>
-                <a:latin typeface="Arial"/>
-              </a:defRPr>
-            </a:pPr>
-            <a:r>
-              <a:t>O Voo da Esperança (mapa.flyTo):</a:t>
-            </a:r>
-          </a:p>
-          <a:p>
-            <a:pPr>
-              <a:defRPr sz="1200">
+                  <a:srgbClr val="B45309"/>
+                </a:solidFill>
+                <a:latin typeface="Segoe UI"/>
+              </a:defRPr>
+            </a:pPr>
+            <a:r>
+              <a:t>Busca Ampla por Qualquer Cidade</a:t>
+            </a:r>
+          </a:p>
+          <a:p>
+            <a:br/>
+            <a:pPr>
+              <a:defRPr sz="1150">
                 <a:solidFill>
                   <a:srgbClr val="1E293B"/>
                 </a:solidFill>
-                <a:latin typeface="Arial"/>
-              </a:defRPr>
-            </a:pPr>
-            <a:r>
-              <a:t>Usamos o hook useMemo para cruzar a lista oficial do IBGE com as coordenadas geográficas de cada cidade parceira. Quando o morador clica no card de Coroatá ou Codó, o mapa faz uma transição suave de câmera até a cidade, com marcador e detalhes da distância rodoviária até Timbiras.</a:t>
-            </a:r>
-          </a:p>
-          <a:p>
-            <a:br/>
-            <a:pPr>
-              <a:defRPr sz="1400" b="1">
-                <a:solidFill>
-                  <a:srgbClr val="00873E"/>
-                </a:solidFill>
-                <a:latin typeface="Arial"/>
-              </a:defRPr>
-            </a:pPr>
-            <a:r>
-              <a:t>Busca Ampla por Qualquer Cidade:</a:t>
-            </a:r>
-          </a:p>
-          <a:p>
-            <a:pPr>
-              <a:defRPr sz="1200">
-                <a:solidFill>
-                  <a:srgbClr val="1E293B"/>
-                </a:solidFill>
-                <a:latin typeface="Arial"/>
-              </a:defRPr>
-            </a:pPr>
-            <a:r>
-              <a:t>Além das cidades dos Cocais, o usuário pode selecionar qualquer município do Maranhão no dropdown dinâmico para planejar novos polos solidários.</a:t>
+                <a:latin typeface="Segoe UI"/>
+              </a:defRPr>
+            </a:pPr>
+            <a:r>
+              <a:t>Além das cidades dos Cocais, o usuário pode selecionar qualquer município do Maranhão no dropdown dinâmico para localizar e planejar novos polos de expansão solidária.</a:t>
             </a:r>
           </a:p>
         </p:txBody>
@@ -7653,8 +9368,8 @@
         </p:nvSpPr>
         <p:spPr>
           <a:xfrm>
-            <a:off x="548640" y="365760"/>
-            <a:ext cx="8686800" cy="731520"/>
+            <a:off x="731520" y="365760"/>
+            <a:ext cx="8412480" cy="685800"/>
           </a:xfrm>
           <a:prstGeom prst="rect">
             <a:avLst/>
@@ -7668,11 +9383,11 @@
           <a:lstStyle/>
           <a:p>
             <a:pPr>
-              <a:defRPr sz="2200" b="1">
+              <a:defRPr sz="2100" b="1">
                 <a:solidFill>
                   <a:srgbClr val="00873E"/>
                 </a:solidFill>
-                <a:latin typeface="Arial"/>
+                <a:latin typeface="Segoe UI"/>
               </a:defRPr>
             </a:pPr>
             <a:r>
@@ -7689,8 +9404,8 @@
         </p:nvSpPr>
         <p:spPr>
           <a:xfrm>
-            <a:off x="9326880" y="411480"/>
-            <a:ext cx="2286000" cy="365760"/>
+            <a:off x="9235440" y="411480"/>
+            <a:ext cx="2194560" cy="347472"/>
           </a:xfrm>
           <a:prstGeom prst="roundRect">
             <a:avLst/>
@@ -7698,7 +9413,7 @@
           <a:solidFill>
             <a:srgbClr val="F8FAFC"/>
           </a:solidFill>
-          <a:ln>
+          <a:ln w="12700">
             <a:solidFill>
               <a:srgbClr val="E2E8F0"/>
             </a:solidFill>
@@ -7719,19 +9434,19 @@
           </a:fontRef>
         </p:style>
         <p:txBody>
-          <a:bodyPr rtlCol="0" anchor="ctr" wrap="none"/>
+          <a:bodyPr rtlCol="0" anchor="ctr" tIns="54864"/>
           <a:lstStyle/>
           <a:p>
             <a:pPr algn="ctr">
-              <a:defRPr sz="1100" b="1">
+              <a:defRPr sz="1000" b="1">
                 <a:solidFill>
                   <a:srgbClr val="64748B"/>
                 </a:solidFill>
-                <a:latin typeface="Arial"/>
-              </a:defRPr>
-            </a:pPr>
-            <a:r>
-              <a:t>4. Framework &amp; SPA</a:t>
+                <a:latin typeface="Segoe UI"/>
+              </a:defRPr>
+            </a:pPr>
+            <a:r>
+              <a:t>4. FRAMEWORK &amp; SPA</a:t>
             </a:r>
           </a:p>
         </p:txBody>
@@ -7744,8 +9459,8 @@
         </p:nvSpPr>
         <p:spPr>
           <a:xfrm>
-            <a:off x="548640" y="1097280"/>
-            <a:ext cx="11094415" cy="18288"/>
+            <a:off x="731520" y="1051560"/>
+            <a:ext cx="10728655" cy="13716"/>
           </a:xfrm>
           <a:prstGeom prst="rect">
             <a:avLst/>
@@ -7754,9 +9469,7 @@
             <a:srgbClr val="E2E8F0"/>
           </a:solidFill>
           <a:ln>
-            <a:solidFill>
-              <a:srgbClr val="E2E8F0"/>
-            </a:solidFill>
+            <a:noFill/>
           </a:ln>
         </p:spPr>
         <p:style>
@@ -7789,8 +9502,8 @@
         </p:nvSpPr>
         <p:spPr>
           <a:xfrm>
-            <a:off x="548640" y="6263640"/>
-            <a:ext cx="11094415" cy="18288"/>
+            <a:off x="731520" y="6263640"/>
+            <a:ext cx="10728655" cy="13716"/>
           </a:xfrm>
           <a:prstGeom prst="rect">
             <a:avLst/>
@@ -7799,9 +9512,7 @@
             <a:srgbClr val="E2E8F0"/>
           </a:solidFill>
           <a:ln>
-            <a:solidFill>
-              <a:srgbClr val="E2E8F0"/>
-            </a:solidFill>
+            <a:noFill/>
           </a:ln>
         </p:spPr>
         <p:style>
@@ -7834,7 +9545,7 @@
         </p:nvSpPr>
         <p:spPr>
           <a:xfrm>
-            <a:off x="548640" y="6327648"/>
+            <a:off x="731520" y="6327648"/>
             <a:ext cx="5486400" cy="320040"/>
           </a:xfrm>
           <a:prstGeom prst="rect">
@@ -7849,15 +9560,15 @@
           <a:lstStyle/>
           <a:p>
             <a:pPr>
-              <a:defRPr sz="1000">
+              <a:defRPr sz="950">
                 <a:solidFill>
                   <a:srgbClr val="64748B"/>
                 </a:solidFill>
-                <a:latin typeface="Arial"/>
-              </a:defRPr>
-            </a:pPr>
-            <a:r>
-              <a:t>Timbiras Solidária — ADS UEMA 2026 | Polo Timbiras</a:t>
+                <a:latin typeface="Segoe UI"/>
+              </a:defRPr>
+            </a:pPr>
+            <a:r>
+              <a:t>Timbiras Solidária — ADS UEMA 2026 | Polo Universitário de Timbiras</a:t>
             </a:r>
           </a:p>
         </p:txBody>
@@ -7870,8 +9581,8 @@
         </p:nvSpPr>
         <p:spPr>
           <a:xfrm>
-            <a:off x="9144000" y="6327648"/>
-            <a:ext cx="2499055" cy="320040"/>
+            <a:off x="8686800" y="6327648"/>
+            <a:ext cx="2773375" cy="320040"/>
           </a:xfrm>
           <a:prstGeom prst="rect">
             <a:avLst/>
@@ -7885,11 +9596,11 @@
           <a:lstStyle/>
           <a:p>
             <a:pPr algn="r">
-              <a:defRPr sz="1000" b="1">
+              <a:defRPr sz="950" b="1">
                 <a:solidFill>
                   <a:srgbClr val="64748B"/>
                 </a:solidFill>
-                <a:latin typeface="Arial"/>
+                <a:latin typeface="Segoe UI"/>
               </a:defRPr>
             </a:pPr>
             <a:r>
@@ -7906,8 +9617,8 @@
         </p:nvSpPr>
         <p:spPr>
           <a:xfrm>
-            <a:off x="548640" y="1371600"/>
-            <a:ext cx="4754880" cy="4572000"/>
+            <a:off x="731520" y="1234440"/>
+            <a:ext cx="4572000" cy="4800600"/>
           </a:xfrm>
           <a:prstGeom prst="roundRect">
             <a:avLst/>
@@ -7915,7 +9626,7 @@
           <a:solidFill>
             <a:srgbClr val="F8FAFC"/>
           </a:solidFill>
-          <a:ln>
+          <a:ln w="12700">
             <a:solidFill>
               <a:srgbClr val="E2E8F0"/>
             </a:solidFill>
@@ -7936,15 +9647,41 @@
           </a:fontRef>
         </p:style>
         <p:txBody>
-          <a:bodyPr rtlCol="0" anchor="ctr" wrap="square" lIns="274320" tIns="274320" rIns="274320" bIns="274320"/>
-          <a:lstStyle/>
-          <a:p>
-            <a:pPr algn="ctr">
-              <a:defRPr sz="1500" b="1">
+          <a:bodyPr rtlCol="0" anchor="ctr"/>
+          <a:lstStyle/>
+          <a:p>
+            <a:pPr algn="ctr"/>
+          </a:p>
+        </p:txBody>
+      </p:sp>
+      <p:sp>
+        <p:nvSpPr>
+          <p:cNvPr id="9" name="TextBox 8"/>
+          <p:cNvSpPr txBox="1"/>
+          <p:nvPr/>
+        </p:nvSpPr>
+        <p:spPr>
+          <a:xfrm>
+            <a:off x="960120" y="1417320"/>
+            <a:ext cx="4114800" cy="4434840"/>
+          </a:xfrm>
+          <a:prstGeom prst="rect">
+            <a:avLst/>
+          </a:prstGeom>
+          <a:noFill/>
+        </p:spPr>
+        <p:txBody>
+          <a:bodyPr wrap="square" lIns="0" tIns="0" rIns="0" bIns="0">
+            <a:spAutoFit/>
+          </a:bodyPr>
+          <a:lstStyle/>
+          <a:p>
+            <a:pPr>
+              <a:defRPr sz="1450" b="1">
                 <a:solidFill>
                   <a:srgbClr val="00873E"/>
                 </a:solidFill>
-                <a:latin typeface="Arial"/>
+                <a:latin typeface="Segoe UI"/>
               </a:defRPr>
             </a:pPr>
             <a:r>
@@ -7954,11 +9691,11 @@
           <a:p>
             <a:br/>
             <a:pPr>
-              <a:defRPr sz="1100">
+              <a:defRPr sz="1000">
                 <a:solidFill>
                   <a:srgbClr val="1E293B"/>
                 </a:solidFill>
-                <a:latin typeface="Courier New"/>
+                <a:latin typeface="Consolas"/>
               </a:defRPr>
             </a:pPr>
             <a:r>
@@ -7978,7 +9715,7 @@
             </a:r>
             <a:br/>
             <a:r>
-              <a:t>├── SobreCompleto.jsx (História &amp; Ação)</a:t>
+              <a:t>├── SobreCompleto.jsx (História)</a:t>
             </a:r>
             <a:br/>
             <a:r>
@@ -8006,31 +9743,31 @@
             </a:r>
             <a:br/>
             <a:r>
-              <a:t>└── Footer.jsx (Créditos &amp; Acessos)</a:t>
-            </a:r>
-          </a:p>
-        </p:txBody>
-      </p:sp>
-      <p:sp>
-        <p:nvSpPr>
-          <p:cNvPr id="9" name="Rounded Rectangle 8"/>
+              <a:t>└── Footer.jsx (Créditos &amp; Links)</a:t>
+            </a:r>
+          </a:p>
+        </p:txBody>
+      </p:sp>
+      <p:sp>
+        <p:nvSpPr>
+          <p:cNvPr id="10" name="Rounded Rectangle 9"/>
           <p:cNvSpPr/>
           <p:nvPr/>
         </p:nvSpPr>
         <p:spPr>
           <a:xfrm>
-            <a:off x="5577840" y="1371600"/>
-            <a:ext cx="6035040" cy="4572000"/>
+            <a:off x="5623560" y="1234440"/>
+            <a:ext cx="5836615" cy="2011680"/>
           </a:xfrm>
           <a:prstGeom prst="roundRect">
             <a:avLst/>
           </a:prstGeom>
           <a:solidFill>
-            <a:srgbClr val="F0FDF4"/>
+            <a:srgbClr val="F8FAFC"/>
           </a:solidFill>
-          <a:ln>
+          <a:ln w="12700">
             <a:solidFill>
-              <a:srgbClr val="10B981"/>
+              <a:srgbClr val="E2E8F0"/>
             </a:solidFill>
           </a:ln>
         </p:spPr>
@@ -8049,112 +9786,235 @@
           </a:fontRef>
         </p:style>
         <p:txBody>
-          <a:bodyPr rtlCol="0" anchor="ctr" wrap="square" lIns="274320" tIns="274320" rIns="274320" bIns="274320"/>
-          <a:lstStyle/>
-          <a:p>
-            <a:pPr algn="ctr">
-              <a:defRPr sz="1600" b="1">
+          <a:bodyPr rtlCol="0" anchor="ctr"/>
+          <a:lstStyle/>
+          <a:p>
+            <a:pPr algn="ctr"/>
+          </a:p>
+        </p:txBody>
+      </p:sp>
+      <p:sp>
+        <p:nvSpPr>
+          <p:cNvPr id="11" name="Rectangle 10"/>
+          <p:cNvSpPr/>
+          <p:nvPr/>
+        </p:nvSpPr>
+        <p:spPr>
+          <a:xfrm>
+            <a:off x="5623560" y="1234440"/>
+            <a:ext cx="73152" cy="2011680"/>
+          </a:xfrm>
+          <a:prstGeom prst="rect">
+            <a:avLst/>
+          </a:prstGeom>
+          <a:solidFill>
+            <a:srgbClr val="00873E"/>
+          </a:solidFill>
+          <a:ln>
+            <a:noFill/>
+          </a:ln>
+        </p:spPr>
+        <p:style>
+          <a:lnRef idx="1">
+            <a:schemeClr val="accent1"/>
+          </a:lnRef>
+          <a:fillRef idx="3">
+            <a:schemeClr val="accent1"/>
+          </a:fillRef>
+          <a:effectRef idx="2">
+            <a:schemeClr val="accent1"/>
+          </a:effectRef>
+          <a:fontRef idx="minor">
+            <a:schemeClr val="lt1"/>
+          </a:fontRef>
+        </p:style>
+        <p:txBody>
+          <a:bodyPr rtlCol="0" anchor="ctr"/>
+          <a:lstStyle/>
+          <a:p>
+            <a:pPr algn="ctr"/>
+          </a:p>
+        </p:txBody>
+      </p:sp>
+      <p:sp>
+        <p:nvSpPr>
+          <p:cNvPr id="12" name="TextBox 11"/>
+          <p:cNvSpPr txBox="1"/>
+          <p:nvPr/>
+        </p:nvSpPr>
+        <p:spPr>
+          <a:xfrm>
+            <a:off x="5897880" y="1371600"/>
+            <a:ext cx="5303520" cy="1737360"/>
+          </a:xfrm>
+          <a:prstGeom prst="rect">
+            <a:avLst/>
+          </a:prstGeom>
+          <a:noFill/>
+        </p:spPr>
+        <p:txBody>
+          <a:bodyPr wrap="square" lIns="0" tIns="0" rIns="0" bIns="0">
+            <a:spAutoFit/>
+          </a:bodyPr>
+          <a:lstStyle/>
+          <a:p>
+            <a:pPr>
+              <a:defRPr sz="1400" b="1">
                 <a:solidFill>
                   <a:srgbClr val="00873E"/>
                 </a:solidFill>
-                <a:latin typeface="Arial"/>
-              </a:defRPr>
-            </a:pPr>
-            <a:r>
-              <a:t>Navegação SPA &amp; Hooks Utilizados</a:t>
+                <a:latin typeface="Segoe UI"/>
+              </a:defRPr>
+            </a:pPr>
+            <a:r>
+              <a:t>Sem Aquele 'Piscar Branco' do Navegador</a:t>
             </a:r>
           </a:p>
           <a:p>
             <a:br/>
             <a:pPr>
+              <a:defRPr sz="1150">
+                <a:solidFill>
+                  <a:srgbClr val="1E293B"/>
+                </a:solidFill>
+                <a:latin typeface="Segoe UI"/>
+              </a:defRPr>
+            </a:pPr>
+            <a:r>
+              <a:t>Como uma Single Page Application (SPA), a navegação ocorre por rolagem suave (smooth scroll), mantendo a música tocando sem cortes e os dados preenchidos no formulário preservados.</a:t>
+            </a:r>
+          </a:p>
+        </p:txBody>
+      </p:sp>
+      <p:sp>
+        <p:nvSpPr>
+          <p:cNvPr id="13" name="Rounded Rectangle 12"/>
+          <p:cNvSpPr/>
+          <p:nvPr/>
+        </p:nvSpPr>
+        <p:spPr>
+          <a:xfrm>
+            <a:off x="5623560" y="3474720"/>
+            <a:ext cx="5836615" cy="2560320"/>
+          </a:xfrm>
+          <a:prstGeom prst="roundRect">
+            <a:avLst/>
+          </a:prstGeom>
+          <a:solidFill>
+            <a:srgbClr val="F0FDF4"/>
+          </a:solidFill>
+          <a:ln w="12700">
+            <a:solidFill>
+              <a:srgbClr val="BBF7D0"/>
+            </a:solidFill>
+          </a:ln>
+        </p:spPr>
+        <p:style>
+          <a:lnRef idx="1">
+            <a:schemeClr val="accent1"/>
+          </a:lnRef>
+          <a:fillRef idx="3">
+            <a:schemeClr val="accent1"/>
+          </a:fillRef>
+          <a:effectRef idx="2">
+            <a:schemeClr val="accent1"/>
+          </a:effectRef>
+          <a:fontRef idx="minor">
+            <a:schemeClr val="lt1"/>
+          </a:fontRef>
+        </p:style>
+        <p:txBody>
+          <a:bodyPr rtlCol="0" anchor="ctr"/>
+          <a:lstStyle/>
+          <a:p>
+            <a:pPr algn="ctr"/>
+          </a:p>
+        </p:txBody>
+      </p:sp>
+      <p:sp>
+        <p:nvSpPr>
+          <p:cNvPr id="14" name="TextBox 13"/>
+          <p:cNvSpPr txBox="1"/>
+          <p:nvPr/>
+        </p:nvSpPr>
+        <p:spPr>
+          <a:xfrm>
+            <a:off x="5897880" y="3611880"/>
+            <a:ext cx="5303520" cy="2286000"/>
+          </a:xfrm>
+          <a:prstGeom prst="rect">
+            <a:avLst/>
+          </a:prstGeom>
+          <a:noFill/>
+        </p:spPr>
+        <p:txBody>
+          <a:bodyPr wrap="square" lIns="0" tIns="0" rIns="0" bIns="0">
+            <a:spAutoFit/>
+          </a:bodyPr>
+          <a:lstStyle/>
+          <a:p>
+            <a:pPr>
               <a:defRPr sz="1300" b="1">
                 <a:solidFill>
                   <a:srgbClr val="00873E"/>
                 </a:solidFill>
-                <a:latin typeface="Arial"/>
-              </a:defRPr>
-            </a:pPr>
-            <a:r>
-              <a:t>Sem Aquele 'Piscar Branco' do Navegador:</a:t>
-            </a:r>
-          </a:p>
-          <a:p>
-            <a:pPr>
-              <a:defRPr sz="1200">
+                <a:latin typeface="Segoe UI"/>
+              </a:defRPr>
+            </a:pPr>
+            <a:r>
+              <a:t>Hooks do React que Deram Vida à Aplicação:</a:t>
+            </a:r>
+          </a:p>
+          <a:p>
+            <a:pPr>
+              <a:defRPr sz="1100">
                 <a:solidFill>
                   <a:srgbClr val="1E293B"/>
                 </a:solidFill>
-                <a:latin typeface="Arial"/>
-              </a:defRPr>
-            </a:pPr>
-            <a:r>
-              <a:t>Em sites antigos, cada clique recarregava toda a página, perdendo os formulários e parando a música. Como uma Single Page Application (SPA), a navegação ocorre por rolagem suave (smooth scroll), mantendo o áudio tocando e os dados preservados.</a:t>
-            </a:r>
-          </a:p>
-          <a:p>
-            <a:br/>
-            <a:pPr>
-              <a:defRPr sz="1300" b="1">
-                <a:solidFill>
-                  <a:srgbClr val="00873E"/>
-                </a:solidFill>
-                <a:latin typeface="Arial"/>
-              </a:defRPr>
-            </a:pPr>
-            <a:r>
-              <a:t>Hooks que Deram Vida à Aplicação:</a:t>
-            </a:r>
-          </a:p>
-          <a:p>
-            <a:pPr>
-              <a:defRPr sz="1200">
+                <a:latin typeface="Segoe UI"/>
+              </a:defRPr>
+            </a:pPr>
+            <a:r>
+              <a:t>• useState:  Guarda o total arrecadado, filtro de bairros e menu aberto;</a:t>
+            </a:r>
+          </a:p>
+          <a:p>
+            <a:pPr>
+              <a:defRPr sz="1100">
                 <a:solidFill>
                   <a:srgbClr val="1E293B"/>
                 </a:solidFill>
-                <a:latin typeface="Arial"/>
-              </a:defRPr>
-            </a:pPr>
-            <a:r>
-              <a:t>• useState: Guarda o total arrecadado, a busca por bairros e o menu aberto;</a:t>
-            </a:r>
-          </a:p>
-          <a:p>
-            <a:pPr>
-              <a:defRPr sz="1200">
+                <a:latin typeface="Segoe UI"/>
+              </a:defRPr>
+            </a:pPr>
+            <a:r>
+              <a:t>• useEffect:  Busca dados no IBGE e escuta eventos de clique para o som;</a:t>
+            </a:r>
+          </a:p>
+          <a:p>
+            <a:pPr>
+              <a:defRPr sz="1100">
                 <a:solidFill>
                   <a:srgbClr val="1E293B"/>
                 </a:solidFill>
-                <a:latin typeface="Arial"/>
-              </a:defRPr>
-            </a:pPr>
-            <a:r>
-              <a:t>• useEffect: Conecta à API do IBGE e escuta cliques para ativar o áudio;</a:t>
-            </a:r>
-          </a:p>
-          <a:p>
-            <a:pPr>
-              <a:defRPr sz="1200">
+                <a:latin typeface="Segoe UI"/>
+              </a:defRPr>
+            </a:pPr>
+            <a:r>
+              <a:t>• useRef:  Controla a tag HTML5 audio sem re-renderizar a tela inteira;</a:t>
+            </a:r>
+          </a:p>
+          <a:p>
+            <a:pPr>
+              <a:defRPr sz="1100">
                 <a:solidFill>
                   <a:srgbClr val="1E293B"/>
                 </a:solidFill>
-                <a:latin typeface="Arial"/>
-              </a:defRPr>
-            </a:pPr>
-            <a:r>
-              <a:t>• useRef: Controla o som sem precisar redesenhar a tela inteira;</a:t>
-            </a:r>
-          </a:p>
-          <a:p>
-            <a:pPr>
-              <a:defRPr sz="1200">
-                <a:solidFill>
-                  <a:srgbClr val="1E293B"/>
-                </a:solidFill>
-                <a:latin typeface="Arial"/>
-              </a:defRPr>
-            </a:pPr>
-            <a:r>
-              <a:t>• localStorage: Preserva as doações cadastradas mesmo fechando o navegador.</a:t>
+                <a:latin typeface="Segoe UI"/>
+              </a:defRPr>
+            </a:pPr>
+            <a:r>
+              <a:t>• localStorage:  Preserva as doações mesmo fechando o navegador.</a:t>
             </a:r>
           </a:p>
         </p:txBody>
@@ -8185,8 +10045,8 @@
         </p:nvSpPr>
         <p:spPr>
           <a:xfrm>
-            <a:off x="548640" y="365760"/>
-            <a:ext cx="8686800" cy="731520"/>
+            <a:off x="731520" y="365760"/>
+            <a:ext cx="8412480" cy="685800"/>
           </a:xfrm>
           <a:prstGeom prst="rect">
             <a:avLst/>
@@ -8200,11 +10060,11 @@
           <a:lstStyle/>
           <a:p>
             <a:pPr>
-              <a:defRPr sz="2200" b="1">
+              <a:defRPr sz="2100" b="1">
                 <a:solidFill>
                   <a:srgbClr val="00873E"/>
                 </a:solidFill>
-                <a:latin typeface="Arial"/>
+                <a:latin typeface="Segoe UI"/>
               </a:defRPr>
             </a:pPr>
             <a:r>
@@ -8221,8 +10081,8 @@
         </p:nvSpPr>
         <p:spPr>
           <a:xfrm>
-            <a:off x="9326880" y="411480"/>
-            <a:ext cx="2286000" cy="365760"/>
+            <a:off x="9235440" y="411480"/>
+            <a:ext cx="2194560" cy="347472"/>
           </a:xfrm>
           <a:prstGeom prst="roundRect">
             <a:avLst/>
@@ -8230,7 +10090,7 @@
           <a:solidFill>
             <a:srgbClr val="F8FAFC"/>
           </a:solidFill>
-          <a:ln>
+          <a:ln w="12700">
             <a:solidFill>
               <a:srgbClr val="E2E8F0"/>
             </a:solidFill>
@@ -8251,19 +10111,19 @@
           </a:fontRef>
         </p:style>
         <p:txBody>
-          <a:bodyPr rtlCol="0" anchor="ctr" wrap="none"/>
+          <a:bodyPr rtlCol="0" anchor="ctr" tIns="54864"/>
           <a:lstStyle/>
           <a:p>
             <a:pPr algn="ctr">
-              <a:defRPr sz="1100" b="1">
+              <a:defRPr sz="1000" b="1">
                 <a:solidFill>
                   <a:srgbClr val="64748B"/>
                 </a:solidFill>
-                <a:latin typeface="Arial"/>
-              </a:defRPr>
-            </a:pPr>
-            <a:r>
-              <a:t>5. Testes &amp; Qualidade</a:t>
+                <a:latin typeface="Segoe UI"/>
+              </a:defRPr>
+            </a:pPr>
+            <a:r>
+              <a:t>5. TESTES &amp; QUALIDADE</a:t>
             </a:r>
           </a:p>
         </p:txBody>
@@ -8276,8 +10136,8 @@
         </p:nvSpPr>
         <p:spPr>
           <a:xfrm>
-            <a:off x="548640" y="1097280"/>
-            <a:ext cx="11094415" cy="18288"/>
+            <a:off x="731520" y="1051560"/>
+            <a:ext cx="10728655" cy="13716"/>
           </a:xfrm>
           <a:prstGeom prst="rect">
             <a:avLst/>
@@ -8286,9 +10146,7 @@
             <a:srgbClr val="E2E8F0"/>
           </a:solidFill>
           <a:ln>
-            <a:solidFill>
-              <a:srgbClr val="E2E8F0"/>
-            </a:solidFill>
+            <a:noFill/>
           </a:ln>
         </p:spPr>
         <p:style>
@@ -8321,8 +10179,8 @@
         </p:nvSpPr>
         <p:spPr>
           <a:xfrm>
-            <a:off x="548640" y="6263640"/>
-            <a:ext cx="11094415" cy="18288"/>
+            <a:off x="731520" y="6263640"/>
+            <a:ext cx="10728655" cy="13716"/>
           </a:xfrm>
           <a:prstGeom prst="rect">
             <a:avLst/>
@@ -8331,9 +10189,7 @@
             <a:srgbClr val="E2E8F0"/>
           </a:solidFill>
           <a:ln>
-            <a:solidFill>
-              <a:srgbClr val="E2E8F0"/>
-            </a:solidFill>
+            <a:noFill/>
           </a:ln>
         </p:spPr>
         <p:style>
@@ -8366,7 +10222,7 @@
         </p:nvSpPr>
         <p:spPr>
           <a:xfrm>
-            <a:off x="548640" y="6327648"/>
+            <a:off x="731520" y="6327648"/>
             <a:ext cx="5486400" cy="320040"/>
           </a:xfrm>
           <a:prstGeom prst="rect">
@@ -8381,15 +10237,15 @@
           <a:lstStyle/>
           <a:p>
             <a:pPr>
-              <a:defRPr sz="1000">
+              <a:defRPr sz="950">
                 <a:solidFill>
                   <a:srgbClr val="64748B"/>
                 </a:solidFill>
-                <a:latin typeface="Arial"/>
-              </a:defRPr>
-            </a:pPr>
-            <a:r>
-              <a:t>Timbiras Solidária — ADS UEMA 2026 | Polo Timbiras</a:t>
+                <a:latin typeface="Segoe UI"/>
+              </a:defRPr>
+            </a:pPr>
+            <a:r>
+              <a:t>Timbiras Solidária — ADS UEMA 2026 | Polo Universitário de Timbiras</a:t>
             </a:r>
           </a:p>
         </p:txBody>
@@ -8402,8 +10258,8 @@
         </p:nvSpPr>
         <p:spPr>
           <a:xfrm>
-            <a:off x="9144000" y="6327648"/>
-            <a:ext cx="2499055" cy="320040"/>
+            <a:off x="8686800" y="6327648"/>
+            <a:ext cx="2773375" cy="320040"/>
           </a:xfrm>
           <a:prstGeom prst="rect">
             <a:avLst/>
@@ -8417,11 +10273,11 @@
           <a:lstStyle/>
           <a:p>
             <a:pPr algn="r">
-              <a:defRPr sz="1000" b="1">
+              <a:defRPr sz="950" b="1">
                 <a:solidFill>
                   <a:srgbClr val="64748B"/>
                 </a:solidFill>
-                <a:latin typeface="Arial"/>
+                <a:latin typeface="Segoe UI"/>
               </a:defRPr>
             </a:pPr>
             <a:r>
@@ -8432,14 +10288,50 @@
       </p:sp>
       <p:sp>
         <p:nvSpPr>
-          <p:cNvPr id="8" name="Rounded Rectangle 7"/>
+          <p:cNvPr id="8" name="TextBox 7"/>
+          <p:cNvSpPr txBox="1"/>
+          <p:nvPr/>
+        </p:nvSpPr>
+        <p:spPr>
+          <a:xfrm>
+            <a:off x="731520" y="1234440"/>
+            <a:ext cx="5166360" cy="457200"/>
+          </a:xfrm>
+          <a:prstGeom prst="rect">
+            <a:avLst/>
+          </a:prstGeom>
+          <a:noFill/>
+        </p:spPr>
+        <p:txBody>
+          <a:bodyPr wrap="none">
+            <a:spAutoFit/>
+          </a:bodyPr>
+          <a:lstStyle/>
+          <a:p>
+            <a:pPr>
+              <a:defRPr sz="1550" b="1">
+                <a:solidFill>
+                  <a:srgbClr val="00873E"/>
+                </a:solidFill>
+                <a:latin typeface="Segoe UI"/>
+              </a:defRPr>
+            </a:pPr>
+            <a:r>
+              <a:t>O Que Deu Errado e Como Consertamos</a:t>
+            </a:r>
+          </a:p>
+        </p:txBody>
+      </p:sp>
+      <p:sp>
+        <p:nvSpPr>
+          <p:cNvPr id="9" name="Rounded Rectangle 8"/>
           <p:cNvSpPr/>
           <p:nvPr/>
         </p:nvSpPr>
         <p:spPr>
           <a:xfrm>
-            <a:off x="548640" y="1371600"/>
-            <a:ext cx="5394960" cy="4572000"/>
+            <a:off x="731520" y="1783080"/>
+            <a:ext cx="5166360" cy="1371600"/>
           </a:xfrm>
           <a:prstGeom prst="roundRect">
             <a:avLst/>
@@ -8447,7 +10339,7 @@
           <a:solidFill>
             <a:srgbClr val="F8FAFC"/>
           </a:solidFill>
-          <a:ln>
+          <a:ln w="12700">
             <a:solidFill>
               <a:srgbClr val="E2E8F0"/>
             </a:solidFill>
@@ -8468,98 +10360,32 @@
           </a:fontRef>
         </p:style>
         <p:txBody>
-          <a:bodyPr rtlCol="0" anchor="ctr" wrap="square" lIns="274320" tIns="274320" rIns="274320" bIns="274320"/>
-          <a:lstStyle/>
-          <a:p>
-            <a:pPr algn="ctr">
-              <a:defRPr sz="1600" b="1">
-                <a:solidFill>
-                  <a:srgbClr val="00873E"/>
-                </a:solidFill>
-                <a:latin typeface="Arial"/>
-              </a:defRPr>
-            </a:pPr>
-            <a:r>
-              <a:t>O Que Deu Errado e Como Consertamos</a:t>
-            </a:r>
-          </a:p>
-          <a:p>
-            <a:br/>
-            <a:pPr>
-              <a:defRPr sz="1200">
-                <a:solidFill>
-                  <a:srgbClr val="1E293B"/>
-                </a:solidFill>
-                <a:latin typeface="Arial"/>
-              </a:defRPr>
-            </a:pPr>
-            <a:r>
-              <a:t>1. O Desafio do Menu no Celular:</a:t>
-            </a:r>
-            <a:br/>
-            <a:r>
-              <a:t> Em telas pequenas os botões quebravam em várias linhas. Criamos um menu hambúrguer com estado React que se recolhe perfeitamente.</a:t>
-            </a:r>
-          </a:p>
-          <a:p>
-            <a:br/>
-            <a:pPr>
-              <a:defRPr sz="1200">
-                <a:solidFill>
-                  <a:srgbClr val="1E293B"/>
-                </a:solidFill>
-                <a:latin typeface="Arial"/>
-              </a:defRPr>
-            </a:pPr>
-            <a:r>
-              <a:t>2. O Dado da API Visível na Interface:</a:t>
-            </a:r>
-            <a:br/>
-            <a:r>
-              <a:t> Inicialmente usávamos a API apenas internamente. O professor pontuou que precisava ser visual. Criamos os cards com código IBGE de 7 dígitos e microrregião.</a:t>
-            </a:r>
-          </a:p>
-          <a:p>
-            <a:br/>
-            <a:pPr>
-              <a:defRPr sz="1200">
-                <a:solidFill>
-                  <a:srgbClr val="1E293B"/>
-                </a:solidFill>
-                <a:latin typeface="Arial"/>
-              </a:defRPr>
-            </a:pPr>
-            <a:r>
-              <a:t>3. Aviso de Re-renderização no Linter:</a:t>
-            </a:r>
-            <a:br/>
-            <a:r>
-              <a:t> O linter apontava risco de loop com setState síncrono. Refatoramos a inicialização e limpamos o fluxo.</a:t>
-            </a:r>
-          </a:p>
-        </p:txBody>
-      </p:sp>
-      <p:sp>
-        <p:nvSpPr>
-          <p:cNvPr id="9" name="Rounded Rectangle 8"/>
+          <a:bodyPr rtlCol="0" anchor="ctr"/>
+          <a:lstStyle/>
+          <a:p>
+            <a:pPr algn="ctr"/>
+          </a:p>
+        </p:txBody>
+      </p:sp>
+      <p:sp>
+        <p:nvSpPr>
+          <p:cNvPr id="10" name="Rectangle 9"/>
           <p:cNvSpPr/>
           <p:nvPr/>
         </p:nvSpPr>
         <p:spPr>
           <a:xfrm>
-            <a:off x="6217920" y="1371600"/>
-            <a:ext cx="5394960" cy="4572000"/>
-          </a:xfrm>
-          <a:prstGeom prst="roundRect">
+            <a:off x="731520" y="1783080"/>
+            <a:ext cx="73152" cy="1371600"/>
+          </a:xfrm>
+          <a:prstGeom prst="rect">
             <a:avLst/>
           </a:prstGeom>
           <a:solidFill>
-            <a:srgbClr val="F0FDF4"/>
+            <a:srgbClr val="00873E"/>
           </a:solidFill>
           <a:ln>
-            <a:solidFill>
-              <a:srgbClr val="10B981"/>
-            </a:solidFill>
+            <a:noFill/>
           </a:ln>
         </p:spPr>
         <p:style>
@@ -8577,15 +10403,409 @@
           </a:fontRef>
         </p:style>
         <p:txBody>
-          <a:bodyPr rtlCol="0" anchor="ctr" wrap="square" lIns="274320" tIns="274320" rIns="274320" bIns="274320"/>
-          <a:lstStyle/>
-          <a:p>
-            <a:pPr algn="ctr">
-              <a:defRPr sz="1600" b="1">
+          <a:bodyPr rtlCol="0" anchor="ctr"/>
+          <a:lstStyle/>
+          <a:p>
+            <a:pPr algn="ctr"/>
+          </a:p>
+        </p:txBody>
+      </p:sp>
+      <p:sp>
+        <p:nvSpPr>
+          <p:cNvPr id="11" name="TextBox 10"/>
+          <p:cNvSpPr txBox="1"/>
+          <p:nvPr/>
+        </p:nvSpPr>
+        <p:spPr>
+          <a:xfrm>
+            <a:off x="960120" y="1892808"/>
+            <a:ext cx="4800600" cy="1143000"/>
+          </a:xfrm>
+          <a:prstGeom prst="rect">
+            <a:avLst/>
+          </a:prstGeom>
+          <a:noFill/>
+        </p:spPr>
+        <p:txBody>
+          <a:bodyPr wrap="square" lIns="0" tIns="0" rIns="0" bIns="0">
+            <a:spAutoFit/>
+          </a:bodyPr>
+          <a:lstStyle/>
+          <a:p>
+            <a:pPr>
+              <a:defRPr sz="1250" b="1">
+                <a:solidFill>
+                  <a:srgbClr val="1E293B"/>
+                </a:solidFill>
+                <a:latin typeface="Segoe UI"/>
+              </a:defRPr>
+            </a:pPr>
+            <a:r>
+              <a:t>1. O Desafio do Menu no Celular</a:t>
+            </a:r>
+          </a:p>
+          <a:p>
+            <a:pPr>
+              <a:defRPr sz="1050">
+                <a:solidFill>
+                  <a:srgbClr val="64748B"/>
+                </a:solidFill>
+                <a:latin typeface="Segoe UI"/>
+              </a:defRPr>
+            </a:pPr>
+            <a:r>
+              <a:t>Nos primeiros testes em telas pequenas, os botões quebravam e ocupavam metade da tela. Criamos um menu hambúrguer com estado React que se recolhe perfeitamente.</a:t>
+            </a:r>
+          </a:p>
+        </p:txBody>
+      </p:sp>
+      <p:sp>
+        <p:nvSpPr>
+          <p:cNvPr id="12" name="Rounded Rectangle 11"/>
+          <p:cNvSpPr/>
+          <p:nvPr/>
+        </p:nvSpPr>
+        <p:spPr>
+          <a:xfrm>
+            <a:off x="731520" y="3337560"/>
+            <a:ext cx="5166360" cy="1371600"/>
+          </a:xfrm>
+          <a:prstGeom prst="roundRect">
+            <a:avLst/>
+          </a:prstGeom>
+          <a:solidFill>
+            <a:srgbClr val="F8FAFC"/>
+          </a:solidFill>
+          <a:ln w="12700">
+            <a:solidFill>
+              <a:srgbClr val="E2E8F0"/>
+            </a:solidFill>
+          </a:ln>
+        </p:spPr>
+        <p:style>
+          <a:lnRef idx="1">
+            <a:schemeClr val="accent1"/>
+          </a:lnRef>
+          <a:fillRef idx="3">
+            <a:schemeClr val="accent1"/>
+          </a:fillRef>
+          <a:effectRef idx="2">
+            <a:schemeClr val="accent1"/>
+          </a:effectRef>
+          <a:fontRef idx="minor">
+            <a:schemeClr val="lt1"/>
+          </a:fontRef>
+        </p:style>
+        <p:txBody>
+          <a:bodyPr rtlCol="0" anchor="ctr"/>
+          <a:lstStyle/>
+          <a:p>
+            <a:pPr algn="ctr"/>
+          </a:p>
+        </p:txBody>
+      </p:sp>
+      <p:sp>
+        <p:nvSpPr>
+          <p:cNvPr id="13" name="Rectangle 12"/>
+          <p:cNvSpPr/>
+          <p:nvPr/>
+        </p:nvSpPr>
+        <p:spPr>
+          <a:xfrm>
+            <a:off x="731520" y="3337560"/>
+            <a:ext cx="73152" cy="1371600"/>
+          </a:xfrm>
+          <a:prstGeom prst="rect">
+            <a:avLst/>
+          </a:prstGeom>
+          <a:solidFill>
+            <a:srgbClr val="00873E"/>
+          </a:solidFill>
+          <a:ln>
+            <a:noFill/>
+          </a:ln>
+        </p:spPr>
+        <p:style>
+          <a:lnRef idx="1">
+            <a:schemeClr val="accent1"/>
+          </a:lnRef>
+          <a:fillRef idx="3">
+            <a:schemeClr val="accent1"/>
+          </a:fillRef>
+          <a:effectRef idx="2">
+            <a:schemeClr val="accent1"/>
+          </a:effectRef>
+          <a:fontRef idx="minor">
+            <a:schemeClr val="lt1"/>
+          </a:fontRef>
+        </p:style>
+        <p:txBody>
+          <a:bodyPr rtlCol="0" anchor="ctr"/>
+          <a:lstStyle/>
+          <a:p>
+            <a:pPr algn="ctr"/>
+          </a:p>
+        </p:txBody>
+      </p:sp>
+      <p:sp>
+        <p:nvSpPr>
+          <p:cNvPr id="14" name="TextBox 13"/>
+          <p:cNvSpPr txBox="1"/>
+          <p:nvPr/>
+        </p:nvSpPr>
+        <p:spPr>
+          <a:xfrm>
+            <a:off x="960120" y="3447288"/>
+            <a:ext cx="4800600" cy="1143000"/>
+          </a:xfrm>
+          <a:prstGeom prst="rect">
+            <a:avLst/>
+          </a:prstGeom>
+          <a:noFill/>
+        </p:spPr>
+        <p:txBody>
+          <a:bodyPr wrap="square" lIns="0" tIns="0" rIns="0" bIns="0">
+            <a:spAutoFit/>
+          </a:bodyPr>
+          <a:lstStyle/>
+          <a:p>
+            <a:pPr>
+              <a:defRPr sz="1250" b="1">
+                <a:solidFill>
+                  <a:srgbClr val="1E293B"/>
+                </a:solidFill>
+                <a:latin typeface="Segoe UI"/>
+              </a:defRPr>
+            </a:pPr>
+            <a:r>
+              <a:t>2. O Dado da API Visível na Tela</a:t>
+            </a:r>
+          </a:p>
+          <a:p>
+            <a:pPr>
+              <a:defRPr sz="1050">
+                <a:solidFill>
+                  <a:srgbClr val="64748B"/>
+                </a:solidFill>
+                <a:latin typeface="Segoe UI"/>
+              </a:defRPr>
+            </a:pPr>
+            <a:r>
+              <a:t>Inicialmente fazíamos a busca no IBGE apenas para validar nomes internamente. O professor pontuou que o dado precisava ser visual. Criamos os cards com código IBGE de 7 dígitos e microrregião.</a:t>
+            </a:r>
+          </a:p>
+        </p:txBody>
+      </p:sp>
+      <p:sp>
+        <p:nvSpPr>
+          <p:cNvPr id="15" name="Rounded Rectangle 14"/>
+          <p:cNvSpPr/>
+          <p:nvPr/>
+        </p:nvSpPr>
+        <p:spPr>
+          <a:xfrm>
+            <a:off x="731520" y="4892040"/>
+            <a:ext cx="5166360" cy="1371600"/>
+          </a:xfrm>
+          <a:prstGeom prst="roundRect">
+            <a:avLst/>
+          </a:prstGeom>
+          <a:solidFill>
+            <a:srgbClr val="F8FAFC"/>
+          </a:solidFill>
+          <a:ln w="12700">
+            <a:solidFill>
+              <a:srgbClr val="E2E8F0"/>
+            </a:solidFill>
+          </a:ln>
+        </p:spPr>
+        <p:style>
+          <a:lnRef idx="1">
+            <a:schemeClr val="accent1"/>
+          </a:lnRef>
+          <a:fillRef idx="3">
+            <a:schemeClr val="accent1"/>
+          </a:fillRef>
+          <a:effectRef idx="2">
+            <a:schemeClr val="accent1"/>
+          </a:effectRef>
+          <a:fontRef idx="minor">
+            <a:schemeClr val="lt1"/>
+          </a:fontRef>
+        </p:style>
+        <p:txBody>
+          <a:bodyPr rtlCol="0" anchor="ctr"/>
+          <a:lstStyle/>
+          <a:p>
+            <a:pPr algn="ctr"/>
+          </a:p>
+        </p:txBody>
+      </p:sp>
+      <p:sp>
+        <p:nvSpPr>
+          <p:cNvPr id="16" name="Rectangle 15"/>
+          <p:cNvSpPr/>
+          <p:nvPr/>
+        </p:nvSpPr>
+        <p:spPr>
+          <a:xfrm>
+            <a:off x="731520" y="4892040"/>
+            <a:ext cx="73152" cy="1371600"/>
+          </a:xfrm>
+          <a:prstGeom prst="rect">
+            <a:avLst/>
+          </a:prstGeom>
+          <a:solidFill>
+            <a:srgbClr val="00873E"/>
+          </a:solidFill>
+          <a:ln>
+            <a:noFill/>
+          </a:ln>
+        </p:spPr>
+        <p:style>
+          <a:lnRef idx="1">
+            <a:schemeClr val="accent1"/>
+          </a:lnRef>
+          <a:fillRef idx="3">
+            <a:schemeClr val="accent1"/>
+          </a:fillRef>
+          <a:effectRef idx="2">
+            <a:schemeClr val="accent1"/>
+          </a:effectRef>
+          <a:fontRef idx="minor">
+            <a:schemeClr val="lt1"/>
+          </a:fontRef>
+        </p:style>
+        <p:txBody>
+          <a:bodyPr rtlCol="0" anchor="ctr"/>
+          <a:lstStyle/>
+          <a:p>
+            <a:pPr algn="ctr"/>
+          </a:p>
+        </p:txBody>
+      </p:sp>
+      <p:sp>
+        <p:nvSpPr>
+          <p:cNvPr id="17" name="TextBox 16"/>
+          <p:cNvSpPr txBox="1"/>
+          <p:nvPr/>
+        </p:nvSpPr>
+        <p:spPr>
+          <a:xfrm>
+            <a:off x="960120" y="5001768"/>
+            <a:ext cx="4800600" cy="1143000"/>
+          </a:xfrm>
+          <a:prstGeom prst="rect">
+            <a:avLst/>
+          </a:prstGeom>
+          <a:noFill/>
+        </p:spPr>
+        <p:txBody>
+          <a:bodyPr wrap="square" lIns="0" tIns="0" rIns="0" bIns="0">
+            <a:spAutoFit/>
+          </a:bodyPr>
+          <a:lstStyle/>
+          <a:p>
+            <a:pPr>
+              <a:defRPr sz="1250" b="1">
+                <a:solidFill>
+                  <a:srgbClr val="1E293B"/>
+                </a:solidFill>
+                <a:latin typeface="Segoe UI"/>
+              </a:defRPr>
+            </a:pPr>
+            <a:r>
+              <a:t>3. Aviso de Renderização em Cascata</a:t>
+            </a:r>
+          </a:p>
+          <a:p>
+            <a:pPr>
+              <a:defRPr sz="1050">
+                <a:solidFill>
+                  <a:srgbClr val="64748B"/>
+                </a:solidFill>
+                <a:latin typeface="Segoe UI"/>
+              </a:defRPr>
+            </a:pPr>
+            <a:r>
+              <a:t>O linter acusava risco com setState síncrono no efeito inicial. Reorganizamos a montagem dos componentes deixando o fluxo limpo.</a:t>
+            </a:r>
+          </a:p>
+        </p:txBody>
+      </p:sp>
+      <p:sp>
+        <p:nvSpPr>
+          <p:cNvPr id="18" name="Rounded Rectangle 17"/>
+          <p:cNvSpPr/>
+          <p:nvPr/>
+        </p:nvSpPr>
+        <p:spPr>
+          <a:xfrm>
+            <a:off x="6263640" y="1234440"/>
+            <a:ext cx="5166360" cy="4800600"/>
+          </a:xfrm>
+          <a:prstGeom prst="roundRect">
+            <a:avLst/>
+          </a:prstGeom>
+          <a:solidFill>
+            <a:srgbClr val="F0FDF4"/>
+          </a:solidFill>
+          <a:ln w="12700">
+            <a:solidFill>
+              <a:srgbClr val="BBF7D0"/>
+            </a:solidFill>
+          </a:ln>
+        </p:spPr>
+        <p:style>
+          <a:lnRef idx="1">
+            <a:schemeClr val="accent1"/>
+          </a:lnRef>
+          <a:fillRef idx="3">
+            <a:schemeClr val="accent1"/>
+          </a:fillRef>
+          <a:effectRef idx="2">
+            <a:schemeClr val="accent1"/>
+          </a:effectRef>
+          <a:fontRef idx="minor">
+            <a:schemeClr val="lt1"/>
+          </a:fontRef>
+        </p:style>
+        <p:txBody>
+          <a:bodyPr rtlCol="0" anchor="ctr"/>
+          <a:lstStyle/>
+          <a:p>
+            <a:pPr algn="ctr"/>
+          </a:p>
+        </p:txBody>
+      </p:sp>
+      <p:sp>
+        <p:nvSpPr>
+          <p:cNvPr id="19" name="TextBox 18"/>
+          <p:cNvSpPr txBox="1"/>
+          <p:nvPr/>
+        </p:nvSpPr>
+        <p:spPr>
+          <a:xfrm>
+            <a:off x="6537960" y="1417320"/>
+            <a:ext cx="4617720" cy="4434840"/>
+          </a:xfrm>
+          <a:prstGeom prst="rect">
+            <a:avLst/>
+          </a:prstGeom>
+          <a:noFill/>
+        </p:spPr>
+        <p:txBody>
+          <a:bodyPr wrap="square" lIns="0" tIns="0" rIns="0" bIns="0">
+            <a:spAutoFit/>
+          </a:bodyPr>
+          <a:lstStyle/>
+          <a:p>
+            <a:pPr>
+              <a:defRPr sz="1550" b="1">
                 <a:solidFill>
                   <a:srgbClr val="00873E"/>
                 </a:solidFill>
-                <a:latin typeface="Arial"/>
+                <a:latin typeface="Segoe UI"/>
               </a:defRPr>
             </a:pPr>
             <a:r>
@@ -8595,73 +10815,57 @@
           <a:p>
             <a:br/>
             <a:pPr>
-              <a:defRPr sz="1200">
+              <a:defRPr sz="1150">
                 <a:solidFill>
                   <a:srgbClr val="1E293B"/>
                 </a:solidFill>
-                <a:latin typeface="Arial"/>
-              </a:defRPr>
-            </a:pPr>
-            <a:r>
-              <a:t>• Build de Produção (Vite):</a:t>
-            </a:r>
+                <a:latin typeface="Segoe UI"/>
+              </a:defRPr>
+            </a:pPr>
+            <a:r>
+              <a:t>• Build de Produção com Vite: Compilado em menos de 800ms, gerando código minificado e assets otimizados na pasta dist/.</a:t>
+            </a:r>
+          </a:p>
+          <a:p>
             <a:br/>
-            <a:r>
-              <a:t> Compilado em menos de 800ms gerando pacotes minificados em dist/.</a:t>
+            <a:pPr>
+              <a:defRPr sz="1150">
+                <a:solidFill>
+                  <a:srgbClr val="1E293B"/>
+                </a:solidFill>
+                <a:latin typeface="Segoe UI"/>
+              </a:defRPr>
+            </a:pPr>
+            <a:r>
+              <a:t>• Análise Estática com Oxlint: Zero erros de sintaxe, zero alertas de React e conformidade estrita com padrões modernos de código.</a:t>
             </a:r>
           </a:p>
           <a:p>
             <a:br/>
             <a:pPr>
-              <a:defRPr sz="1200">
+              <a:defRPr sz="1150">
                 <a:solidFill>
                   <a:srgbClr val="1E293B"/>
                 </a:solidFill>
-                <a:latin typeface="Arial"/>
-              </a:defRPr>
-            </a:pPr>
-            <a:r>
-              <a:t>• Análise Estática (Oxlint):</a:t>
-            </a:r>
+                <a:latin typeface="Segoe UI"/>
+              </a:defRPr>
+            </a:pPr>
+            <a:r>
+              <a:t>• Teste de Formulários em Branco: O navegador bloqueia submissão vazia e orienta o usuário de forma amigável.</a:t>
+            </a:r>
+          </a:p>
+          <a:p>
             <a:br/>
-            <a:r>
-              <a:t> 0 erros de sintaxe e 0 alertas de React em todo o projeto.</a:t>
-            </a:r>
-          </a:p>
-          <a:p>
-            <a:br/>
-            <a:pPr>
-              <a:defRPr sz="1200">
+            <a:pPr>
+              <a:defRPr sz="1150">
                 <a:solidFill>
                   <a:srgbClr val="1E293B"/>
                 </a:solidFill>
-                <a:latin typeface="Arial"/>
-              </a:defRPr>
-            </a:pPr>
-            <a:r>
-              <a:t>• Validação de Formulários:</a:t>
-            </a:r>
-            <a:br/>
-            <a:r>
-              <a:t> Bloqueio de campos em branco com alertas nativos amigáveis.</a:t>
-            </a:r>
-          </a:p>
-          <a:p>
-            <a:br/>
-            <a:pPr>
-              <a:defRPr sz="1200">
-                <a:solidFill>
-                  <a:srgbClr val="1E293B"/>
-                </a:solidFill>
-                <a:latin typeface="Arial"/>
-              </a:defRPr>
-            </a:pPr>
-            <a:r>
-              <a:t>• Teste em Celulares Reais:</a:t>
-            </a:r>
-            <a:br/>
-            <a:r>
-              <a:t> Testado em smartphones Android e iOS dos integrantes, avaliando toque, rolagem e botão PIX.</a:t>
+                <a:latin typeface="Segoe UI"/>
+              </a:defRPr>
+            </a:pPr>
+            <a:r>
+              <a:t>• Teste em Celulares Reais: Testamos botões de toque, teclado numérico e rolagem suave em dispositivos Android e iOS dos membros da equipe.</a:t>
             </a:r>
           </a:p>
         </p:txBody>
@@ -8692,8 +10896,8 @@
         </p:nvSpPr>
         <p:spPr>
           <a:xfrm>
-            <a:off x="548640" y="365760"/>
-            <a:ext cx="8686800" cy="731520"/>
+            <a:off x="731520" y="365760"/>
+            <a:ext cx="8412480" cy="685800"/>
           </a:xfrm>
           <a:prstGeom prst="rect">
             <a:avLst/>
@@ -8707,11 +10911,11 @@
           <a:lstStyle/>
           <a:p>
             <a:pPr>
-              <a:defRPr sz="2200" b="1">
+              <a:defRPr sz="2100" b="1">
                 <a:solidFill>
                   <a:srgbClr val="00873E"/>
                 </a:solidFill>
-                <a:latin typeface="Arial"/>
+                <a:latin typeface="Segoe UI"/>
               </a:defRPr>
             </a:pPr>
             <a:r>
@@ -8728,8 +10932,8 @@
         </p:nvSpPr>
         <p:spPr>
           <a:xfrm>
-            <a:off x="9326880" y="411480"/>
-            <a:ext cx="2286000" cy="365760"/>
+            <a:off x="9235440" y="411480"/>
+            <a:ext cx="2194560" cy="347472"/>
           </a:xfrm>
           <a:prstGeom prst="roundRect">
             <a:avLst/>
@@ -8737,7 +10941,7 @@
           <a:solidFill>
             <a:srgbClr val="F8FAFC"/>
           </a:solidFill>
-          <a:ln>
+          <a:ln w="12700">
             <a:solidFill>
               <a:srgbClr val="E2E8F0"/>
             </a:solidFill>
@@ -8758,19 +10962,19 @@
           </a:fontRef>
         </p:style>
         <p:txBody>
-          <a:bodyPr rtlCol="0" anchor="ctr" wrap="none"/>
+          <a:bodyPr rtlCol="0" anchor="ctr" tIns="54864"/>
           <a:lstStyle/>
           <a:p>
             <a:pPr algn="ctr">
-              <a:defRPr sz="1100" b="1">
+              <a:defRPr sz="1000" b="1">
                 <a:solidFill>
                   <a:srgbClr val="64748B"/>
                 </a:solidFill>
-                <a:latin typeface="Arial"/>
-              </a:defRPr>
-            </a:pPr>
-            <a:r>
-              <a:t>5. Publicação &amp; Hospedagem</a:t>
+                <a:latin typeface="Segoe UI"/>
+              </a:defRPr>
+            </a:pPr>
+            <a:r>
+              <a:t>5. PUBLICAÇÃO &amp; HOSPEDAGEM</a:t>
             </a:r>
           </a:p>
         </p:txBody>
@@ -8783,8 +10987,8 @@
         </p:nvSpPr>
         <p:spPr>
           <a:xfrm>
-            <a:off x="548640" y="1097280"/>
-            <a:ext cx="11094415" cy="18288"/>
+            <a:off x="731520" y="1051560"/>
+            <a:ext cx="10728655" cy="13716"/>
           </a:xfrm>
           <a:prstGeom prst="rect">
             <a:avLst/>
@@ -8793,9 +10997,7 @@
             <a:srgbClr val="E2E8F0"/>
           </a:solidFill>
           <a:ln>
-            <a:solidFill>
-              <a:srgbClr val="E2E8F0"/>
-            </a:solidFill>
+            <a:noFill/>
           </a:ln>
         </p:spPr>
         <p:style>
@@ -8828,8 +11030,8 @@
         </p:nvSpPr>
         <p:spPr>
           <a:xfrm>
-            <a:off x="548640" y="6263640"/>
-            <a:ext cx="11094415" cy="18288"/>
+            <a:off x="731520" y="6263640"/>
+            <a:ext cx="10728655" cy="13716"/>
           </a:xfrm>
           <a:prstGeom prst="rect">
             <a:avLst/>
@@ -8838,9 +11040,7 @@
             <a:srgbClr val="E2E8F0"/>
           </a:solidFill>
           <a:ln>
-            <a:solidFill>
-              <a:srgbClr val="E2E8F0"/>
-            </a:solidFill>
+            <a:noFill/>
           </a:ln>
         </p:spPr>
         <p:style>
@@ -8873,7 +11073,7 @@
         </p:nvSpPr>
         <p:spPr>
           <a:xfrm>
-            <a:off x="548640" y="6327648"/>
+            <a:off x="731520" y="6327648"/>
             <a:ext cx="5486400" cy="320040"/>
           </a:xfrm>
           <a:prstGeom prst="rect">
@@ -8888,15 +11088,15 @@
           <a:lstStyle/>
           <a:p>
             <a:pPr>
-              <a:defRPr sz="1000">
+              <a:defRPr sz="950">
                 <a:solidFill>
                   <a:srgbClr val="64748B"/>
                 </a:solidFill>
-                <a:latin typeface="Arial"/>
-              </a:defRPr>
-            </a:pPr>
-            <a:r>
-              <a:t>Timbiras Solidária — ADS UEMA 2026 | Polo Timbiras</a:t>
+                <a:latin typeface="Segoe UI"/>
+              </a:defRPr>
+            </a:pPr>
+            <a:r>
+              <a:t>Timbiras Solidária — ADS UEMA 2026 | Polo Universitário de Timbiras</a:t>
             </a:r>
           </a:p>
         </p:txBody>
@@ -8909,8 +11109,8 @@
         </p:nvSpPr>
         <p:spPr>
           <a:xfrm>
-            <a:off x="9144000" y="6327648"/>
-            <a:ext cx="2499055" cy="320040"/>
+            <a:off x="8686800" y="6327648"/>
+            <a:ext cx="2773375" cy="320040"/>
           </a:xfrm>
           <a:prstGeom prst="rect">
             <a:avLst/>
@@ -8924,11 +11124,11 @@
           <a:lstStyle/>
           <a:p>
             <a:pPr algn="r">
-              <a:defRPr sz="1000" b="1">
+              <a:defRPr sz="950" b="1">
                 <a:solidFill>
                   <a:srgbClr val="64748B"/>
                 </a:solidFill>
-                <a:latin typeface="Arial"/>
+                <a:latin typeface="Segoe UI"/>
               </a:defRPr>
             </a:pPr>
             <a:r>
@@ -8945,8 +11145,8 @@
         </p:nvSpPr>
         <p:spPr>
           <a:xfrm>
-            <a:off x="548640" y="1371600"/>
-            <a:ext cx="11094415" cy="548640"/>
+            <a:off x="731520" y="1234440"/>
+            <a:ext cx="10728655" cy="548640"/>
           </a:xfrm>
           <a:prstGeom prst="rect">
             <a:avLst/>
@@ -8964,7 +11164,7 @@
                 <a:solidFill>
                   <a:srgbClr val="64748B"/>
                 </a:solidFill>
-                <a:latin typeface="Arial"/>
+                <a:latin typeface="Segoe UI"/>
               </a:defRPr>
             </a:pPr>
             <a:r>
@@ -8981,8 +11181,8 @@
         </p:nvSpPr>
         <p:spPr>
           <a:xfrm>
-            <a:off x="1097280" y="2103120"/>
-            <a:ext cx="4754880" cy="3291840"/>
+            <a:off x="1188720" y="1965960"/>
+            <a:ext cx="4663440" cy="3474720"/>
           </a:xfrm>
           <a:prstGeom prst="roundRect">
             <a:avLst/>
@@ -8990,7 +11190,7 @@
           <a:solidFill>
             <a:srgbClr val="FFFFFF"/>
           </a:solidFill>
-          <a:ln>
+          <a:ln w="12700">
             <a:solidFill>
               <a:srgbClr val="00873E"/>
             </a:solidFill>
@@ -9011,15 +11211,41 @@
           </a:fontRef>
         </p:style>
         <p:txBody>
-          <a:bodyPr rtlCol="0" anchor="ctr" wrap="square" lIns="274320" tIns="274320" rIns="274320" bIns="274320"/>
+          <a:bodyPr rtlCol="0" anchor="ctr"/>
+          <a:lstStyle/>
+          <a:p>
+            <a:pPr algn="ctr"/>
+          </a:p>
+        </p:txBody>
+      </p:sp>
+      <p:sp>
+        <p:nvSpPr>
+          <p:cNvPr id="10" name="TextBox 9"/>
+          <p:cNvSpPr txBox="1"/>
+          <p:nvPr/>
+        </p:nvSpPr>
+        <p:spPr>
+          <a:xfrm>
+            <a:off x="1371600" y="2194560"/>
+            <a:ext cx="4297680" cy="3017520"/>
+          </a:xfrm>
+          <a:prstGeom prst="rect">
+            <a:avLst/>
+          </a:prstGeom>
+          <a:noFill/>
+        </p:spPr>
+        <p:txBody>
+          <a:bodyPr wrap="square">
+            <a:spAutoFit/>
+          </a:bodyPr>
           <a:lstStyle/>
           <a:p>
             <a:pPr algn="ctr">
-              <a:defRPr sz="1800" b="1">
+              <a:defRPr sz="1700" b="1">
                 <a:solidFill>
                   <a:srgbClr val="00873E"/>
                 </a:solidFill>
-                <a:latin typeface="Arial"/>
+                <a:latin typeface="Segoe UI"/>
               </a:defRPr>
             </a:pPr>
             <a:r>
@@ -9029,11 +11255,11 @@
           <a:p>
             <a:br/>
             <a:pPr algn="ctr">
-              <a:defRPr sz="1200">
-                <a:solidFill>
-                  <a:srgbClr val="1E293B"/>
-                </a:solidFill>
-                <a:latin typeface="Arial"/>
+              <a:defRPr sz="1150">
+                <a:solidFill>
+                  <a:srgbClr val="64748B"/>
+                </a:solidFill>
+                <a:latin typeface="Segoe UI"/>
               </a:defRPr>
             </a:pPr>
             <a:r>
@@ -9043,11 +11269,11 @@
           <a:p>
             <a:br/>
             <a:pPr algn="ctr">
-              <a:defRPr sz="1100" b="1">
+              <a:defRPr sz="1050" b="1">
                 <a:solidFill>
                   <a:srgbClr val="00873E"/>
                 </a:solidFill>
-                <a:latin typeface="Courier New"/>
+                <a:latin typeface="Consolas"/>
               </a:defRPr>
             </a:pPr>
             <a:r>
@@ -9058,14 +11284,14 @@
       </p:sp>
       <p:sp>
         <p:nvSpPr>
-          <p:cNvPr id="10" name="Rounded Rectangle 9"/>
+          <p:cNvPr id="11" name="Rounded Rectangle 10"/>
           <p:cNvSpPr/>
           <p:nvPr/>
         </p:nvSpPr>
         <p:spPr>
           <a:xfrm>
-            <a:off x="6309360" y="2103120"/>
-            <a:ext cx="4754880" cy="3291840"/>
+            <a:off x="6339535" y="1965960"/>
+            <a:ext cx="4663440" cy="3474720"/>
           </a:xfrm>
           <a:prstGeom prst="roundRect">
             <a:avLst/>
@@ -9073,7 +11299,7 @@
           <a:solidFill>
             <a:srgbClr val="FFFFFF"/>
           </a:solidFill>
-          <a:ln>
+          <a:ln w="12700">
             <a:solidFill>
               <a:srgbClr val="0284C7"/>
             </a:solidFill>
@@ -9094,15 +11320,41 @@
           </a:fontRef>
         </p:style>
         <p:txBody>
-          <a:bodyPr rtlCol="0" anchor="ctr" wrap="square" lIns="274320" tIns="274320" rIns="274320" bIns="274320"/>
+          <a:bodyPr rtlCol="0" anchor="ctr"/>
+          <a:lstStyle/>
+          <a:p>
+            <a:pPr algn="ctr"/>
+          </a:p>
+        </p:txBody>
+      </p:sp>
+      <p:sp>
+        <p:nvSpPr>
+          <p:cNvPr id="12" name="TextBox 11"/>
+          <p:cNvSpPr txBox="1"/>
+          <p:nvPr/>
+        </p:nvSpPr>
+        <p:spPr>
+          <a:xfrm>
+            <a:off x="6522415" y="2194560"/>
+            <a:ext cx="4297680" cy="3017520"/>
+          </a:xfrm>
+          <a:prstGeom prst="rect">
+            <a:avLst/>
+          </a:prstGeom>
+          <a:noFill/>
+        </p:spPr>
+        <p:txBody>
+          <a:bodyPr wrap="square">
+            <a:spAutoFit/>
+          </a:bodyPr>
           <a:lstStyle/>
           <a:p>
             <a:pPr algn="ctr">
-              <a:defRPr sz="1800" b="1">
+              <a:defRPr sz="1700" b="1">
                 <a:solidFill>
                   <a:srgbClr val="0284C7"/>
                 </a:solidFill>
-                <a:latin typeface="Arial"/>
+                <a:latin typeface="Segoe UI"/>
               </a:defRPr>
             </a:pPr>
             <a:r>
@@ -9112,11 +11364,11 @@
           <a:p>
             <a:br/>
             <a:pPr algn="ctr">
-              <a:defRPr sz="1200">
-                <a:solidFill>
-                  <a:srgbClr val="1E293B"/>
-                </a:solidFill>
-                <a:latin typeface="Arial"/>
+              <a:defRPr sz="1150">
+                <a:solidFill>
+                  <a:srgbClr val="64748B"/>
+                </a:solidFill>
+                <a:latin typeface="Segoe UI"/>
               </a:defRPr>
             </a:pPr>
             <a:r>
@@ -9126,11 +11378,11 @@
           <a:p>
             <a:br/>
             <a:pPr algn="ctr">
-              <a:defRPr sz="1100" b="1">
+              <a:defRPr sz="1050" b="1">
                 <a:solidFill>
                   <a:srgbClr val="0284C7"/>
                 </a:solidFill>
-                <a:latin typeface="Courier New"/>
+                <a:latin typeface="Consolas"/>
               </a:defRPr>
             </a:pPr>
             <a:r>
@@ -9141,14 +11393,14 @@
       </p:sp>
       <p:sp>
         <p:nvSpPr>
-          <p:cNvPr id="11" name="Rounded Rectangle 10"/>
+          <p:cNvPr id="13" name="Rounded Rectangle 12"/>
           <p:cNvSpPr/>
           <p:nvPr/>
         </p:nvSpPr>
         <p:spPr>
           <a:xfrm>
-            <a:off x="1097280" y="5577840"/>
-            <a:ext cx="9966960" cy="502920"/>
+            <a:off x="1188720" y="5623560"/>
+            <a:ext cx="9814255" cy="457200"/>
           </a:xfrm>
           <a:prstGeom prst="roundRect">
             <a:avLst/>
@@ -9156,9 +11408,9 @@
           <a:solidFill>
             <a:srgbClr val="F0FDF4"/>
           </a:solidFill>
-          <a:ln>
+          <a:ln w="12700">
             <a:solidFill>
-              <a:srgbClr val="10B981"/>
+              <a:srgbClr val="BBF7D0"/>
             </a:solidFill>
           </a:ln>
         </p:spPr>
@@ -9180,12 +11432,38 @@
           <a:bodyPr rtlCol="0" anchor="ctr"/>
           <a:lstStyle/>
           <a:p>
+            <a:pPr algn="ctr"/>
+          </a:p>
+        </p:txBody>
+      </p:sp>
+      <p:sp>
+        <p:nvSpPr>
+          <p:cNvPr id="14" name="TextBox 13"/>
+          <p:cNvSpPr txBox="1"/>
+          <p:nvPr/>
+        </p:nvSpPr>
+        <p:spPr>
+          <a:xfrm>
+            <a:off x="1371600" y="5687568"/>
+            <a:ext cx="9448495" cy="320040"/>
+          </a:xfrm>
+          <a:prstGeom prst="rect">
+            <a:avLst/>
+          </a:prstGeom>
+          <a:noFill/>
+        </p:spPr>
+        <p:txBody>
+          <a:bodyPr wrap="none">
+            <a:spAutoFit/>
+          </a:bodyPr>
+          <a:lstStyle/>
+          <a:p>
             <a:pPr algn="ctr">
-              <a:defRPr sz="1200" b="1">
+              <a:defRPr sz="1100" b="1">
                 <a:solidFill>
                   <a:srgbClr val="00873E"/>
                 </a:solidFill>
-                <a:latin typeface="Arial"/>
+                <a:latin typeface="Segoe UI"/>
               </a:defRPr>
             </a:pPr>
             <a:r>

--- a/public/Relatorio_Atividade_2_Slides.pptx
+++ b/public/Relatorio_Atividade_2_Slides.pptx
@@ -3145,20 +3145,164 @@
       </p:sp>
       <p:sp>
         <p:nvSpPr>
-          <p:cNvPr id="3" name="Rounded Rectangle 2"/>
+          <p:cNvPr id="3" name="TextBox 2"/>
+          <p:cNvSpPr txBox="1"/>
+          <p:nvPr/>
+        </p:nvSpPr>
+        <p:spPr>
+          <a:xfrm>
+            <a:off x="822960" y="274320"/>
+            <a:ext cx="6858000" cy="1508760"/>
+          </a:xfrm>
+          <a:prstGeom prst="rect">
+            <a:avLst/>
+          </a:prstGeom>
+          <a:noFill/>
+        </p:spPr>
+        <p:txBody>
+          <a:bodyPr wrap="square" lIns="0" tIns="0" rIns="0" bIns="0">
+            <a:spAutoFit/>
+          </a:bodyPr>
+          <a:lstStyle/>
+          <a:p>
+            <a:pPr>
+              <a:defRPr sz="1150" b="1">
+                <a:solidFill>
+                  <a:srgbClr val="FFFFFF"/>
+                </a:solidFill>
+                <a:latin typeface="Segoe UI"/>
+              </a:defRPr>
+            </a:pPr>
+            <a:r>
+              <a:t>UNIVERSIDADE ESTADUAL DO MARANHÃO – UEMA</a:t>
+            </a:r>
+          </a:p>
+          <a:p>
+            <a:pPr>
+              <a:defRPr sz="1050" b="1">
+                <a:solidFill>
+                  <a:srgbClr val="4ADE80"/>
+                </a:solidFill>
+                <a:latin typeface="Segoe UI"/>
+              </a:defRPr>
+            </a:pPr>
+            <a:r>
+              <a:t>NÚCLEO DE TECNOLOGIAS PARA EDUCAÇÃO – UEMANET</a:t>
+            </a:r>
+          </a:p>
+          <a:p>
+            <a:pPr>
+              <a:defRPr sz="950" b="1">
+                <a:solidFill>
+                  <a:srgbClr val="E2E8F0"/>
+                </a:solidFill>
+                <a:latin typeface="Segoe UI"/>
+              </a:defRPr>
+            </a:pPr>
+            <a:r>
+              <a:t>CURSO SUPERIOR DE TECNOLOGIA EM ANÁLISE E DESENVOLVIMENTO DE SISTEMAS</a:t>
+            </a:r>
+          </a:p>
+          <a:p>
+            <a:pPr>
+              <a:defRPr sz="900" b="1">
+                <a:solidFill>
+                  <a:srgbClr val="CBD5E1"/>
+                </a:solidFill>
+                <a:latin typeface="Segoe UI"/>
+              </a:defRPr>
+            </a:pPr>
+            <a:r>
+              <a:t>DISCIPLINA: DESENVOLVIMENTO WEB</a:t>
+            </a:r>
+          </a:p>
+          <a:p>
+            <a:pPr>
+              <a:defRPr sz="900" b="1">
+                <a:solidFill>
+                  <a:srgbClr val="CBD5E1"/>
+                </a:solidFill>
+                <a:latin typeface="Segoe UI"/>
+              </a:defRPr>
+            </a:pPr>
+            <a:r>
+              <a:t>DOCENTE: PROF. EDILSON CARLOS SILVA LIMA</a:t>
+            </a:r>
+          </a:p>
+          <a:p>
+            <a:pPr>
+              <a:defRPr sz="900" b="1">
+                <a:solidFill>
+                  <a:srgbClr val="CBD5E1"/>
+                </a:solidFill>
+                <a:latin typeface="Segoe UI"/>
+              </a:defRPr>
+            </a:pPr>
+            <a:r>
+              <a:t>TUTORA: PROF.ª SIMONE</a:t>
+            </a:r>
+          </a:p>
+        </p:txBody>
+      </p:sp>
+      <p:sp>
+        <p:nvSpPr>
+          <p:cNvPr id="4" name="Rectangle 3"/>
           <p:cNvSpPr/>
           <p:nvPr/>
         </p:nvSpPr>
         <p:spPr>
           <a:xfrm>
-            <a:off x="2011680" y="685800"/>
-            <a:ext cx="8168335" cy="438912"/>
+            <a:off x="822960" y="1783080"/>
+            <a:ext cx="10545775" cy="13716"/>
+          </a:xfrm>
+          <a:prstGeom prst="rect">
+            <a:avLst/>
+          </a:prstGeom>
+          <a:solidFill>
+            <a:srgbClr val="166534"/>
+          </a:solidFill>
+          <a:ln>
+            <a:noFill/>
+          </a:ln>
+        </p:spPr>
+        <p:style>
+          <a:lnRef idx="1">
+            <a:schemeClr val="accent1"/>
+          </a:lnRef>
+          <a:fillRef idx="3">
+            <a:schemeClr val="accent1"/>
+          </a:fillRef>
+          <a:effectRef idx="2">
+            <a:schemeClr val="accent1"/>
+          </a:effectRef>
+          <a:fontRef idx="minor">
+            <a:schemeClr val="lt1"/>
+          </a:fontRef>
+        </p:style>
+        <p:txBody>
+          <a:bodyPr rtlCol="0" anchor="ctr"/>
+          <a:lstStyle/>
+          <a:p>
+            <a:pPr algn="ctr"/>
+          </a:p>
+        </p:txBody>
+      </p:sp>
+      <p:sp>
+        <p:nvSpPr>
+          <p:cNvPr id="5" name="Rounded Rectangle 4"/>
+          <p:cNvSpPr/>
+          <p:nvPr/>
+        </p:nvSpPr>
+        <p:spPr>
+          <a:xfrm>
+            <a:off x="2926080" y="1965960"/>
+            <a:ext cx="6339535" cy="365760"/>
           </a:xfrm>
           <a:prstGeom prst="roundRect">
             <a:avLst/>
           </a:prstGeom>
           <a:solidFill>
-            <a:srgbClr val="0F3D24"/>
+            <a:srgbClr val="0C321D"/>
           </a:solidFill>
           <a:ln w="15240">
             <a:solidFill>
@@ -3181,83 +3325,11 @@
           </a:fontRef>
         </p:style>
         <p:txBody>
-          <a:bodyPr rtlCol="0" anchor="ctr" tIns="73152"/>
+          <a:bodyPr rtlCol="0" anchor="ctr" tIns="54864"/>
           <a:lstStyle/>
           <a:p>
             <a:pPr algn="ctr">
-              <a:defRPr sz="1200" b="1">
-                <a:solidFill>
-                  <a:srgbClr val="10B981"/>
-                </a:solidFill>
-                <a:latin typeface="Segoe UI"/>
-              </a:defRPr>
-            </a:pPr>
-            <a:r>
-              <a:t>UNIVERSIDADE ESTADUAL DO MARANHÃO — UEMA</a:t>
-            </a:r>
-          </a:p>
-        </p:txBody>
-      </p:sp>
-      <p:sp>
-        <p:nvSpPr>
-          <p:cNvPr id="4" name="TextBox 3"/>
-          <p:cNvSpPr txBox="1"/>
-          <p:nvPr/>
-        </p:nvSpPr>
-        <p:spPr>
-          <a:xfrm>
-            <a:off x="1371600" y="1234440"/>
-            <a:ext cx="9448495" cy="457200"/>
-          </a:xfrm>
-          <a:prstGeom prst="rect">
-            <a:avLst/>
-          </a:prstGeom>
-          <a:noFill/>
-        </p:spPr>
-        <p:txBody>
-          <a:bodyPr wrap="none">
-            <a:spAutoFit/>
-          </a:bodyPr>
-          <a:lstStyle/>
-          <a:p>
-            <a:pPr algn="ctr">
-              <a:defRPr sz="1300">
-                <a:solidFill>
-                  <a:srgbClr val="CBD5E1"/>
-                </a:solidFill>
-                <a:latin typeface="Segoe UI"/>
-              </a:defRPr>
-            </a:pPr>
-            <a:r>
-              <a:t>CST em Análise e Desenvolvimento de Sistemas  |  Desenvolvimento Web  |  Nota 2</a:t>
-            </a:r>
-          </a:p>
-        </p:txBody>
-      </p:sp>
-      <p:sp>
-        <p:nvSpPr>
-          <p:cNvPr id="5" name="TextBox 4"/>
-          <p:cNvSpPr txBox="1"/>
-          <p:nvPr/>
-        </p:nvSpPr>
-        <p:spPr>
-          <a:xfrm>
-            <a:off x="1371600" y="1874519"/>
-            <a:ext cx="9448495" cy="1188720"/>
-          </a:xfrm>
-          <a:prstGeom prst="rect">
-            <a:avLst/>
-          </a:prstGeom>
-          <a:noFill/>
-        </p:spPr>
-        <p:txBody>
-          <a:bodyPr wrap="none">
-            <a:spAutoFit/>
-          </a:bodyPr>
-          <a:lstStyle/>
-          <a:p>
-            <a:pPr algn="ctr">
-              <a:defRPr sz="4600" b="1">
+              <a:defRPr sz="1100" b="1">
                 <a:solidFill>
                   <a:srgbClr val="4ADE80"/>
                 </a:solidFill>
@@ -3265,7 +3337,7 @@
               </a:defRPr>
             </a:pPr>
             <a:r>
-              <a:t>Timbiras Solidária 🏹</a:t>
+              <a:t>TECNOLOGIA A SERVIÇO DA VIDA  •  ODS 2 &amp; ODS 11</a:t>
             </a:r>
           </a:p>
         </p:txBody>
@@ -3278,8 +3350,8 @@
         </p:nvSpPr>
         <p:spPr>
           <a:xfrm>
-            <a:off x="1645920" y="3154680"/>
-            <a:ext cx="8899855" cy="1005840"/>
+            <a:off x="1371600" y="2423160"/>
+            <a:ext cx="9448495" cy="1097280"/>
           </a:xfrm>
           <a:prstGeom prst="rect">
             <a:avLst/>
@@ -3292,8 +3364,61 @@
           </a:bodyPr>
           <a:lstStyle/>
           <a:p>
+            <a:pPr algn="ctr"/>
+            <a:r>
+              <a:rPr sz="4600" b="1">
+                <a:solidFill>
+                  <a:srgbClr val="FFFFFF"/>
+                </a:solidFill>
+                <a:latin typeface="Segoe UI"/>
+              </a:rPr>
+              <a:t>TIMBIRAS </a:t>
+            </a:r>
+            <a:r>
+              <a:rPr sz="4600" b="1">
+                <a:solidFill>
+                  <a:srgbClr val="4ADE80"/>
+                </a:solidFill>
+                <a:latin typeface="Segoe UI"/>
+              </a:rPr>
+              <a:t>SOLIDÁRIA </a:t>
+            </a:r>
+            <a:r>
+              <a:rPr sz="4000">
+                <a:solidFill>
+                  <a:srgbClr val="FFFFFF"/>
+                </a:solidFill>
+                <a:latin typeface="Segoe UI"/>
+              </a:rPr>
+              <a:t>🏹</a:t>
+            </a:r>
+          </a:p>
+        </p:txBody>
+      </p:sp>
+      <p:sp>
+        <p:nvSpPr>
+          <p:cNvPr id="7" name="TextBox 6"/>
+          <p:cNvSpPr txBox="1"/>
+          <p:nvPr/>
+        </p:nvSpPr>
+        <p:spPr>
+          <a:xfrm>
+            <a:off x="1645920" y="3566160"/>
+            <a:ext cx="8899855" cy="1005840"/>
+          </a:xfrm>
+          <a:prstGeom prst="rect">
+            <a:avLst/>
+          </a:prstGeom>
+          <a:noFill/>
+        </p:spPr>
+        <p:txBody>
+          <a:bodyPr wrap="square">
+            <a:spAutoFit/>
+          </a:bodyPr>
+          <a:lstStyle/>
+          <a:p>
             <a:pPr algn="ctr">
-              <a:defRPr sz="1700">
+              <a:defRPr sz="1600">
                 <a:solidFill>
                   <a:srgbClr val="F1F5F9"/>
                 </a:solidFill>
@@ -3301,21 +3426,34 @@
               </a:defRPr>
             </a:pPr>
             <a:r>
-              <a:t>Como a tecnologia web pode encurtar distâncias, combater a fome e unir uma comunidade inteira em torno do ODS 2 da ONU.</a:t>
-            </a:r>
-          </a:p>
-        </p:txBody>
-      </p:sp>
-      <p:sp>
-        <p:nvSpPr>
-          <p:cNvPr id="7" name="Rounded Rectangle 6"/>
+              <a:t>Plataforma Web Comunitária de Mapeamento, Solidariedade e Resiliência Alimentar no Interior do Maranhão</a:t>
+            </a:r>
+          </a:p>
+          <a:p>
+            <a:pPr algn="ctr">
+              <a:defRPr sz="1250">
+                <a:solidFill>
+                  <a:srgbClr val="CBD5E1"/>
+                </a:solidFill>
+                <a:latin typeface="Segoe UI"/>
+              </a:defRPr>
+            </a:pPr>
+            <a:r>
+              <a:t>Uma ponte digital entre a generosidade de quem pode doar e a dignidade de quem precisa receber</a:t>
+            </a:r>
+          </a:p>
+        </p:txBody>
+      </p:sp>
+      <p:sp>
+        <p:nvSpPr>
+          <p:cNvPr id="8" name="Rounded Rectangle 7"/>
           <p:cNvSpPr/>
           <p:nvPr/>
         </p:nvSpPr>
         <p:spPr>
           <a:xfrm>
-            <a:off x="1645920" y="4434840"/>
-            <a:ext cx="8899855" cy="1600200"/>
+            <a:off x="1645920" y="4754880"/>
+            <a:ext cx="8899855" cy="1508760"/>
           </a:xfrm>
           <a:prstGeom prst="roundRect">
             <a:avLst/>
@@ -3344,11 +3482,11 @@
           </a:fontRef>
         </p:style>
         <p:txBody>
-          <a:bodyPr rtlCol="0" anchor="ctr" tIns="182880"/>
+          <a:bodyPr rtlCol="0" anchor="ctr" tIns="164592"/>
           <a:lstStyle/>
           <a:p>
             <a:pPr algn="ctr">
-              <a:defRPr sz="1300" b="1">
+              <a:defRPr sz="1250" b="1">
                 <a:solidFill>
                   <a:srgbClr val="4ADE80"/>
                 </a:solidFill>
@@ -3374,7 +3512,7 @@
           </a:p>
           <a:p>
             <a:pPr algn="ctr">
-              <a:defRPr sz="1200">
+              <a:defRPr sz="1150">
                 <a:solidFill>
                   <a:srgbClr val="94A3B8"/>
                 </a:solidFill>
@@ -3721,7 +3859,7 @@
           </a:bodyPr>
           <a:lstStyle/>
           <a:p>
-            <a:pPr>
+            <a:pPr algn="just">
               <a:defRPr sz="1200" b="1">
                 <a:solidFill>
                   <a:srgbClr val="00873E"/>
@@ -3752,7 +3890,7 @@
         <p:spPr>
           <a:xfrm>
             <a:off x="868680" y="1737360"/>
-            <a:ext cx="4892040" cy="2653735"/>
+            <a:ext cx="4892040" cy="2750430"/>
           </a:xfrm>
           <a:prstGeom prst="rect">
             <a:avLst/>
@@ -3781,7 +3919,7 @@
           </a:bodyPr>
           <a:lstStyle/>
           <a:p>
-            <a:pPr>
+            <a:pPr algn="just">
               <a:defRPr sz="1000">
                 <a:solidFill>
                   <a:srgbClr val="64748B"/>
@@ -3893,7 +4031,7 @@
         <p:spPr>
           <a:xfrm>
             <a:off x="6400800" y="1737360"/>
-            <a:ext cx="4892040" cy="3874954"/>
+            <a:ext cx="4892040" cy="2750430"/>
           </a:xfrm>
           <a:prstGeom prst="rect">
             <a:avLst/>
@@ -3922,7 +4060,7 @@
           </a:bodyPr>
           <a:lstStyle/>
           <a:p>
-            <a:pPr>
+            <a:pPr algn="just">
               <a:defRPr sz="1000">
                 <a:solidFill>
                   <a:srgbClr val="64748B"/>
@@ -4301,7 +4439,7 @@
         <p:spPr>
           <a:xfrm>
             <a:off x="868680" y="1737360"/>
-            <a:ext cx="4892040" cy="3334180"/>
+            <a:ext cx="4892040" cy="2750430"/>
           </a:xfrm>
           <a:prstGeom prst="rect">
             <a:avLst/>
@@ -4330,7 +4468,7 @@
           </a:bodyPr>
           <a:lstStyle/>
           <a:p>
-            <a:pPr>
+            <a:pPr algn="just">
               <a:defRPr sz="1000">
                 <a:solidFill>
                   <a:srgbClr val="64748B"/>
@@ -4442,7 +4580,7 @@
         <p:spPr>
           <a:xfrm>
             <a:off x="6400800" y="1737360"/>
-            <a:ext cx="4892040" cy="3688727"/>
+            <a:ext cx="4892040" cy="2750430"/>
           </a:xfrm>
           <a:prstGeom prst="rect">
             <a:avLst/>
@@ -4471,7 +4609,7 @@
           </a:bodyPr>
           <a:lstStyle/>
           <a:p>
-            <a:pPr>
+            <a:pPr algn="just">
               <a:defRPr sz="1000">
                 <a:solidFill>
                   <a:srgbClr val="64748B"/>
@@ -4915,7 +5053,7 @@
           </a:bodyPr>
           <a:lstStyle/>
           <a:p>
-            <a:pPr>
+            <a:pPr algn="just">
               <a:defRPr sz="1600" b="1">
                 <a:solidFill>
                   <a:srgbClr val="00873E"/>
@@ -4928,7 +5066,7 @@
             </a:r>
           </a:p>
           <a:p>
-            <a:pPr>
+            <a:pPr algn="just">
               <a:defRPr sz="1150">
                 <a:solidFill>
                   <a:srgbClr val="64748B"/>
@@ -5065,7 +5203,7 @@
             </a:r>
           </a:p>
           <a:p>
-            <a:pPr>
+            <a:pPr algn="just">
               <a:defRPr sz="1050">
                 <a:solidFill>
                   <a:srgbClr val="64748B"/>
@@ -5202,7 +5340,7 @@
             </a:r>
           </a:p>
           <a:p>
-            <a:pPr>
+            <a:pPr algn="just">
               <a:defRPr sz="1050">
                 <a:solidFill>
                   <a:srgbClr val="64748B"/>
@@ -5339,7 +5477,7 @@
             </a:r>
           </a:p>
           <a:p>
-            <a:pPr>
+            <a:pPr algn="just">
               <a:defRPr sz="1050">
                 <a:solidFill>
                   <a:srgbClr val="64748B"/>
@@ -5476,7 +5614,7 @@
             </a:r>
           </a:p>
           <a:p>
-            <a:pPr>
+            <a:pPr algn="just">
               <a:defRPr sz="1050">
                 <a:solidFill>
                   <a:srgbClr val="64748B"/>
@@ -5881,7 +6019,7 @@
           </a:p>
           <a:p>
             <a:br/>
-            <a:pPr>
+            <a:pPr algn="just">
               <a:defRPr sz="1150">
                 <a:solidFill>
                   <a:srgbClr val="1E293B"/>
@@ -6019,7 +6157,7 @@
           </a:p>
           <a:p>
             <a:br/>
-            <a:pPr>
+            <a:pPr algn="just">
               <a:defRPr sz="1150">
                 <a:solidFill>
                   <a:srgbClr val="1E293B"/>
@@ -6114,7 +6252,7 @@
           </a:p>
           <a:p>
             <a:br/>
-            <a:pPr>
+            <a:pPr algn="just">
               <a:defRPr sz="900">
                 <a:solidFill>
                   <a:srgbClr val="64748B"/>
@@ -6128,7 +6266,7 @@
           </a:p>
           <a:p>
             <a:br/>
-            <a:pPr>
+            <a:pPr algn="just">
               <a:defRPr sz="900">
                 <a:solidFill>
                   <a:srgbClr val="64748B"/>
@@ -6142,7 +6280,7 @@
           </a:p>
           <a:p>
             <a:br/>
-            <a:pPr>
+            <a:pPr algn="just">
               <a:defRPr sz="900">
                 <a:solidFill>
                   <a:srgbClr val="64748B"/>
@@ -6156,7 +6294,7 @@
           </a:p>
           <a:p>
             <a:br/>
-            <a:pPr>
+            <a:pPr algn="just">
               <a:defRPr sz="900">
                 <a:solidFill>
                   <a:srgbClr val="64748B"/>
@@ -6170,7 +6308,7 @@
           </a:p>
           <a:p>
             <a:br/>
-            <a:pPr>
+            <a:pPr algn="just">
               <a:defRPr sz="900">
                 <a:solidFill>
                   <a:srgbClr val="64748B"/>
@@ -6184,7 +6322,7 @@
           </a:p>
           <a:p>
             <a:br/>
-            <a:pPr>
+            <a:pPr algn="just">
               <a:defRPr sz="900">
                 <a:solidFill>
                   <a:srgbClr val="64748B"/>
@@ -6487,7 +6625,7 @@
           </a:bodyPr>
           <a:lstStyle/>
           <a:p>
-            <a:pPr>
+            <a:pPr algn="just">
               <a:defRPr sz="1550" b="1">
                 <a:solidFill>
                   <a:srgbClr val="1E293B"/>
@@ -6501,7 +6639,7 @@
           </a:p>
           <a:p>
             <a:br/>
-            <a:pPr>
+            <a:pPr algn="just">
               <a:defRPr sz="1250">
                 <a:solidFill>
                   <a:srgbClr val="64748B"/>
@@ -6639,7 +6777,7 @@
           </a:p>
           <a:p>
             <a:br/>
-            <a:pPr>
+            <a:pPr algn="just">
               <a:defRPr sz="1150">
                 <a:solidFill>
                   <a:srgbClr val="1E293B"/>
@@ -6733,7 +6871,7 @@
             </a:r>
           </a:p>
           <a:p>
-            <a:pPr>
+            <a:pPr algn="just">
               <a:defRPr sz="1150">
                 <a:solidFill>
                   <a:srgbClr val="1E293B"/>
@@ -6760,7 +6898,7 @@
             </a:r>
           </a:p>
           <a:p>
-            <a:pPr>
+            <a:pPr algn="just">
               <a:defRPr sz="1100">
                 <a:solidFill>
                   <a:srgbClr val="1E293B"/>
@@ -6773,7 +6911,7 @@
             </a:r>
           </a:p>
           <a:p>
-            <a:pPr>
+            <a:pPr algn="just">
               <a:defRPr sz="1100">
                 <a:solidFill>
                   <a:srgbClr val="1E293B"/>
@@ -6786,7 +6924,7 @@
             </a:r>
           </a:p>
           <a:p>
-            <a:pPr>
+            <a:pPr algn="just">
               <a:defRPr sz="1100">
                 <a:solidFill>
                   <a:srgbClr val="1E293B"/>
@@ -6799,7 +6937,7 @@
             </a:r>
           </a:p>
           <a:p>
-            <a:pPr>
+            <a:pPr algn="just">
               <a:defRPr sz="1100">
                 <a:solidFill>
                   <a:srgbClr val="1E293B"/>
@@ -7116,7 +7254,7 @@
           </a:p>
           <a:p>
             <a:br/>
-            <a:pPr>
+            <a:pPr algn="just">
               <a:defRPr sz="1200">
                 <a:solidFill>
                   <a:srgbClr val="64748B"/>
@@ -7130,7 +7268,7 @@
           </a:p>
           <a:p>
             <a:br/>
-            <a:pPr>
+            <a:pPr algn="just">
               <a:defRPr sz="1200">
                 <a:solidFill>
                   <a:srgbClr val="64748B"/>
@@ -7268,7 +7406,7 @@
           </a:p>
           <a:p>
             <a:br/>
-            <a:pPr>
+            <a:pPr algn="just">
               <a:defRPr sz="1150">
                 <a:solidFill>
                   <a:srgbClr val="1E293B"/>
@@ -7363,7 +7501,7 @@
           </a:p>
           <a:p>
             <a:br/>
-            <a:pPr>
+            <a:pPr algn="just">
               <a:defRPr sz="1150">
                 <a:solidFill>
                   <a:srgbClr val="1E293B"/>
@@ -7377,7 +7515,7 @@
           </a:p>
           <a:p>
             <a:br/>
-            <a:pPr>
+            <a:pPr algn="just">
               <a:defRPr sz="1150">
                 <a:solidFill>
                   <a:srgbClr val="1E293B"/>
@@ -7391,7 +7529,7 @@
           </a:p>
           <a:p>
             <a:br/>
-            <a:pPr>
+            <a:pPr algn="just">
               <a:defRPr sz="1150">
                 <a:solidFill>
                   <a:srgbClr val="1E293B"/>
@@ -7405,7 +7543,7 @@
           </a:p>
           <a:p>
             <a:br/>
-            <a:pPr>
+            <a:pPr algn="just">
               <a:defRPr sz="1150">
                 <a:solidFill>
                   <a:srgbClr val="1E293B"/>
@@ -7708,7 +7846,7 @@
           </a:bodyPr>
           <a:lstStyle/>
           <a:p>
-            <a:pPr>
+            <a:pPr algn="just">
               <a:defRPr sz="1550" b="1">
                 <a:solidFill>
                   <a:srgbClr val="00873E"/>
@@ -7721,7 +7859,7 @@
             </a:r>
           </a:p>
           <a:p>
-            <a:pPr>
+            <a:pPr algn="just">
               <a:defRPr sz="1200">
                 <a:solidFill>
                   <a:srgbClr val="64748B"/>
@@ -7858,7 +7996,7 @@
             </a:r>
           </a:p>
           <a:p>
-            <a:pPr>
+            <a:pPr algn="just">
               <a:defRPr sz="1050">
                 <a:solidFill>
                   <a:srgbClr val="1E293B"/>
@@ -7871,7 +8009,7 @@
             </a:r>
           </a:p>
           <a:p>
-            <a:pPr>
+            <a:pPr algn="just">
               <a:defRPr sz="1050">
                 <a:solidFill>
                   <a:srgbClr val="1E293B"/>
@@ -7884,7 +8022,7 @@
             </a:r>
           </a:p>
           <a:p>
-            <a:pPr>
+            <a:pPr algn="just">
               <a:defRPr sz="1050">
                 <a:solidFill>
                   <a:srgbClr val="1E293B"/>
@@ -7897,7 +8035,7 @@
             </a:r>
           </a:p>
           <a:p>
-            <a:pPr>
+            <a:pPr algn="just">
               <a:defRPr sz="1050">
                 <a:solidFill>
                   <a:srgbClr val="1E293B"/>
@@ -7933,7 +8071,7 @@
           </a:bodyPr>
           <a:lstStyle/>
           <a:p>
-            <a:pPr>
+            <a:pPr algn="just">
               <a:defRPr sz="1500" b="1">
                 <a:solidFill>
                   <a:srgbClr val="00873E"/>
@@ -7946,7 +8084,7 @@
             </a:r>
           </a:p>
           <a:p>
-            <a:pPr>
+            <a:pPr algn="just">
               <a:defRPr sz="1150">
                 <a:solidFill>
                   <a:srgbClr val="64748B"/>
@@ -8041,7 +8179,7 @@
           </a:p>
           <a:p>
             <a:br/>
-            <a:pPr>
+            <a:pPr algn="just">
               <a:defRPr sz="1100">
                 <a:solidFill>
                   <a:srgbClr val="1E293B"/>
@@ -8055,7 +8193,7 @@
           </a:p>
           <a:p>
             <a:br/>
-            <a:pPr>
+            <a:pPr algn="just">
               <a:defRPr sz="1100">
                 <a:solidFill>
                   <a:srgbClr val="1E293B"/>
@@ -8372,7 +8510,7 @@
           </a:p>
           <a:p>
             <a:br/>
-            <a:pPr>
+            <a:pPr algn="just">
               <a:defRPr sz="1200">
                 <a:solidFill>
                   <a:srgbClr val="64748B"/>
@@ -8453,7 +8591,7 @@
           </a:bodyPr>
           <a:lstStyle/>
           <a:p>
-            <a:pPr>
+            <a:pPr algn="l">
               <a:defRPr sz="1050" b="1">
                 <a:solidFill>
                   <a:srgbClr val="38BDF8"/>
@@ -8489,7 +8627,7 @@
           </a:bodyPr>
           <a:lstStyle/>
           <a:p>
-            <a:pPr>
+            <a:pPr algn="just">
               <a:defRPr sz="1150">
                 <a:solidFill>
                   <a:srgbClr val="1E293B"/>
@@ -8584,7 +8722,7 @@
           </a:p>
           <a:p>
             <a:br/>
-            <a:pPr>
+            <a:pPr algn="just">
               <a:defRPr sz="1100">
                 <a:solidFill>
                   <a:srgbClr val="1E293B"/>
@@ -8602,7 +8740,7 @@
           </a:p>
           <a:p>
             <a:br/>
-            <a:pPr>
+            <a:pPr algn="just">
               <a:defRPr sz="1100">
                 <a:solidFill>
                   <a:srgbClr val="1E293B"/>
@@ -8620,7 +8758,7 @@
           </a:p>
           <a:p>
             <a:br/>
-            <a:pPr>
+            <a:pPr algn="just">
               <a:defRPr sz="1100">
                 <a:solidFill>
                   <a:srgbClr val="1E293B"/>
@@ -8986,7 +9124,7 @@
           </a:p>
           <a:p>
             <a:br/>
-            <a:pPr>
+            <a:pPr algn="l">
               <a:defRPr sz="1050">
                 <a:solidFill>
                   <a:srgbClr val="E2E8F0"/>
@@ -9190,7 +9328,7 @@
           </a:p>
           <a:p>
             <a:br/>
-            <a:pPr>
+            <a:pPr algn="just">
               <a:defRPr sz="1150">
                 <a:solidFill>
                   <a:srgbClr val="1E293B"/>
@@ -9328,7 +9466,7 @@
           </a:p>
           <a:p>
             <a:br/>
-            <a:pPr>
+            <a:pPr algn="just">
               <a:defRPr sz="1150">
                 <a:solidFill>
                   <a:srgbClr val="1E293B"/>
@@ -9690,7 +9828,7 @@
           </a:p>
           <a:p>
             <a:br/>
-            <a:pPr>
+            <a:pPr algn="l">
               <a:defRPr sz="1000">
                 <a:solidFill>
                   <a:srgbClr val="1E293B"/>
@@ -9872,7 +10010,7 @@
           </a:p>
           <a:p>
             <a:br/>
-            <a:pPr>
+            <a:pPr algn="just">
               <a:defRPr sz="1150">
                 <a:solidFill>
                   <a:srgbClr val="1E293B"/>
@@ -9966,7 +10104,7 @@
             </a:r>
           </a:p>
           <a:p>
-            <a:pPr>
+            <a:pPr algn="just">
               <a:defRPr sz="1100">
                 <a:solidFill>
                   <a:srgbClr val="1E293B"/>
@@ -9979,7 +10117,7 @@
             </a:r>
           </a:p>
           <a:p>
-            <a:pPr>
+            <a:pPr algn="just">
               <a:defRPr sz="1100">
                 <a:solidFill>
                   <a:srgbClr val="1E293B"/>
@@ -9992,7 +10130,7 @@
             </a:r>
           </a:p>
           <a:p>
-            <a:pPr>
+            <a:pPr algn="just">
               <a:defRPr sz="1100">
                 <a:solidFill>
                   <a:srgbClr val="1E293B"/>
@@ -10005,7 +10143,7 @@
             </a:r>
           </a:p>
           <a:p>
-            <a:pPr>
+            <a:pPr algn="just">
               <a:defRPr sz="1100">
                 <a:solidFill>
                   <a:srgbClr val="1E293B"/>
@@ -10445,7 +10583,7 @@
             </a:r>
           </a:p>
           <a:p>
-            <a:pPr>
+            <a:pPr algn="just">
               <a:defRPr sz="1050">
                 <a:solidFill>
                   <a:srgbClr val="64748B"/>
@@ -10582,7 +10720,7 @@
             </a:r>
           </a:p>
           <a:p>
-            <a:pPr>
+            <a:pPr algn="just">
               <a:defRPr sz="1050">
                 <a:solidFill>
                   <a:srgbClr val="64748B"/>
@@ -10719,7 +10857,7 @@
             </a:r>
           </a:p>
           <a:p>
-            <a:pPr>
+            <a:pPr algn="just">
               <a:defRPr sz="1050">
                 <a:solidFill>
                   <a:srgbClr val="64748B"/>
@@ -10814,7 +10952,7 @@
           </a:p>
           <a:p>
             <a:br/>
-            <a:pPr>
+            <a:pPr algn="just">
               <a:defRPr sz="1150">
                 <a:solidFill>
                   <a:srgbClr val="1E293B"/>
@@ -10828,7 +10966,7 @@
           </a:p>
           <a:p>
             <a:br/>
-            <a:pPr>
+            <a:pPr algn="just">
               <a:defRPr sz="1150">
                 <a:solidFill>
                   <a:srgbClr val="1E293B"/>
@@ -10842,7 +10980,7 @@
           </a:p>
           <a:p>
             <a:br/>
-            <a:pPr>
+            <a:pPr algn="just">
               <a:defRPr sz="1150">
                 <a:solidFill>
                   <a:srgbClr val="1E293B"/>
@@ -10856,7 +10994,7 @@
           </a:p>
           <a:p>
             <a:br/>
-            <a:pPr>
+            <a:pPr algn="just">
               <a:defRPr sz="1150">
                 <a:solidFill>
                   <a:srgbClr val="1E293B"/>
@@ -11268,7 +11406,7 @@
           </a:p>
           <a:p>
             <a:br/>
-            <a:pPr algn="ctr">
+            <a:pPr algn="l">
               <a:defRPr sz="1050" b="1">
                 <a:solidFill>
                   <a:srgbClr val="00873E"/>
@@ -11377,7 +11515,7 @@
           </a:p>
           <a:p>
             <a:br/>
-            <a:pPr algn="ctr">
+            <a:pPr algn="l">
               <a:defRPr sz="1050" b="1">
                 <a:solidFill>
                   <a:srgbClr val="0284C7"/>
